--- a/test_output.pptx
+++ b/test_output.pptx
@@ -3313,8 +3313,8 @@
         </p:blipFill>
         <p:spPr>
           <a:xfrm>
-            <a:off x="10634472" y="91440"/>
-            <a:ext cx="1371600" cy="548640"/>
+            <a:off x="10040112" y="73152"/>
+            <a:ext cx="2011680" cy="625706"/>
           </a:xfrm>
           <a:prstGeom prst="rect">
             <a:avLst/>
@@ -3637,8 +3637,8 @@
         </p:blipFill>
         <p:spPr>
           <a:xfrm>
-            <a:off x="10634472" y="91440"/>
-            <a:ext cx="1371600" cy="548640"/>
+            <a:off x="10040112" y="73152"/>
+            <a:ext cx="2011680" cy="625706"/>
           </a:xfrm>
           <a:prstGeom prst="rect">
             <a:avLst/>
@@ -3979,8 +3979,8 @@
         </p:blipFill>
         <p:spPr>
           <a:xfrm>
-            <a:off x="10634472" y="91440"/>
-            <a:ext cx="1371600" cy="548640"/>
+            <a:off x="10040112" y="73152"/>
+            <a:ext cx="2011680" cy="625706"/>
           </a:xfrm>
           <a:prstGeom prst="rect">
             <a:avLst/>
@@ -4321,8 +4321,8 @@
         </p:blipFill>
         <p:spPr>
           <a:xfrm>
-            <a:off x="10634472" y="91440"/>
-            <a:ext cx="1371600" cy="548640"/>
+            <a:off x="10040112" y="73152"/>
+            <a:ext cx="2011680" cy="625706"/>
           </a:xfrm>
           <a:prstGeom prst="rect">
             <a:avLst/>
@@ -4663,8 +4663,8 @@
         </p:blipFill>
         <p:spPr>
           <a:xfrm>
-            <a:off x="10634472" y="91440"/>
-            <a:ext cx="1371600" cy="548640"/>
+            <a:off x="10040112" y="73152"/>
+            <a:ext cx="2011680" cy="625706"/>
           </a:xfrm>
           <a:prstGeom prst="rect">
             <a:avLst/>

--- a/test_output.pptx
+++ b/test_output.pptx
@@ -3101,13 +3101,13 @@
         <p:spPr>
           <a:xfrm>
             <a:off x="0" y="0"/>
-            <a:ext cx="12188952" cy="6858000"/>
+            <a:ext cx="12188952" cy="4114800"/>
           </a:xfrm>
           <a:prstGeom prst="rect">
             <a:avLst/>
           </a:prstGeom>
           <a:solidFill>
-            <a:srgbClr val="F5F8FF"/>
+            <a:srgbClr val="1D3461"/>
           </a:solidFill>
           <a:ln>
             <a:noFill/>
@@ -3143,14 +3143,14 @@
         </p:nvSpPr>
         <p:spPr>
           <a:xfrm>
-            <a:off x="0" y="0"/>
-            <a:ext cx="320040" cy="6858000"/>
+            <a:off x="0" y="4114800"/>
+            <a:ext cx="12188952" cy="2743200"/>
           </a:xfrm>
           <a:prstGeom prst="rect">
             <a:avLst/>
           </a:prstGeom>
           <a:solidFill>
-            <a:srgbClr val="0047AB"/>
+            <a:srgbClr val="FFFFFF"/>
           </a:solidFill>
           <a:ln>
             <a:noFill/>
@@ -3180,20 +3180,53 @@
       </p:sp>
       <p:sp>
         <p:nvSpPr>
-          <p:cNvPr id="4" name="Rectangle 3"/>
+          <p:cNvPr id="4" name="TextBox 3"/>
+          <p:cNvSpPr txBox="1"/>
+          <p:nvPr/>
+        </p:nvSpPr>
+        <p:spPr>
+          <a:xfrm>
+            <a:off x="914400" y="1280160"/>
+            <a:ext cx="8988552" cy="2194560"/>
+          </a:xfrm>
+          <a:prstGeom prst="rect">
+            <a:avLst/>
+          </a:prstGeom>
+          <a:noFill/>
+        </p:spPr>
+        <p:txBody>
+          <a:bodyPr wrap="square">
+            <a:spAutoFit/>
+          </a:bodyPr>
+          <a:lstStyle/>
+          <a:p>
+            <a:r>
+              <a:rPr sz="3200" b="1" i="0">
+                <a:solidFill>
+                  <a:srgbClr val="FFFFFF"/>
+                </a:solidFill>
+              </a:rPr>
+              <a:t>〇〇市 次期システム導入提案書</a:t>
+            </a:r>
+          </a:p>
+        </p:txBody>
+      </p:sp>
+      <p:sp>
+        <p:nvSpPr>
+          <p:cNvPr id="5" name="Rectangle 4"/>
           <p:cNvSpPr/>
           <p:nvPr/>
         </p:nvSpPr>
         <p:spPr>
           <a:xfrm>
-            <a:off x="320040" y="1645920"/>
-            <a:ext cx="11868912" cy="2286000"/>
+            <a:off x="0" y="4059936"/>
+            <a:ext cx="12188952" cy="54864"/>
           </a:xfrm>
           <a:prstGeom prst="rect">
             <a:avLst/>
           </a:prstGeom>
           <a:solidFill>
-            <a:srgbClr val="0047AB"/>
+            <a:srgbClr val="1B4FA8"/>
           </a:solidFill>
           <a:ln>
             <a:noFill/>
@@ -3221,55 +3254,46 @@
           </a:p>
         </p:txBody>
       </p:sp>
-      <p:sp>
-        <p:nvSpPr>
-          <p:cNvPr id="5" name="TextBox 4"/>
-          <p:cNvSpPr txBox="1"/>
+      <p:pic>
+        <p:nvPicPr>
+          <p:cNvPr id="6" name="Picture 5" descr="logo.png"/>
+          <p:cNvPicPr>
+            <a:picLocks noChangeAspect="1"/>
+          </p:cNvPicPr>
           <p:nvPr/>
-        </p:nvSpPr>
-        <p:spPr>
-          <a:xfrm>
-            <a:off x="640080" y="1737360"/>
-            <a:ext cx="11091672" cy="2011680"/>
+        </p:nvPicPr>
+        <p:blipFill>
+          <a:blip r:embed="rId2"/>
+          <a:stretch>
+            <a:fillRect/>
+          </a:stretch>
+        </p:blipFill>
+        <p:spPr>
+          <a:xfrm>
+            <a:off x="10040112" y="73152"/>
+            <a:ext cx="2011680" cy="625706"/>
           </a:xfrm>
           <a:prstGeom prst="rect">
             <a:avLst/>
           </a:prstGeom>
-          <a:noFill/>
-        </p:spPr>
-        <p:txBody>
-          <a:bodyPr wrap="square">
-            <a:spAutoFit/>
-          </a:bodyPr>
-          <a:lstStyle/>
-          <a:p>
-            <a:r>
-              <a:rPr sz="2800" b="1" i="0">
-                <a:solidFill>
-                  <a:srgbClr val="FFFFFF"/>
-                </a:solidFill>
-              </a:rPr>
-              <a:t>〇〇市 次期システム導入提案書</a:t>
-            </a:r>
-          </a:p>
-        </p:txBody>
-      </p:sp>
-      <p:sp>
-        <p:nvSpPr>
-          <p:cNvPr id="6" name="Rectangle 5"/>
+        </p:spPr>
+      </p:pic>
+      <p:sp>
+        <p:nvSpPr>
+          <p:cNvPr id="7" name="Rectangle 6"/>
           <p:cNvSpPr/>
           <p:nvPr/>
         </p:nvSpPr>
         <p:spPr>
           <a:xfrm>
-            <a:off x="320040" y="6720840"/>
-            <a:ext cx="11868912" cy="137160"/>
+            <a:off x="0" y="6473952"/>
+            <a:ext cx="12188952" cy="15240"/>
           </a:xfrm>
           <a:prstGeom prst="rect">
             <a:avLst/>
           </a:prstGeom>
           <a:solidFill>
-            <a:srgbClr val="008BD8"/>
+            <a:srgbClr val="000000"/>
           </a:solidFill>
           <a:ln>
             <a:noFill/>
@@ -3297,30 +3321,73 @@
           </a:p>
         </p:txBody>
       </p:sp>
-      <p:pic>
-        <p:nvPicPr>
-          <p:cNvPr id="7" name="Picture 6" descr="logo.png"/>
-          <p:cNvPicPr>
-            <a:picLocks noChangeAspect="1"/>
-          </p:cNvPicPr>
+      <p:sp>
+        <p:nvSpPr>
+          <p:cNvPr id="8" name="TextBox 7"/>
+          <p:cNvSpPr txBox="1"/>
           <p:nvPr/>
-        </p:nvPicPr>
-        <p:blipFill>
-          <a:blip r:embed="rId2"/>
-          <a:stretch>
-            <a:fillRect/>
-          </a:stretch>
-        </p:blipFill>
-        <p:spPr>
-          <a:xfrm>
-            <a:off x="10040112" y="73152"/>
-            <a:ext cx="2011680" cy="625706"/>
+        </p:nvSpPr>
+        <p:spPr>
+          <a:xfrm>
+            <a:off x="274320" y="6512052"/>
+            <a:ext cx="7315200" cy="320040"/>
           </a:xfrm>
           <a:prstGeom prst="rect">
             <a:avLst/>
           </a:prstGeom>
-        </p:spPr>
-      </p:pic>
+          <a:noFill/>
+        </p:spPr>
+        <p:txBody>
+          <a:bodyPr wrap="none">
+            <a:spAutoFit/>
+          </a:bodyPr>
+          <a:lstStyle/>
+          <a:p>
+            <a:r>
+              <a:rPr sz="800" b="0" i="0">
+                <a:solidFill>
+                  <a:srgbClr val="808080"/>
+                </a:solidFill>
+              </a:rPr>
+              <a:t>Confidential All Rights Reserved SALESCORE Inc.</a:t>
+            </a:r>
+          </a:p>
+        </p:txBody>
+      </p:sp>
+      <p:sp>
+        <p:nvSpPr>
+          <p:cNvPr id="9" name="TextBox 8"/>
+          <p:cNvSpPr txBox="1"/>
+          <p:nvPr/>
+        </p:nvSpPr>
+        <p:spPr>
+          <a:xfrm>
+            <a:off x="11640312" y="6512052"/>
+            <a:ext cx="411480" cy="320040"/>
+          </a:xfrm>
+          <a:prstGeom prst="rect">
+            <a:avLst/>
+          </a:prstGeom>
+          <a:noFill/>
+        </p:spPr>
+        <p:txBody>
+          <a:bodyPr wrap="none">
+            <a:spAutoFit/>
+          </a:bodyPr>
+          <a:lstStyle/>
+          <a:p>
+            <a:pPr algn="r"/>
+            <a:r>
+              <a:rPr sz="900" b="0" i="0">
+                <a:solidFill>
+                  <a:srgbClr val="808080"/>
+                </a:solidFill>
+              </a:rPr>
+              <a:t>1</a:t>
+            </a:r>
+          </a:p>
+        </p:txBody>
+      </p:sp>
     </p:spTree>
   </p:cSld>
   <p:clrMapOvr>
@@ -3354,7 +3421,7 @@
             <a:avLst/>
           </a:prstGeom>
           <a:solidFill>
-            <a:srgbClr val="F5F8FF"/>
+            <a:srgbClr val="FFFFFF"/>
           </a:solidFill>
           <a:ln>
             <a:noFill/>
@@ -3384,20 +3451,53 @@
       </p:sp>
       <p:sp>
         <p:nvSpPr>
-          <p:cNvPr id="3" name="Rectangle 2"/>
+          <p:cNvPr id="3" name="TextBox 2"/>
+          <p:cNvSpPr txBox="1"/>
+          <p:nvPr/>
+        </p:nvSpPr>
+        <p:spPr>
+          <a:xfrm>
+            <a:off x="320040" y="91440"/>
+            <a:ext cx="9537192" cy="548640"/>
+          </a:xfrm>
+          <a:prstGeom prst="rect">
+            <a:avLst/>
+          </a:prstGeom>
+          <a:noFill/>
+        </p:spPr>
+        <p:txBody>
+          <a:bodyPr wrap="none">
+            <a:spAutoFit/>
+          </a:bodyPr>
+          <a:lstStyle/>
+          <a:p>
+            <a:r>
+              <a:rPr sz="2200" b="1" i="0">
+                <a:solidFill>
+                  <a:srgbClr val="1A1A1A"/>
+                </a:solidFill>
+              </a:rPr>
+              <a:t>概要</a:t>
+            </a:r>
+          </a:p>
+        </p:txBody>
+      </p:sp>
+      <p:sp>
+        <p:nvSpPr>
+          <p:cNvPr id="4" name="Rectangle 3"/>
           <p:cNvSpPr/>
           <p:nvPr/>
         </p:nvSpPr>
         <p:spPr>
           <a:xfrm>
-            <a:off x="0" y="0"/>
-            <a:ext cx="320040" cy="6858000"/>
+            <a:off x="0" y="658368"/>
+            <a:ext cx="12188952" cy="15240"/>
           </a:xfrm>
           <a:prstGeom prst="rect">
             <a:avLst/>
           </a:prstGeom>
           <a:solidFill>
-            <a:srgbClr val="0047AB"/>
+            <a:srgbClr val="000000"/>
           </a:solidFill>
           <a:ln>
             <a:noFill/>
@@ -3427,20 +3527,145 @@
       </p:sp>
       <p:sp>
         <p:nvSpPr>
-          <p:cNvPr id="4" name="Rectangle 3"/>
+          <p:cNvPr id="5" name="TextBox 4"/>
+          <p:cNvSpPr txBox="1"/>
+          <p:nvPr/>
+        </p:nvSpPr>
+        <p:spPr>
+          <a:xfrm>
+            <a:off x="457200" y="841248"/>
+            <a:ext cx="11457432" cy="5541264"/>
+          </a:xfrm>
+          <a:prstGeom prst="rect">
+            <a:avLst/>
+          </a:prstGeom>
+          <a:noFill/>
+        </p:spPr>
+        <p:txBody>
+          <a:bodyPr wrap="square">
+            <a:spAutoFit/>
+          </a:bodyPr>
+          <a:lstStyle/>
+          <a:p>
+            <a:pPr>
+              <a:spcBef>
+                <a:spcPts val="500"/>
+              </a:spcBef>
+              <a:spcAft>
+                <a:spcPts val="200"/>
+              </a:spcAft>
+            </a:pPr>
+            <a:r>
+              <a:rPr sz="1000" b="0" i="0">
+                <a:solidFill>
+                  <a:srgbClr val="1B4FA8"/>
+                </a:solidFill>
+              </a:rPr>
+              <a:t>● </a:t>
+            </a:r>
+            <a:r>
+              <a:rPr sz="1400" b="0" i="0">
+                <a:solidFill>
+                  <a:srgbClr val="1A1A1A"/>
+                </a:solidFill>
+              </a:rPr>
+              <a:t>本提案は〇〇市の次期業務システム導入に関するものです</a:t>
+            </a:r>
+          </a:p>
+          <a:p>
+            <a:pPr>
+              <a:spcBef>
+                <a:spcPts val="500"/>
+              </a:spcBef>
+              <a:spcAft>
+                <a:spcPts val="200"/>
+              </a:spcAft>
+            </a:pPr>
+            <a:r>
+              <a:rPr sz="1000" b="0" i="0">
+                <a:solidFill>
+                  <a:srgbClr val="1B4FA8"/>
+                </a:solidFill>
+              </a:rPr>
+              <a:t>● </a:t>
+            </a:r>
+            <a:r>
+              <a:rPr sz="1400" b="0" i="0">
+                <a:solidFill>
+                  <a:srgbClr val="1A1A1A"/>
+                </a:solidFill>
+              </a:rPr>
+              <a:t>現行システムの課題を解決し、業務効率化を実現します</a:t>
+            </a:r>
+          </a:p>
+          <a:p>
+            <a:pPr>
+              <a:spcBef>
+                <a:spcPts val="500"/>
+              </a:spcBef>
+              <a:spcAft>
+                <a:spcPts val="200"/>
+              </a:spcAft>
+            </a:pPr>
+            <a:r>
+              <a:rPr sz="1000" b="0" i="0">
+                <a:solidFill>
+                  <a:srgbClr val="1B4FA8"/>
+                </a:solidFill>
+              </a:rPr>
+              <a:t>● </a:t>
+            </a:r>
+            <a:r>
+              <a:rPr sz="1400" b="0" i="0">
+                <a:solidFill>
+                  <a:srgbClr val="1A1A1A"/>
+                </a:solidFill>
+              </a:rPr>
+              <a:t>導入期間：2026年10月〜2027年3月</a:t>
+            </a:r>
+          </a:p>
+        </p:txBody>
+      </p:sp>
+      <p:pic>
+        <p:nvPicPr>
+          <p:cNvPr id="6" name="Picture 5" descr="logo.png"/>
+          <p:cNvPicPr>
+            <a:picLocks noChangeAspect="1"/>
+          </p:cNvPicPr>
+          <p:nvPr/>
+        </p:nvPicPr>
+        <p:blipFill>
+          <a:blip r:embed="rId2"/>
+          <a:stretch>
+            <a:fillRect/>
+          </a:stretch>
+        </p:blipFill>
+        <p:spPr>
+          <a:xfrm>
+            <a:off x="10040112" y="73152"/>
+            <a:ext cx="2011680" cy="625706"/>
+          </a:xfrm>
+          <a:prstGeom prst="rect">
+            <a:avLst/>
+          </a:prstGeom>
+        </p:spPr>
+      </p:pic>
+      <p:sp>
+        <p:nvSpPr>
+          <p:cNvPr id="7" name="Rectangle 6"/>
           <p:cNvSpPr/>
           <p:nvPr/>
         </p:nvSpPr>
         <p:spPr>
           <a:xfrm>
-            <a:off x="320040" y="0"/>
-            <a:ext cx="11868912" cy="1005840"/>
+            <a:off x="0" y="6473952"/>
+            <a:ext cx="12188952" cy="15240"/>
           </a:xfrm>
           <a:prstGeom prst="rect">
             <a:avLst/>
           </a:prstGeom>
           <a:solidFill>
-            <a:srgbClr val="0047AB"/>
+            <a:srgbClr val="000000"/>
           </a:solidFill>
           <a:ln>
             <a:noFill/>
@@ -3470,14 +3695,14 @@
       </p:sp>
       <p:sp>
         <p:nvSpPr>
-          <p:cNvPr id="5" name="TextBox 4"/>
+          <p:cNvPr id="8" name="TextBox 7"/>
           <p:cNvSpPr txBox="1"/>
           <p:nvPr/>
         </p:nvSpPr>
         <p:spPr>
           <a:xfrm>
-            <a:off x="548640" y="137160"/>
-            <a:ext cx="11274552" cy="777240"/>
+            <a:off x="274320" y="6512052"/>
+            <a:ext cx="7315200" cy="320040"/>
           </a:xfrm>
           <a:prstGeom prst="rect">
             <a:avLst/>
@@ -3485,32 +3710,32 @@
           <a:noFill/>
         </p:spPr>
         <p:txBody>
-          <a:bodyPr wrap="square">
+          <a:bodyPr wrap="none">
             <a:spAutoFit/>
           </a:bodyPr>
           <a:lstStyle/>
           <a:p>
             <a:r>
-              <a:rPr sz="2200" b="1" i="0">
-                <a:solidFill>
-                  <a:srgbClr val="FFFFFF"/>
+              <a:rPr sz="800" b="0" i="0">
+                <a:solidFill>
+                  <a:srgbClr val="808080"/>
                 </a:solidFill>
               </a:rPr>
-              <a:t>概要</a:t>
-            </a:r>
-          </a:p>
-        </p:txBody>
-      </p:sp>
-      <p:sp>
-        <p:nvSpPr>
-          <p:cNvPr id="6" name="TextBox 5"/>
+              <a:t>Confidential All Rights Reserved SALESCORE Inc.</a:t>
+            </a:r>
+          </a:p>
+        </p:txBody>
+      </p:sp>
+      <p:sp>
+        <p:nvSpPr>
+          <p:cNvPr id="9" name="TextBox 8"/>
           <p:cNvSpPr txBox="1"/>
           <p:nvPr/>
         </p:nvSpPr>
         <p:spPr>
           <a:xfrm>
-            <a:off x="548640" y="1143000"/>
-            <a:ext cx="11365992" cy="5486400"/>
+            <a:off x="11640312" y="6512052"/>
+            <a:ext cx="411480" cy="320040"/>
           </a:xfrm>
           <a:prstGeom prst="rect">
             <a:avLst/>
@@ -3518,133 +3743,23 @@
           <a:noFill/>
         </p:spPr>
         <p:txBody>
-          <a:bodyPr wrap="square">
+          <a:bodyPr wrap="none">
             <a:spAutoFit/>
           </a:bodyPr>
           <a:lstStyle/>
           <a:p>
-            <a:pPr>
-              <a:spcBef>
-                <a:spcPts val="400"/>
-              </a:spcBef>
-              <a:spcAft>
-                <a:spcPts val="200"/>
-              </a:spcAft>
-            </a:pPr>
-            <a:r>
-              <a:rPr sz="1600" b="0" i="0">
-                <a:solidFill>
-                  <a:srgbClr val="1A1A2E"/>
+            <a:pPr algn="r"/>
+            <a:r>
+              <a:rPr sz="900" b="0" i="0">
+                <a:solidFill>
+                  <a:srgbClr val="808080"/>
                 </a:solidFill>
               </a:rPr>
-              <a:t>・本提案は〇〇市の次期業務システム導入に関するものです</a:t>
-            </a:r>
-          </a:p>
-          <a:p>
-            <a:pPr>
-              <a:spcBef>
-                <a:spcPts val="400"/>
-              </a:spcBef>
-              <a:spcAft>
-                <a:spcPts val="200"/>
-              </a:spcAft>
-            </a:pPr>
-            <a:r>
-              <a:rPr sz="1600" b="0" i="0">
-                <a:solidFill>
-                  <a:srgbClr val="1A1A2E"/>
-                </a:solidFill>
-              </a:rPr>
-              <a:t>・現行システムの課題を解決し、業務効率化を実現します</a:t>
-            </a:r>
-          </a:p>
-          <a:p>
-            <a:pPr>
-              <a:spcBef>
-                <a:spcPts val="400"/>
-              </a:spcBef>
-              <a:spcAft>
-                <a:spcPts val="200"/>
-              </a:spcAft>
-            </a:pPr>
-            <a:r>
-              <a:rPr sz="1600" b="0" i="0">
-                <a:solidFill>
-                  <a:srgbClr val="1A1A2E"/>
-                </a:solidFill>
-              </a:rPr>
-              <a:t>・導入期間：2026年10月〜2027年3月</a:t>
-            </a:r>
-          </a:p>
-        </p:txBody>
-      </p:sp>
-      <p:sp>
-        <p:nvSpPr>
-          <p:cNvPr id="7" name="Rectangle 6"/>
-          <p:cNvSpPr/>
-          <p:nvPr/>
-        </p:nvSpPr>
-        <p:spPr>
-          <a:xfrm>
-            <a:off x="320040" y="6748272"/>
-            <a:ext cx="11868912" cy="109728"/>
-          </a:xfrm>
-          <a:prstGeom prst="rect">
-            <a:avLst/>
-          </a:prstGeom>
-          <a:solidFill>
-            <a:srgbClr val="008BD8"/>
-          </a:solidFill>
-          <a:ln>
-            <a:noFill/>
-          </a:ln>
-        </p:spPr>
-        <p:style>
-          <a:lnRef idx="1">
-            <a:schemeClr val="accent1"/>
-          </a:lnRef>
-          <a:fillRef idx="3">
-            <a:schemeClr val="accent1"/>
-          </a:fillRef>
-          <a:effectRef idx="2">
-            <a:schemeClr val="accent1"/>
-          </a:effectRef>
-          <a:fontRef idx="minor">
-            <a:schemeClr val="lt1"/>
-          </a:fontRef>
-        </p:style>
-        <p:txBody>
-          <a:bodyPr rtlCol="0" anchor="ctr"/>
-          <a:lstStyle/>
-          <a:p>
-            <a:pPr algn="ctr"/>
-          </a:p>
-        </p:txBody>
-      </p:sp>
-      <p:pic>
-        <p:nvPicPr>
-          <p:cNvPr id="8" name="Picture 7" descr="logo.png"/>
-          <p:cNvPicPr>
-            <a:picLocks noChangeAspect="1"/>
-          </p:cNvPicPr>
-          <p:nvPr/>
-        </p:nvPicPr>
-        <p:blipFill>
-          <a:blip r:embed="rId2"/>
-          <a:stretch>
-            <a:fillRect/>
-          </a:stretch>
-        </p:blipFill>
-        <p:spPr>
-          <a:xfrm>
-            <a:off x="10040112" y="73152"/>
-            <a:ext cx="2011680" cy="625706"/>
-          </a:xfrm>
-          <a:prstGeom prst="rect">
-            <a:avLst/>
-          </a:prstGeom>
-        </p:spPr>
-      </p:pic>
+              <a:t>2</a:t>
+            </a:r>
+          </a:p>
+        </p:txBody>
+      </p:sp>
     </p:spTree>
   </p:cSld>
   <p:clrMapOvr>
@@ -3678,7 +3793,7 @@
             <a:avLst/>
           </a:prstGeom>
           <a:solidFill>
-            <a:srgbClr val="F5F8FF"/>
+            <a:srgbClr val="FFFFFF"/>
           </a:solidFill>
           <a:ln>
             <a:noFill/>
@@ -3708,20 +3823,53 @@
       </p:sp>
       <p:sp>
         <p:nvSpPr>
-          <p:cNvPr id="3" name="Rectangle 2"/>
+          <p:cNvPr id="3" name="TextBox 2"/>
+          <p:cNvSpPr txBox="1"/>
+          <p:nvPr/>
+        </p:nvSpPr>
+        <p:spPr>
+          <a:xfrm>
+            <a:off x="320040" y="91440"/>
+            <a:ext cx="9537192" cy="548640"/>
+          </a:xfrm>
+          <a:prstGeom prst="rect">
+            <a:avLst/>
+          </a:prstGeom>
+          <a:noFill/>
+        </p:spPr>
+        <p:txBody>
+          <a:bodyPr wrap="none">
+            <a:spAutoFit/>
+          </a:bodyPr>
+          <a:lstStyle/>
+          <a:p>
+            <a:r>
+              <a:rPr sz="2200" b="1" i="0">
+                <a:solidFill>
+                  <a:srgbClr val="1A1A1A"/>
+                </a:solidFill>
+              </a:rPr>
+              <a:t>現状の課題とニーズ</a:t>
+            </a:r>
+          </a:p>
+        </p:txBody>
+      </p:sp>
+      <p:sp>
+        <p:nvSpPr>
+          <p:cNvPr id="4" name="Rectangle 3"/>
           <p:cNvSpPr/>
           <p:nvPr/>
         </p:nvSpPr>
         <p:spPr>
           <a:xfrm>
-            <a:off x="0" y="0"/>
-            <a:ext cx="320040" cy="6858000"/>
+            <a:off x="0" y="658368"/>
+            <a:ext cx="12188952" cy="15240"/>
           </a:xfrm>
           <a:prstGeom prst="rect">
             <a:avLst/>
           </a:prstGeom>
           <a:solidFill>
-            <a:srgbClr val="0047AB"/>
+            <a:srgbClr val="000000"/>
           </a:solidFill>
           <a:ln>
             <a:noFill/>
@@ -3751,20 +3899,171 @@
       </p:sp>
       <p:sp>
         <p:nvSpPr>
-          <p:cNvPr id="4" name="Rectangle 3"/>
+          <p:cNvPr id="5" name="TextBox 4"/>
+          <p:cNvSpPr txBox="1"/>
+          <p:nvPr/>
+        </p:nvSpPr>
+        <p:spPr>
+          <a:xfrm>
+            <a:off x="457200" y="841248"/>
+            <a:ext cx="11457432" cy="5541264"/>
+          </a:xfrm>
+          <a:prstGeom prst="rect">
+            <a:avLst/>
+          </a:prstGeom>
+          <a:noFill/>
+        </p:spPr>
+        <p:txBody>
+          <a:bodyPr wrap="square">
+            <a:spAutoFit/>
+          </a:bodyPr>
+          <a:lstStyle/>
+          <a:p>
+            <a:pPr>
+              <a:spcBef>
+                <a:spcPts val="500"/>
+              </a:spcBef>
+              <a:spcAft>
+                <a:spcPts val="200"/>
+              </a:spcAft>
+            </a:pPr>
+            <a:r>
+              <a:rPr sz="1000" b="0" i="0">
+                <a:solidFill>
+                  <a:srgbClr val="1B4FA8"/>
+                </a:solidFill>
+              </a:rPr>
+              <a:t>● </a:t>
+            </a:r>
+            <a:r>
+              <a:rPr sz="1400" b="0" i="0">
+                <a:solidFill>
+                  <a:srgbClr val="1A1A1A"/>
+                </a:solidFill>
+              </a:rPr>
+              <a:t>現行システムは2010年導入で老朽化が進んでいる</a:t>
+            </a:r>
+          </a:p>
+          <a:p>
+            <a:pPr>
+              <a:spcBef>
+                <a:spcPts val="500"/>
+              </a:spcBef>
+              <a:spcAft>
+                <a:spcPts val="200"/>
+              </a:spcAft>
+            </a:pPr>
+            <a:r>
+              <a:rPr sz="1000" b="0" i="0">
+                <a:solidFill>
+                  <a:srgbClr val="1B4FA8"/>
+                </a:solidFill>
+              </a:rPr>
+              <a:t>● </a:t>
+            </a:r>
+            <a:r>
+              <a:rPr sz="1400" b="0" i="0">
+                <a:solidFill>
+                  <a:srgbClr val="1A1A1A"/>
+                </a:solidFill>
+              </a:rPr>
+              <a:t>複数システムが乱立しており、データ連携が困難</a:t>
+            </a:r>
+          </a:p>
+          <a:p>
+            <a:pPr>
+              <a:spcBef>
+                <a:spcPts val="500"/>
+              </a:spcBef>
+              <a:spcAft>
+                <a:spcPts val="200"/>
+              </a:spcAft>
+            </a:pPr>
+            <a:r>
+              <a:rPr sz="1000" b="0" i="0">
+                <a:solidFill>
+                  <a:srgbClr val="1B4FA8"/>
+                </a:solidFill>
+              </a:rPr>
+              <a:t>● </a:t>
+            </a:r>
+            <a:r>
+              <a:rPr sz="1400" b="0" i="0">
+                <a:solidFill>
+                  <a:srgbClr val="1A1A1A"/>
+                </a:solidFill>
+              </a:rPr>
+              <a:t>職員のITリテラシーに差があり、操作性の改善が必要</a:t>
+            </a:r>
+          </a:p>
+          <a:p>
+            <a:pPr>
+              <a:spcBef>
+                <a:spcPts val="500"/>
+              </a:spcBef>
+              <a:spcAft>
+                <a:spcPts val="200"/>
+              </a:spcAft>
+            </a:pPr>
+            <a:r>
+              <a:rPr sz="1000" b="0" i="0">
+                <a:solidFill>
+                  <a:srgbClr val="1B4FA8"/>
+                </a:solidFill>
+              </a:rPr>
+              <a:t>● </a:t>
+            </a:r>
+            <a:r>
+              <a:rPr sz="1400" b="0" i="0">
+                <a:solidFill>
+                  <a:srgbClr val="1A1A1A"/>
+                </a:solidFill>
+              </a:rPr>
+              <a:t>セキュリティ基準への対応が不十分</a:t>
+            </a:r>
+          </a:p>
+        </p:txBody>
+      </p:sp>
+      <p:pic>
+        <p:nvPicPr>
+          <p:cNvPr id="6" name="Picture 5" descr="logo.png"/>
+          <p:cNvPicPr>
+            <a:picLocks noChangeAspect="1"/>
+          </p:cNvPicPr>
+          <p:nvPr/>
+        </p:nvPicPr>
+        <p:blipFill>
+          <a:blip r:embed="rId2"/>
+          <a:stretch>
+            <a:fillRect/>
+          </a:stretch>
+        </p:blipFill>
+        <p:spPr>
+          <a:xfrm>
+            <a:off x="10040112" y="73152"/>
+            <a:ext cx="2011680" cy="625706"/>
+          </a:xfrm>
+          <a:prstGeom prst="rect">
+            <a:avLst/>
+          </a:prstGeom>
+        </p:spPr>
+      </p:pic>
+      <p:sp>
+        <p:nvSpPr>
+          <p:cNvPr id="7" name="Rectangle 6"/>
           <p:cNvSpPr/>
           <p:nvPr/>
         </p:nvSpPr>
         <p:spPr>
           <a:xfrm>
-            <a:off x="320040" y="0"/>
-            <a:ext cx="11868912" cy="1005840"/>
+            <a:off x="0" y="6473952"/>
+            <a:ext cx="12188952" cy="15240"/>
           </a:xfrm>
           <a:prstGeom prst="rect">
             <a:avLst/>
           </a:prstGeom>
           <a:solidFill>
-            <a:srgbClr val="0047AB"/>
+            <a:srgbClr val="000000"/>
           </a:solidFill>
           <a:ln>
             <a:noFill/>
@@ -3794,14 +4093,14 @@
       </p:sp>
       <p:sp>
         <p:nvSpPr>
-          <p:cNvPr id="5" name="TextBox 4"/>
+          <p:cNvPr id="8" name="TextBox 7"/>
           <p:cNvSpPr txBox="1"/>
           <p:nvPr/>
         </p:nvSpPr>
         <p:spPr>
           <a:xfrm>
-            <a:off x="548640" y="137160"/>
-            <a:ext cx="11274552" cy="777240"/>
+            <a:off x="274320" y="6512052"/>
+            <a:ext cx="7315200" cy="320040"/>
           </a:xfrm>
           <a:prstGeom prst="rect">
             <a:avLst/>
@@ -3809,32 +4108,32 @@
           <a:noFill/>
         </p:spPr>
         <p:txBody>
-          <a:bodyPr wrap="square">
+          <a:bodyPr wrap="none">
             <a:spAutoFit/>
           </a:bodyPr>
           <a:lstStyle/>
           <a:p>
             <a:r>
-              <a:rPr sz="2200" b="1" i="0">
-                <a:solidFill>
-                  <a:srgbClr val="FFFFFF"/>
+              <a:rPr sz="800" b="0" i="0">
+                <a:solidFill>
+                  <a:srgbClr val="808080"/>
                 </a:solidFill>
               </a:rPr>
-              <a:t>現状の課題とニーズ</a:t>
-            </a:r>
-          </a:p>
-        </p:txBody>
-      </p:sp>
-      <p:sp>
-        <p:nvSpPr>
-          <p:cNvPr id="6" name="TextBox 5"/>
+              <a:t>Confidential All Rights Reserved SALESCORE Inc.</a:t>
+            </a:r>
+          </a:p>
+        </p:txBody>
+      </p:sp>
+      <p:sp>
+        <p:nvSpPr>
+          <p:cNvPr id="9" name="TextBox 8"/>
           <p:cNvSpPr txBox="1"/>
           <p:nvPr/>
         </p:nvSpPr>
         <p:spPr>
           <a:xfrm>
-            <a:off x="548640" y="1143000"/>
-            <a:ext cx="11365992" cy="5486400"/>
+            <a:off x="11640312" y="6512052"/>
+            <a:ext cx="411480" cy="320040"/>
           </a:xfrm>
           <a:prstGeom prst="rect">
             <a:avLst/>
@@ -3842,151 +4141,23 @@
           <a:noFill/>
         </p:spPr>
         <p:txBody>
-          <a:bodyPr wrap="square">
+          <a:bodyPr wrap="none">
             <a:spAutoFit/>
           </a:bodyPr>
           <a:lstStyle/>
           <a:p>
-            <a:pPr>
-              <a:spcBef>
-                <a:spcPts val="400"/>
-              </a:spcBef>
-              <a:spcAft>
-                <a:spcPts val="200"/>
-              </a:spcAft>
-            </a:pPr>
-            <a:r>
-              <a:rPr sz="1600" b="0" i="0">
-                <a:solidFill>
-                  <a:srgbClr val="1A1A2E"/>
+            <a:pPr algn="r"/>
+            <a:r>
+              <a:rPr sz="900" b="0" i="0">
+                <a:solidFill>
+                  <a:srgbClr val="808080"/>
                 </a:solidFill>
               </a:rPr>
-              <a:t>・現行システムは2010年導入で老朽化が進んでいる</a:t>
-            </a:r>
-          </a:p>
-          <a:p>
-            <a:pPr>
-              <a:spcBef>
-                <a:spcPts val="400"/>
-              </a:spcBef>
-              <a:spcAft>
-                <a:spcPts val="200"/>
-              </a:spcAft>
-            </a:pPr>
-            <a:r>
-              <a:rPr sz="1600" b="0" i="0">
-                <a:solidFill>
-                  <a:srgbClr val="1A1A2E"/>
-                </a:solidFill>
-              </a:rPr>
-              <a:t>・複数システムが乱立しており、データ連携が困難</a:t>
-            </a:r>
-          </a:p>
-          <a:p>
-            <a:pPr>
-              <a:spcBef>
-                <a:spcPts val="400"/>
-              </a:spcBef>
-              <a:spcAft>
-                <a:spcPts val="200"/>
-              </a:spcAft>
-            </a:pPr>
-            <a:r>
-              <a:rPr sz="1600" b="0" i="0">
-                <a:solidFill>
-                  <a:srgbClr val="1A1A2E"/>
-                </a:solidFill>
-              </a:rPr>
-              <a:t>・職員のITリテラシーに差があり、操作性の改善が必要</a:t>
-            </a:r>
-          </a:p>
-          <a:p>
-            <a:pPr>
-              <a:spcBef>
-                <a:spcPts val="400"/>
-              </a:spcBef>
-              <a:spcAft>
-                <a:spcPts val="200"/>
-              </a:spcAft>
-            </a:pPr>
-            <a:r>
-              <a:rPr sz="1600" b="0" i="0">
-                <a:solidFill>
-                  <a:srgbClr val="1A1A2E"/>
-                </a:solidFill>
-              </a:rPr>
-              <a:t>・セキュリティ基準への対応が不十分</a:t>
-            </a:r>
-          </a:p>
-        </p:txBody>
-      </p:sp>
-      <p:sp>
-        <p:nvSpPr>
-          <p:cNvPr id="7" name="Rectangle 6"/>
-          <p:cNvSpPr/>
-          <p:nvPr/>
-        </p:nvSpPr>
-        <p:spPr>
-          <a:xfrm>
-            <a:off x="320040" y="6748272"/>
-            <a:ext cx="11868912" cy="109728"/>
-          </a:xfrm>
-          <a:prstGeom prst="rect">
-            <a:avLst/>
-          </a:prstGeom>
-          <a:solidFill>
-            <a:srgbClr val="008BD8"/>
-          </a:solidFill>
-          <a:ln>
-            <a:noFill/>
-          </a:ln>
-        </p:spPr>
-        <p:style>
-          <a:lnRef idx="1">
-            <a:schemeClr val="accent1"/>
-          </a:lnRef>
-          <a:fillRef idx="3">
-            <a:schemeClr val="accent1"/>
-          </a:fillRef>
-          <a:effectRef idx="2">
-            <a:schemeClr val="accent1"/>
-          </a:effectRef>
-          <a:fontRef idx="minor">
-            <a:schemeClr val="lt1"/>
-          </a:fontRef>
-        </p:style>
-        <p:txBody>
-          <a:bodyPr rtlCol="0" anchor="ctr"/>
-          <a:lstStyle/>
-          <a:p>
-            <a:pPr algn="ctr"/>
-          </a:p>
-        </p:txBody>
-      </p:sp>
-      <p:pic>
-        <p:nvPicPr>
-          <p:cNvPr id="8" name="Picture 7" descr="logo.png"/>
-          <p:cNvPicPr>
-            <a:picLocks noChangeAspect="1"/>
-          </p:cNvPicPr>
-          <p:nvPr/>
-        </p:nvPicPr>
-        <p:blipFill>
-          <a:blip r:embed="rId2"/>
-          <a:stretch>
-            <a:fillRect/>
-          </a:stretch>
-        </p:blipFill>
-        <p:spPr>
-          <a:xfrm>
-            <a:off x="10040112" y="73152"/>
-            <a:ext cx="2011680" cy="625706"/>
-          </a:xfrm>
-          <a:prstGeom prst="rect">
-            <a:avLst/>
-          </a:prstGeom>
-        </p:spPr>
-      </p:pic>
+              <a:t>3</a:t>
+            </a:r>
+          </a:p>
+        </p:txBody>
+      </p:sp>
     </p:spTree>
   </p:cSld>
   <p:clrMapOvr>
@@ -4020,7 +4191,7 @@
             <a:avLst/>
           </a:prstGeom>
           <a:solidFill>
-            <a:srgbClr val="F5F8FF"/>
+            <a:srgbClr val="FFFFFF"/>
           </a:solidFill>
           <a:ln>
             <a:noFill/>
@@ -4050,20 +4221,53 @@
       </p:sp>
       <p:sp>
         <p:nvSpPr>
-          <p:cNvPr id="3" name="Rectangle 2"/>
+          <p:cNvPr id="3" name="TextBox 2"/>
+          <p:cNvSpPr txBox="1"/>
+          <p:nvPr/>
+        </p:nvSpPr>
+        <p:spPr>
+          <a:xfrm>
+            <a:off x="320040" y="91440"/>
+            <a:ext cx="9537192" cy="548640"/>
+          </a:xfrm>
+          <a:prstGeom prst="rect">
+            <a:avLst/>
+          </a:prstGeom>
+          <a:noFill/>
+        </p:spPr>
+        <p:txBody>
+          <a:bodyPr wrap="none">
+            <a:spAutoFit/>
+          </a:bodyPr>
+          <a:lstStyle/>
+          <a:p>
+            <a:r>
+              <a:rPr sz="2200" b="1" i="0">
+                <a:solidFill>
+                  <a:srgbClr val="1A1A1A"/>
+                </a:solidFill>
+              </a:rPr>
+              <a:t>次期システムの方針</a:t>
+            </a:r>
+          </a:p>
+        </p:txBody>
+      </p:sp>
+      <p:sp>
+        <p:nvSpPr>
+          <p:cNvPr id="4" name="Rectangle 3"/>
           <p:cNvSpPr/>
           <p:nvPr/>
         </p:nvSpPr>
         <p:spPr>
           <a:xfrm>
-            <a:off x="0" y="0"/>
-            <a:ext cx="320040" cy="6858000"/>
+            <a:off x="0" y="658368"/>
+            <a:ext cx="12188952" cy="15240"/>
           </a:xfrm>
           <a:prstGeom prst="rect">
             <a:avLst/>
           </a:prstGeom>
           <a:solidFill>
-            <a:srgbClr val="0047AB"/>
+            <a:srgbClr val="000000"/>
           </a:solidFill>
           <a:ln>
             <a:noFill/>
@@ -4093,20 +4297,171 @@
       </p:sp>
       <p:sp>
         <p:nvSpPr>
-          <p:cNvPr id="4" name="Rectangle 3"/>
+          <p:cNvPr id="5" name="TextBox 4"/>
+          <p:cNvSpPr txBox="1"/>
+          <p:nvPr/>
+        </p:nvSpPr>
+        <p:spPr>
+          <a:xfrm>
+            <a:off x="457200" y="841248"/>
+            <a:ext cx="11457432" cy="5541264"/>
+          </a:xfrm>
+          <a:prstGeom prst="rect">
+            <a:avLst/>
+          </a:prstGeom>
+          <a:noFill/>
+        </p:spPr>
+        <p:txBody>
+          <a:bodyPr wrap="square">
+            <a:spAutoFit/>
+          </a:bodyPr>
+          <a:lstStyle/>
+          <a:p>
+            <a:pPr>
+              <a:spcBef>
+                <a:spcPts val="500"/>
+              </a:spcBef>
+              <a:spcAft>
+                <a:spcPts val="200"/>
+              </a:spcAft>
+            </a:pPr>
+            <a:r>
+              <a:rPr sz="1400" b="1" i="0">
+                <a:solidFill>
+                  <a:srgbClr val="1B4FA8"/>
+                </a:solidFill>
+              </a:rPr>
+              <a:t>1. </a:t>
+            </a:r>
+            <a:r>
+              <a:rPr sz="1400" b="0" i="0">
+                <a:solidFill>
+                  <a:srgbClr val="1A1A1A"/>
+                </a:solidFill>
+              </a:rPr>
+              <a:t>クラウドベースのシステム統合</a:t>
+            </a:r>
+          </a:p>
+          <a:p>
+            <a:pPr>
+              <a:spcBef>
+                <a:spcPts val="500"/>
+              </a:spcBef>
+              <a:spcAft>
+                <a:spcPts val="200"/>
+              </a:spcAft>
+            </a:pPr>
+            <a:r>
+              <a:rPr sz="1400" b="1" i="0">
+                <a:solidFill>
+                  <a:srgbClr val="1B4FA8"/>
+                </a:solidFill>
+              </a:rPr>
+              <a:t>2. </a:t>
+            </a:r>
+            <a:r>
+              <a:rPr sz="1400" b="0" i="0">
+                <a:solidFill>
+                  <a:srgbClr val="1A1A1A"/>
+                </a:solidFill>
+              </a:rPr>
+              <a:t>直感的なUI/UXの採用</a:t>
+            </a:r>
+          </a:p>
+          <a:p>
+            <a:pPr>
+              <a:spcBef>
+                <a:spcPts val="500"/>
+              </a:spcBef>
+              <a:spcAft>
+                <a:spcPts val="200"/>
+              </a:spcAft>
+            </a:pPr>
+            <a:r>
+              <a:rPr sz="1400" b="1" i="0">
+                <a:solidFill>
+                  <a:srgbClr val="1B4FA8"/>
+                </a:solidFill>
+              </a:rPr>
+              <a:t>3. </a:t>
+            </a:r>
+            <a:r>
+              <a:rPr sz="1400" b="0" i="0">
+                <a:solidFill>
+                  <a:srgbClr val="1A1A1A"/>
+                </a:solidFill>
+              </a:rPr>
+              <a:t>既存データの完全移行</a:t>
+            </a:r>
+          </a:p>
+          <a:p>
+            <a:pPr>
+              <a:spcBef>
+                <a:spcPts val="500"/>
+              </a:spcBef>
+              <a:spcAft>
+                <a:spcPts val="200"/>
+              </a:spcAft>
+            </a:pPr>
+            <a:r>
+              <a:rPr sz="1400" b="1" i="0">
+                <a:solidFill>
+                  <a:srgbClr val="1B4FA8"/>
+                </a:solidFill>
+              </a:rPr>
+              <a:t>4. </a:t>
+            </a:r>
+            <a:r>
+              <a:rPr sz="1400" b="0" i="0">
+                <a:solidFill>
+                  <a:srgbClr val="1A1A1A"/>
+                </a:solidFill>
+              </a:rPr>
+              <a:t>セキュリティ強化（ゼロトラスト対応）</a:t>
+            </a:r>
+          </a:p>
+        </p:txBody>
+      </p:sp>
+      <p:pic>
+        <p:nvPicPr>
+          <p:cNvPr id="6" name="Picture 5" descr="logo.png"/>
+          <p:cNvPicPr>
+            <a:picLocks noChangeAspect="1"/>
+          </p:cNvPicPr>
+          <p:nvPr/>
+        </p:nvPicPr>
+        <p:blipFill>
+          <a:blip r:embed="rId2"/>
+          <a:stretch>
+            <a:fillRect/>
+          </a:stretch>
+        </p:blipFill>
+        <p:spPr>
+          <a:xfrm>
+            <a:off x="10040112" y="73152"/>
+            <a:ext cx="2011680" cy="625706"/>
+          </a:xfrm>
+          <a:prstGeom prst="rect">
+            <a:avLst/>
+          </a:prstGeom>
+        </p:spPr>
+      </p:pic>
+      <p:sp>
+        <p:nvSpPr>
+          <p:cNvPr id="7" name="Rectangle 6"/>
           <p:cNvSpPr/>
           <p:nvPr/>
         </p:nvSpPr>
         <p:spPr>
           <a:xfrm>
-            <a:off x="320040" y="0"/>
-            <a:ext cx="11868912" cy="1005840"/>
+            <a:off x="0" y="6473952"/>
+            <a:ext cx="12188952" cy="15240"/>
           </a:xfrm>
           <a:prstGeom prst="rect">
             <a:avLst/>
           </a:prstGeom>
           <a:solidFill>
-            <a:srgbClr val="0047AB"/>
+            <a:srgbClr val="000000"/>
           </a:solidFill>
           <a:ln>
             <a:noFill/>
@@ -4136,14 +4491,14 @@
       </p:sp>
       <p:sp>
         <p:nvSpPr>
-          <p:cNvPr id="5" name="TextBox 4"/>
+          <p:cNvPr id="8" name="TextBox 7"/>
           <p:cNvSpPr txBox="1"/>
           <p:nvPr/>
         </p:nvSpPr>
         <p:spPr>
           <a:xfrm>
-            <a:off x="548640" y="137160"/>
-            <a:ext cx="11274552" cy="777240"/>
+            <a:off x="274320" y="6512052"/>
+            <a:ext cx="7315200" cy="320040"/>
           </a:xfrm>
           <a:prstGeom prst="rect">
             <a:avLst/>
@@ -4151,32 +4506,32 @@
           <a:noFill/>
         </p:spPr>
         <p:txBody>
-          <a:bodyPr wrap="square">
+          <a:bodyPr wrap="none">
             <a:spAutoFit/>
           </a:bodyPr>
           <a:lstStyle/>
           <a:p>
             <a:r>
-              <a:rPr sz="2200" b="1" i="0">
-                <a:solidFill>
-                  <a:srgbClr val="FFFFFF"/>
+              <a:rPr sz="800" b="0" i="0">
+                <a:solidFill>
+                  <a:srgbClr val="808080"/>
                 </a:solidFill>
               </a:rPr>
-              <a:t>次期システムの方針</a:t>
-            </a:r>
-          </a:p>
-        </p:txBody>
-      </p:sp>
-      <p:sp>
-        <p:nvSpPr>
-          <p:cNvPr id="6" name="TextBox 5"/>
+              <a:t>Confidential All Rights Reserved SALESCORE Inc.</a:t>
+            </a:r>
+          </a:p>
+        </p:txBody>
+      </p:sp>
+      <p:sp>
+        <p:nvSpPr>
+          <p:cNvPr id="9" name="TextBox 8"/>
           <p:cNvSpPr txBox="1"/>
           <p:nvPr/>
         </p:nvSpPr>
         <p:spPr>
           <a:xfrm>
-            <a:off x="548640" y="1143000"/>
-            <a:ext cx="11365992" cy="5486400"/>
+            <a:off x="11640312" y="6512052"/>
+            <a:ext cx="411480" cy="320040"/>
           </a:xfrm>
           <a:prstGeom prst="rect">
             <a:avLst/>
@@ -4184,151 +4539,23 @@
           <a:noFill/>
         </p:spPr>
         <p:txBody>
-          <a:bodyPr wrap="square">
+          <a:bodyPr wrap="none">
             <a:spAutoFit/>
           </a:bodyPr>
           <a:lstStyle/>
           <a:p>
-            <a:pPr>
-              <a:spcBef>
-                <a:spcPts val="400"/>
-              </a:spcBef>
-              <a:spcAft>
-                <a:spcPts val="200"/>
-              </a:spcAft>
-            </a:pPr>
-            <a:r>
-              <a:rPr sz="1600" b="0" i="0">
-                <a:solidFill>
-                  <a:srgbClr val="1A1A2E"/>
+            <a:pPr algn="r"/>
+            <a:r>
+              <a:rPr sz="900" b="0" i="0">
+                <a:solidFill>
+                  <a:srgbClr val="808080"/>
                 </a:solidFill>
               </a:rPr>
-              <a:t>1. クラウドベースのシステム統合</a:t>
-            </a:r>
-          </a:p>
-          <a:p>
-            <a:pPr>
-              <a:spcBef>
-                <a:spcPts val="400"/>
-              </a:spcBef>
-              <a:spcAft>
-                <a:spcPts val="200"/>
-              </a:spcAft>
-            </a:pPr>
-            <a:r>
-              <a:rPr sz="1600" b="0" i="0">
-                <a:solidFill>
-                  <a:srgbClr val="1A1A2E"/>
-                </a:solidFill>
-              </a:rPr>
-              <a:t>2. 直感的なUI/UXの採用</a:t>
-            </a:r>
-          </a:p>
-          <a:p>
-            <a:pPr>
-              <a:spcBef>
-                <a:spcPts val="400"/>
-              </a:spcBef>
-              <a:spcAft>
-                <a:spcPts val="200"/>
-              </a:spcAft>
-            </a:pPr>
-            <a:r>
-              <a:rPr sz="1600" b="0" i="0">
-                <a:solidFill>
-                  <a:srgbClr val="1A1A2E"/>
-                </a:solidFill>
-              </a:rPr>
-              <a:t>3. 既存データの完全移行</a:t>
-            </a:r>
-          </a:p>
-          <a:p>
-            <a:pPr>
-              <a:spcBef>
-                <a:spcPts val="400"/>
-              </a:spcBef>
-              <a:spcAft>
-                <a:spcPts val="200"/>
-              </a:spcAft>
-            </a:pPr>
-            <a:r>
-              <a:rPr sz="1600" b="0" i="0">
-                <a:solidFill>
-                  <a:srgbClr val="1A1A2E"/>
-                </a:solidFill>
-              </a:rPr>
-              <a:t>4. セキュリティ強化（ゼロトラスト対応）</a:t>
-            </a:r>
-          </a:p>
-        </p:txBody>
-      </p:sp>
-      <p:sp>
-        <p:nvSpPr>
-          <p:cNvPr id="7" name="Rectangle 6"/>
-          <p:cNvSpPr/>
-          <p:nvPr/>
-        </p:nvSpPr>
-        <p:spPr>
-          <a:xfrm>
-            <a:off x="320040" y="6748272"/>
-            <a:ext cx="11868912" cy="109728"/>
-          </a:xfrm>
-          <a:prstGeom prst="rect">
-            <a:avLst/>
-          </a:prstGeom>
-          <a:solidFill>
-            <a:srgbClr val="008BD8"/>
-          </a:solidFill>
-          <a:ln>
-            <a:noFill/>
-          </a:ln>
-        </p:spPr>
-        <p:style>
-          <a:lnRef idx="1">
-            <a:schemeClr val="accent1"/>
-          </a:lnRef>
-          <a:fillRef idx="3">
-            <a:schemeClr val="accent1"/>
-          </a:fillRef>
-          <a:effectRef idx="2">
-            <a:schemeClr val="accent1"/>
-          </a:effectRef>
-          <a:fontRef idx="minor">
-            <a:schemeClr val="lt1"/>
-          </a:fontRef>
-        </p:style>
-        <p:txBody>
-          <a:bodyPr rtlCol="0" anchor="ctr"/>
-          <a:lstStyle/>
-          <a:p>
-            <a:pPr algn="ctr"/>
-          </a:p>
-        </p:txBody>
-      </p:sp>
-      <p:pic>
-        <p:nvPicPr>
-          <p:cNvPr id="8" name="Picture 7" descr="logo.png"/>
-          <p:cNvPicPr>
-            <a:picLocks noChangeAspect="1"/>
-          </p:cNvPicPr>
-          <p:nvPr/>
-        </p:nvPicPr>
-        <p:blipFill>
-          <a:blip r:embed="rId2"/>
-          <a:stretch>
-            <a:fillRect/>
-          </a:stretch>
-        </p:blipFill>
-        <p:spPr>
-          <a:xfrm>
-            <a:off x="10040112" y="73152"/>
-            <a:ext cx="2011680" cy="625706"/>
-          </a:xfrm>
-          <a:prstGeom prst="rect">
-            <a:avLst/>
-          </a:prstGeom>
-        </p:spPr>
-      </p:pic>
+              <a:t>4</a:t>
+            </a:r>
+          </a:p>
+        </p:txBody>
+      </p:sp>
     </p:spTree>
   </p:cSld>
   <p:clrMapOvr>
@@ -4362,7 +4589,7 @@
             <a:avLst/>
           </a:prstGeom>
           <a:solidFill>
-            <a:srgbClr val="F5F8FF"/>
+            <a:srgbClr val="FFFFFF"/>
           </a:solidFill>
           <a:ln>
             <a:noFill/>
@@ -4392,20 +4619,53 @@
       </p:sp>
       <p:sp>
         <p:nvSpPr>
-          <p:cNvPr id="3" name="Rectangle 2"/>
+          <p:cNvPr id="3" name="TextBox 2"/>
+          <p:cNvSpPr txBox="1"/>
+          <p:nvPr/>
+        </p:nvSpPr>
+        <p:spPr>
+          <a:xfrm>
+            <a:off x="320040" y="91440"/>
+            <a:ext cx="9537192" cy="548640"/>
+          </a:xfrm>
+          <a:prstGeom prst="rect">
+            <a:avLst/>
+          </a:prstGeom>
+          <a:noFill/>
+        </p:spPr>
+        <p:txBody>
+          <a:bodyPr wrap="none">
+            <a:spAutoFit/>
+          </a:bodyPr>
+          <a:lstStyle/>
+          <a:p>
+            <a:r>
+              <a:rPr sz="2200" b="1" i="0">
+                <a:solidFill>
+                  <a:srgbClr val="1A1A1A"/>
+                </a:solidFill>
+              </a:rPr>
+              <a:t>導入スケジュール</a:t>
+            </a:r>
+          </a:p>
+        </p:txBody>
+      </p:sp>
+      <p:sp>
+        <p:nvSpPr>
+          <p:cNvPr id="4" name="Rectangle 3"/>
           <p:cNvSpPr/>
           <p:nvPr/>
         </p:nvSpPr>
         <p:spPr>
           <a:xfrm>
-            <a:off x="0" y="0"/>
-            <a:ext cx="320040" cy="6858000"/>
+            <a:off x="0" y="658368"/>
+            <a:ext cx="12188952" cy="15240"/>
           </a:xfrm>
           <a:prstGeom prst="rect">
             <a:avLst/>
           </a:prstGeom>
           <a:solidFill>
-            <a:srgbClr val="0047AB"/>
+            <a:srgbClr val="000000"/>
           </a:solidFill>
           <a:ln>
             <a:noFill/>
@@ -4435,20 +4695,171 @@
       </p:sp>
       <p:sp>
         <p:nvSpPr>
-          <p:cNvPr id="4" name="Rectangle 3"/>
+          <p:cNvPr id="5" name="TextBox 4"/>
+          <p:cNvSpPr txBox="1"/>
+          <p:nvPr/>
+        </p:nvSpPr>
+        <p:spPr>
+          <a:xfrm>
+            <a:off x="457200" y="841248"/>
+            <a:ext cx="11457432" cy="5541264"/>
+          </a:xfrm>
+          <a:prstGeom prst="rect">
+            <a:avLst/>
+          </a:prstGeom>
+          <a:noFill/>
+        </p:spPr>
+        <p:txBody>
+          <a:bodyPr wrap="square">
+            <a:spAutoFit/>
+          </a:bodyPr>
+          <a:lstStyle/>
+          <a:p>
+            <a:pPr>
+              <a:spcBef>
+                <a:spcPts val="500"/>
+              </a:spcBef>
+              <a:spcAft>
+                <a:spcPts val="200"/>
+              </a:spcAft>
+            </a:pPr>
+            <a:r>
+              <a:rPr sz="1000" b="0" i="0">
+                <a:solidFill>
+                  <a:srgbClr val="1B4FA8"/>
+                </a:solidFill>
+              </a:rPr>
+              <a:t>● </a:t>
+            </a:r>
+            <a:r>
+              <a:rPr sz="1400" b="0" i="0">
+                <a:solidFill>
+                  <a:srgbClr val="1A1A1A"/>
+                </a:solidFill>
+              </a:rPr>
+              <a:t>2026年10月：要件定義・設計開始</a:t>
+            </a:r>
+          </a:p>
+          <a:p>
+            <a:pPr>
+              <a:spcBef>
+                <a:spcPts val="500"/>
+              </a:spcBef>
+              <a:spcAft>
+                <a:spcPts val="200"/>
+              </a:spcAft>
+            </a:pPr>
+            <a:r>
+              <a:rPr sz="1000" b="0" i="0">
+                <a:solidFill>
+                  <a:srgbClr val="1B4FA8"/>
+                </a:solidFill>
+              </a:rPr>
+              <a:t>● </a:t>
+            </a:r>
+            <a:r>
+              <a:rPr sz="1400" b="0" i="0">
+                <a:solidFill>
+                  <a:srgbClr val="1A1A1A"/>
+                </a:solidFill>
+              </a:rPr>
+              <a:t>2026年12月：開発・テスト</a:t>
+            </a:r>
+          </a:p>
+          <a:p>
+            <a:pPr>
+              <a:spcBef>
+                <a:spcPts val="500"/>
+              </a:spcBef>
+              <a:spcAft>
+                <a:spcPts val="200"/>
+              </a:spcAft>
+            </a:pPr>
+            <a:r>
+              <a:rPr sz="1000" b="0" i="0">
+                <a:solidFill>
+                  <a:srgbClr val="1B4FA8"/>
+                </a:solidFill>
+              </a:rPr>
+              <a:t>● </a:t>
+            </a:r>
+            <a:r>
+              <a:rPr sz="1400" b="0" i="0">
+                <a:solidFill>
+                  <a:srgbClr val="1A1A1A"/>
+                </a:solidFill>
+              </a:rPr>
+              <a:t>2027年2月：移行・並行稼働</a:t>
+            </a:r>
+          </a:p>
+          <a:p>
+            <a:pPr>
+              <a:spcBef>
+                <a:spcPts val="500"/>
+              </a:spcBef>
+              <a:spcAft>
+                <a:spcPts val="200"/>
+              </a:spcAft>
+            </a:pPr>
+            <a:r>
+              <a:rPr sz="1000" b="0" i="0">
+                <a:solidFill>
+                  <a:srgbClr val="1B4FA8"/>
+                </a:solidFill>
+              </a:rPr>
+              <a:t>● </a:t>
+            </a:r>
+            <a:r>
+              <a:rPr sz="1400" b="0" i="0">
+                <a:solidFill>
+                  <a:srgbClr val="1A1A1A"/>
+                </a:solidFill>
+              </a:rPr>
+              <a:t>2027年3月：本番リリース</a:t>
+            </a:r>
+          </a:p>
+        </p:txBody>
+      </p:sp>
+      <p:pic>
+        <p:nvPicPr>
+          <p:cNvPr id="6" name="Picture 5" descr="logo.png"/>
+          <p:cNvPicPr>
+            <a:picLocks noChangeAspect="1"/>
+          </p:cNvPicPr>
+          <p:nvPr/>
+        </p:nvPicPr>
+        <p:blipFill>
+          <a:blip r:embed="rId2"/>
+          <a:stretch>
+            <a:fillRect/>
+          </a:stretch>
+        </p:blipFill>
+        <p:spPr>
+          <a:xfrm>
+            <a:off x="10040112" y="73152"/>
+            <a:ext cx="2011680" cy="625706"/>
+          </a:xfrm>
+          <a:prstGeom prst="rect">
+            <a:avLst/>
+          </a:prstGeom>
+        </p:spPr>
+      </p:pic>
+      <p:sp>
+        <p:nvSpPr>
+          <p:cNvPr id="7" name="Rectangle 6"/>
           <p:cNvSpPr/>
           <p:nvPr/>
         </p:nvSpPr>
         <p:spPr>
           <a:xfrm>
-            <a:off x="320040" y="0"/>
-            <a:ext cx="11868912" cy="1005840"/>
+            <a:off x="0" y="6473952"/>
+            <a:ext cx="12188952" cy="15240"/>
           </a:xfrm>
           <a:prstGeom prst="rect">
             <a:avLst/>
           </a:prstGeom>
           <a:solidFill>
-            <a:srgbClr val="0047AB"/>
+            <a:srgbClr val="000000"/>
           </a:solidFill>
           <a:ln>
             <a:noFill/>
@@ -4478,14 +4889,14 @@
       </p:sp>
       <p:sp>
         <p:nvSpPr>
-          <p:cNvPr id="5" name="TextBox 4"/>
+          <p:cNvPr id="8" name="TextBox 7"/>
           <p:cNvSpPr txBox="1"/>
           <p:nvPr/>
         </p:nvSpPr>
         <p:spPr>
           <a:xfrm>
-            <a:off x="548640" y="137160"/>
-            <a:ext cx="11274552" cy="777240"/>
+            <a:off x="274320" y="6512052"/>
+            <a:ext cx="7315200" cy="320040"/>
           </a:xfrm>
           <a:prstGeom prst="rect">
             <a:avLst/>
@@ -4493,32 +4904,32 @@
           <a:noFill/>
         </p:spPr>
         <p:txBody>
-          <a:bodyPr wrap="square">
+          <a:bodyPr wrap="none">
             <a:spAutoFit/>
           </a:bodyPr>
           <a:lstStyle/>
           <a:p>
             <a:r>
-              <a:rPr sz="2200" b="1" i="0">
-                <a:solidFill>
-                  <a:srgbClr val="FFFFFF"/>
+              <a:rPr sz="800" b="0" i="0">
+                <a:solidFill>
+                  <a:srgbClr val="808080"/>
                 </a:solidFill>
               </a:rPr>
-              <a:t>導入スケジュール</a:t>
-            </a:r>
-          </a:p>
-        </p:txBody>
-      </p:sp>
-      <p:sp>
-        <p:nvSpPr>
-          <p:cNvPr id="6" name="TextBox 5"/>
+              <a:t>Confidential All Rights Reserved SALESCORE Inc.</a:t>
+            </a:r>
+          </a:p>
+        </p:txBody>
+      </p:sp>
+      <p:sp>
+        <p:nvSpPr>
+          <p:cNvPr id="9" name="TextBox 8"/>
           <p:cNvSpPr txBox="1"/>
           <p:nvPr/>
         </p:nvSpPr>
         <p:spPr>
           <a:xfrm>
-            <a:off x="548640" y="1143000"/>
-            <a:ext cx="11365992" cy="5486400"/>
+            <a:off x="11640312" y="6512052"/>
+            <a:ext cx="411480" cy="320040"/>
           </a:xfrm>
           <a:prstGeom prst="rect">
             <a:avLst/>
@@ -4526,151 +4937,23 @@
           <a:noFill/>
         </p:spPr>
         <p:txBody>
-          <a:bodyPr wrap="square">
+          <a:bodyPr wrap="none">
             <a:spAutoFit/>
           </a:bodyPr>
           <a:lstStyle/>
           <a:p>
-            <a:pPr>
-              <a:spcBef>
-                <a:spcPts val="400"/>
-              </a:spcBef>
-              <a:spcAft>
-                <a:spcPts val="200"/>
-              </a:spcAft>
-            </a:pPr>
-            <a:r>
-              <a:rPr sz="1600" b="0" i="0">
-                <a:solidFill>
-                  <a:srgbClr val="1A1A2E"/>
+            <a:pPr algn="r"/>
+            <a:r>
+              <a:rPr sz="900" b="0" i="0">
+                <a:solidFill>
+                  <a:srgbClr val="808080"/>
                 </a:solidFill>
               </a:rPr>
-              <a:t>・2026年10月：要件定義・設計開始</a:t>
-            </a:r>
-          </a:p>
-          <a:p>
-            <a:pPr>
-              <a:spcBef>
-                <a:spcPts val="400"/>
-              </a:spcBef>
-              <a:spcAft>
-                <a:spcPts val="200"/>
-              </a:spcAft>
-            </a:pPr>
-            <a:r>
-              <a:rPr sz="1600" b="0" i="0">
-                <a:solidFill>
-                  <a:srgbClr val="1A1A2E"/>
-                </a:solidFill>
-              </a:rPr>
-              <a:t>・2026年12月：開発・テスト</a:t>
-            </a:r>
-          </a:p>
-          <a:p>
-            <a:pPr>
-              <a:spcBef>
-                <a:spcPts val="400"/>
-              </a:spcBef>
-              <a:spcAft>
-                <a:spcPts val="200"/>
-              </a:spcAft>
-            </a:pPr>
-            <a:r>
-              <a:rPr sz="1600" b="0" i="0">
-                <a:solidFill>
-                  <a:srgbClr val="1A1A2E"/>
-                </a:solidFill>
-              </a:rPr>
-              <a:t>・2027年2月：移行・並行稼働</a:t>
-            </a:r>
-          </a:p>
-          <a:p>
-            <a:pPr>
-              <a:spcBef>
-                <a:spcPts val="400"/>
-              </a:spcBef>
-              <a:spcAft>
-                <a:spcPts val="200"/>
-              </a:spcAft>
-            </a:pPr>
-            <a:r>
-              <a:rPr sz="1600" b="0" i="0">
-                <a:solidFill>
-                  <a:srgbClr val="1A1A2E"/>
-                </a:solidFill>
-              </a:rPr>
-              <a:t>・2027年3月：本番リリース</a:t>
-            </a:r>
-          </a:p>
-        </p:txBody>
-      </p:sp>
-      <p:sp>
-        <p:nvSpPr>
-          <p:cNvPr id="7" name="Rectangle 6"/>
-          <p:cNvSpPr/>
-          <p:nvPr/>
-        </p:nvSpPr>
-        <p:spPr>
-          <a:xfrm>
-            <a:off x="320040" y="6748272"/>
-            <a:ext cx="11868912" cy="109728"/>
-          </a:xfrm>
-          <a:prstGeom prst="rect">
-            <a:avLst/>
-          </a:prstGeom>
-          <a:solidFill>
-            <a:srgbClr val="008BD8"/>
-          </a:solidFill>
-          <a:ln>
-            <a:noFill/>
-          </a:ln>
-        </p:spPr>
-        <p:style>
-          <a:lnRef idx="1">
-            <a:schemeClr val="accent1"/>
-          </a:lnRef>
-          <a:fillRef idx="3">
-            <a:schemeClr val="accent1"/>
-          </a:fillRef>
-          <a:effectRef idx="2">
-            <a:schemeClr val="accent1"/>
-          </a:effectRef>
-          <a:fontRef idx="minor">
-            <a:schemeClr val="lt1"/>
-          </a:fontRef>
-        </p:style>
-        <p:txBody>
-          <a:bodyPr rtlCol="0" anchor="ctr"/>
-          <a:lstStyle/>
-          <a:p>
-            <a:pPr algn="ctr"/>
-          </a:p>
-        </p:txBody>
-      </p:sp>
-      <p:pic>
-        <p:nvPicPr>
-          <p:cNvPr id="8" name="Picture 7" descr="logo.png"/>
-          <p:cNvPicPr>
-            <a:picLocks noChangeAspect="1"/>
-          </p:cNvPicPr>
-          <p:nvPr/>
-        </p:nvPicPr>
-        <p:blipFill>
-          <a:blip r:embed="rId2"/>
-          <a:stretch>
-            <a:fillRect/>
-          </a:stretch>
-        </p:blipFill>
-        <p:spPr>
-          <a:xfrm>
-            <a:off x="10040112" y="73152"/>
-            <a:ext cx="2011680" cy="625706"/>
-          </a:xfrm>
-          <a:prstGeom prst="rect">
-            <a:avLst/>
-          </a:prstGeom>
-        </p:spPr>
-      </p:pic>
+              <a:t>5</a:t>
+            </a:r>
+          </a:p>
+        </p:txBody>
+      </p:sp>
     </p:spTree>
   </p:cSld>
   <p:clrMapOvr>

--- a/test_output.pptx
+++ b/test_output.pptx
@@ -3112,6 +3112,7 @@
           <a:ln>
             <a:noFill/>
           </a:ln>
+          <a:effectLst/>
         </p:spPr>
         <p:style>
           <a:lnRef idx="1">
@@ -3155,6 +3156,7 @@
           <a:ln>
             <a:noFill/>
           </a:ln>
+          <a:effectLst/>
         </p:spPr>
         <p:style>
           <a:lnRef idx="1">
@@ -3231,6 +3233,7 @@
           <a:ln>
             <a:noFill/>
           </a:ln>
+          <a:effectLst/>
         </p:spPr>
         <p:style>
           <a:lnRef idx="1">
@@ -3298,6 +3301,7 @@
           <a:ln>
             <a:noFill/>
           </a:ln>
+          <a:effectLst/>
         </p:spPr>
         <p:style>
           <a:lnRef idx="1">
@@ -3426,6 +3430,7 @@
           <a:ln>
             <a:noFill/>
           </a:ln>
+          <a:effectLst/>
         </p:spPr>
         <p:style>
           <a:lnRef idx="1">
@@ -3502,6 +3507,7 @@
           <a:ln>
             <a:noFill/>
           </a:ln>
+          <a:effectLst/>
         </p:spPr>
         <p:style>
           <a:lnRef idx="1">
@@ -3670,6 +3676,7 @@
           <a:ln>
             <a:noFill/>
           </a:ln>
+          <a:effectLst/>
         </p:spPr>
         <p:style>
           <a:lnRef idx="1">
@@ -3798,6 +3805,7 @@
           <a:ln>
             <a:noFill/>
           </a:ln>
+          <a:effectLst/>
         </p:spPr>
         <p:style>
           <a:lnRef idx="1">
@@ -3874,6 +3882,7 @@
           <a:ln>
             <a:noFill/>
           </a:ln>
+          <a:effectLst/>
         </p:spPr>
         <p:style>
           <a:lnRef idx="1">
@@ -4068,6 +4077,7 @@
           <a:ln>
             <a:noFill/>
           </a:ln>
+          <a:effectLst/>
         </p:spPr>
         <p:style>
           <a:lnRef idx="1">
@@ -4196,6 +4206,7 @@
           <a:ln>
             <a:noFill/>
           </a:ln>
+          <a:effectLst/>
         </p:spPr>
         <p:style>
           <a:lnRef idx="1">
@@ -4272,6 +4283,7 @@
           <a:ln>
             <a:noFill/>
           </a:ln>
+          <a:effectLst/>
         </p:spPr>
         <p:style>
           <a:lnRef idx="1">
@@ -4466,6 +4478,7 @@
           <a:ln>
             <a:noFill/>
           </a:ln>
+          <a:effectLst/>
         </p:spPr>
         <p:style>
           <a:lnRef idx="1">
@@ -4594,6 +4607,7 @@
           <a:ln>
             <a:noFill/>
           </a:ln>
+          <a:effectLst/>
         </p:spPr>
         <p:style>
           <a:lnRef idx="1">
@@ -4670,6 +4684,7 @@
           <a:ln>
             <a:noFill/>
           </a:ln>
+          <a:effectLst/>
         </p:spPr>
         <p:style>
           <a:lnRef idx="1">
@@ -4864,6 +4879,7 @@
           <a:ln>
             <a:noFill/>
           </a:ln>
+          <a:effectLst/>
         </p:spPr>
         <p:style>
           <a:lnRef idx="1">

--- a/test_output.pptx
+++ b/test_output.pptx
@@ -10,6 +10,7 @@
     <p:sldId id="258" r:id="rId9"/>
     <p:sldId id="259" r:id="rId10"/>
     <p:sldId id="260" r:id="rId11"/>
+    <p:sldId id="261" r:id="rId12"/>
   </p:sldIdLst>
   <p:sldSz cx="12188952" cy="6858000" type="screen4x3"/>
   <p:notesSz cx="6858000" cy="9144000"/>
@@ -3101,7 +3102,7 @@
         <p:spPr>
           <a:xfrm>
             <a:off x="0" y="0"/>
-            <a:ext cx="12188952" cy="4114800"/>
+            <a:ext cx="12188952" cy="3977639"/>
           </a:xfrm>
           <a:prstGeom prst="rect">
             <a:avLst/>
@@ -3144,8 +3145,8 @@
         </p:nvSpPr>
         <p:spPr>
           <a:xfrm>
-            <a:off x="0" y="4114800"/>
-            <a:ext cx="12188952" cy="2743200"/>
+            <a:off x="0" y="3977639"/>
+            <a:ext cx="12188952" cy="2880360"/>
           </a:xfrm>
           <a:prstGeom prst="rect">
             <a:avLst/>
@@ -3182,47 +3183,14 @@
       </p:sp>
       <p:sp>
         <p:nvSpPr>
-          <p:cNvPr id="4" name="TextBox 3"/>
-          <p:cNvSpPr txBox="1"/>
-          <p:nvPr/>
-        </p:nvSpPr>
-        <p:spPr>
-          <a:xfrm>
-            <a:off x="914400" y="1280160"/>
-            <a:ext cx="8988552" cy="2194560"/>
-          </a:xfrm>
-          <a:prstGeom prst="rect">
-            <a:avLst/>
-          </a:prstGeom>
-          <a:noFill/>
-        </p:spPr>
-        <p:txBody>
-          <a:bodyPr wrap="square">
-            <a:spAutoFit/>
-          </a:bodyPr>
-          <a:lstStyle/>
-          <a:p>
-            <a:r>
-              <a:rPr sz="3200" b="1" i="0">
-                <a:solidFill>
-                  <a:srgbClr val="FFFFFF"/>
-                </a:solidFill>
-              </a:rPr>
-              <a:t>〇〇市 次期システム導入提案書</a:t>
-            </a:r>
-          </a:p>
-        </p:txBody>
-      </p:sp>
-      <p:sp>
-        <p:nvSpPr>
-          <p:cNvPr id="5" name="Rectangle 4"/>
+          <p:cNvPr id="4" name="Rectangle 3"/>
           <p:cNvSpPr/>
           <p:nvPr/>
         </p:nvSpPr>
         <p:spPr>
           <a:xfrm>
-            <a:off x="0" y="4059936"/>
-            <a:ext cx="12188952" cy="54864"/>
+            <a:off x="0" y="3939539"/>
+            <a:ext cx="12188952" cy="76200"/>
           </a:xfrm>
           <a:prstGeom prst="rect">
             <a:avLst/>
@@ -3257,9 +3225,80 @@
           </a:p>
         </p:txBody>
       </p:sp>
+      <p:sp>
+        <p:nvSpPr>
+          <p:cNvPr id="5" name="TextBox 4"/>
+          <p:cNvSpPr txBox="1"/>
+          <p:nvPr/>
+        </p:nvSpPr>
+        <p:spPr>
+          <a:xfrm>
+            <a:off x="914400" y="1113739"/>
+            <a:ext cx="8714232" cy="2187702"/>
+          </a:xfrm>
+          <a:prstGeom prst="rect">
+            <a:avLst/>
+          </a:prstGeom>
+          <a:noFill/>
+        </p:spPr>
+        <p:txBody>
+          <a:bodyPr wrap="square">
+            <a:spAutoFit/>
+          </a:bodyPr>
+          <a:lstStyle/>
+          <a:p>
+            <a:pPr>
+              <a:spcAft>
+                <a:spcPts val="400"/>
+              </a:spcAft>
+            </a:pPr>
+            <a:r>
+              <a:rPr sz="3400" b="1" i="0">
+                <a:solidFill>
+                  <a:srgbClr val="FFFFFF"/>
+                </a:solidFill>
+              </a:rPr>
+              <a:t>営業力強化プロジェクト提案書</a:t>
+            </a:r>
+          </a:p>
+        </p:txBody>
+      </p:sp>
+      <p:sp>
+        <p:nvSpPr>
+          <p:cNvPr id="6" name="TextBox 5"/>
+          <p:cNvSpPr txBox="1"/>
+          <p:nvPr/>
+        </p:nvSpPr>
+        <p:spPr>
+          <a:xfrm>
+            <a:off x="914400" y="3301441"/>
+            <a:ext cx="8714232" cy="822960"/>
+          </a:xfrm>
+          <a:prstGeom prst="rect">
+            <a:avLst/>
+          </a:prstGeom>
+          <a:noFill/>
+        </p:spPr>
+        <p:txBody>
+          <a:bodyPr wrap="square">
+            <a:spAutoFit/>
+          </a:bodyPr>
+          <a:lstStyle/>
+          <a:p>
+            <a:r>
+              <a:rPr sz="1300" b="0" i="0">
+                <a:solidFill>
+                  <a:srgbClr val="CCD8F0"/>
+                </a:solidFill>
+              </a:rPr>
+              <a:t>株式会社サンプル御中　2026年3月</a:t>
+            </a:r>
+          </a:p>
+        </p:txBody>
+      </p:sp>
       <p:pic>
         <p:nvPicPr>
-          <p:cNvPr id="6" name="Picture 5" descr="logo.png"/>
+          <p:cNvPr id="7" name="Picture 6" descr="logo.png"/>
           <p:cNvPicPr>
             <a:picLocks noChangeAspect="1"/>
           </p:cNvPicPr>
@@ -3283,7 +3322,7 @@
       </p:pic>
       <p:sp>
         <p:nvSpPr>
-          <p:cNvPr id="7" name="Rectangle 6"/>
+          <p:cNvPr id="8" name="Rectangle 7"/>
           <p:cNvSpPr/>
           <p:nvPr/>
         </p:nvSpPr>
@@ -3296,7 +3335,7 @@
             <a:avLst/>
           </a:prstGeom>
           <a:solidFill>
-            <a:srgbClr val="000000"/>
+            <a:srgbClr val="1D3461"/>
           </a:solidFill>
           <a:ln>
             <a:noFill/>
@@ -3327,14 +3366,14 @@
       </p:sp>
       <p:sp>
         <p:nvSpPr>
-          <p:cNvPr id="8" name="TextBox 7"/>
+          <p:cNvPr id="9" name="TextBox 8"/>
           <p:cNvSpPr txBox="1"/>
           <p:nvPr/>
         </p:nvSpPr>
         <p:spPr>
           <a:xfrm>
-            <a:off x="274320" y="6512052"/>
-            <a:ext cx="7315200" cy="320040"/>
+            <a:off x="457200" y="6524752"/>
+            <a:ext cx="7315200" cy="292608"/>
           </a:xfrm>
           <a:prstGeom prst="rect">
             <a:avLst/>
@@ -3348,9 +3387,9 @@
           <a:lstStyle/>
           <a:p>
             <a:r>
-              <a:rPr sz="800" b="0" i="0">
-                <a:solidFill>
-                  <a:srgbClr val="808080"/>
+              <a:rPr sz="750" b="0" i="0">
+                <a:solidFill>
+                  <a:srgbClr val="888888"/>
                 </a:solidFill>
               </a:rPr>
               <a:t>Confidential All Rights Reserved SALESCORE Inc.</a:t>
@@ -3360,14 +3399,14 @@
       </p:sp>
       <p:sp>
         <p:nvSpPr>
-          <p:cNvPr id="9" name="TextBox 8"/>
+          <p:cNvPr id="10" name="TextBox 9"/>
           <p:cNvSpPr txBox="1"/>
           <p:nvPr/>
         </p:nvSpPr>
         <p:spPr>
           <a:xfrm>
-            <a:off x="11640312" y="6512052"/>
-            <a:ext cx="411480" cy="320040"/>
+            <a:off x="5820156" y="6524752"/>
+            <a:ext cx="548640" cy="292608"/>
           </a:xfrm>
           <a:prstGeom prst="rect">
             <a:avLst/>
@@ -3380,11 +3419,11 @@
           </a:bodyPr>
           <a:lstStyle/>
           <a:p>
-            <a:pPr algn="r"/>
-            <a:r>
-              <a:rPr sz="900" b="0" i="0">
-                <a:solidFill>
-                  <a:srgbClr val="808080"/>
+            <a:pPr algn="ctr"/>
+            <a:r>
+              <a:rPr sz="850" b="0" i="0">
+                <a:solidFill>
+                  <a:srgbClr val="888888"/>
                 </a:solidFill>
               </a:rPr>
               <a:t>1</a:t>
@@ -3425,7 +3464,7 @@
             <a:avLst/>
           </a:prstGeom>
           <a:solidFill>
-            <a:srgbClr val="FFFFFF"/>
+            <a:srgbClr val="1D3461"/>
           </a:solidFill>
           <a:ln>
             <a:noFill/>
@@ -3462,8 +3501,8 @@
         </p:nvSpPr>
         <p:spPr>
           <a:xfrm>
-            <a:off x="320040" y="91440"/>
-            <a:ext cx="9537192" cy="548640"/>
+            <a:off x="1097280" y="2514600"/>
+            <a:ext cx="9994392" cy="1097280"/>
           </a:xfrm>
           <a:prstGeom prst="rect">
             <a:avLst/>
@@ -3471,18 +3510,18 @@
           <a:noFill/>
         </p:spPr>
         <p:txBody>
-          <a:bodyPr wrap="none">
+          <a:bodyPr wrap="square">
             <a:spAutoFit/>
           </a:bodyPr>
           <a:lstStyle/>
           <a:p>
             <a:r>
-              <a:rPr sz="2200" b="1" i="0">
-                <a:solidFill>
-                  <a:srgbClr val="1A1A1A"/>
-                </a:solidFill>
-              </a:rPr>
-              <a:t>概要</a:t>
+              <a:rPr sz="3600" b="1" i="0">
+                <a:solidFill>
+                  <a:srgbClr val="FFFFFF"/>
+                </a:solidFill>
+              </a:rPr>
+              <a:t>1. 現状分析と課題</a:t>
             </a:r>
           </a:p>
         </p:txBody>
@@ -3495,14 +3534,14 @@
         </p:nvSpPr>
         <p:spPr>
           <a:xfrm>
-            <a:off x="0" y="658368"/>
-            <a:ext cx="12188952" cy="15240"/>
+            <a:off x="1097280" y="3657600"/>
+            <a:ext cx="2286000" cy="38100"/>
           </a:xfrm>
           <a:prstGeom prst="rect">
             <a:avLst/>
           </a:prstGeom>
           <a:solidFill>
-            <a:srgbClr val="000000"/>
+            <a:srgbClr val="1E6FD8"/>
           </a:solidFill>
           <a:ln>
             <a:noFill/>
@@ -3531,110 +3570,9 @@
           </a:p>
         </p:txBody>
       </p:sp>
-      <p:sp>
-        <p:nvSpPr>
-          <p:cNvPr id="5" name="TextBox 4"/>
-          <p:cNvSpPr txBox="1"/>
-          <p:nvPr/>
-        </p:nvSpPr>
-        <p:spPr>
-          <a:xfrm>
-            <a:off x="457200" y="841248"/>
-            <a:ext cx="11457432" cy="5541264"/>
-          </a:xfrm>
-          <a:prstGeom prst="rect">
-            <a:avLst/>
-          </a:prstGeom>
-          <a:noFill/>
-        </p:spPr>
-        <p:txBody>
-          <a:bodyPr wrap="square">
-            <a:spAutoFit/>
-          </a:bodyPr>
-          <a:lstStyle/>
-          <a:p>
-            <a:pPr>
-              <a:spcBef>
-                <a:spcPts val="500"/>
-              </a:spcBef>
-              <a:spcAft>
-                <a:spcPts val="200"/>
-              </a:spcAft>
-            </a:pPr>
-            <a:r>
-              <a:rPr sz="1000" b="0" i="0">
-                <a:solidFill>
-                  <a:srgbClr val="1B4FA8"/>
-                </a:solidFill>
-              </a:rPr>
-              <a:t>● </a:t>
-            </a:r>
-            <a:r>
-              <a:rPr sz="1400" b="0" i="0">
-                <a:solidFill>
-                  <a:srgbClr val="1A1A1A"/>
-                </a:solidFill>
-              </a:rPr>
-              <a:t>本提案は〇〇市の次期業務システム導入に関するものです</a:t>
-            </a:r>
-          </a:p>
-          <a:p>
-            <a:pPr>
-              <a:spcBef>
-                <a:spcPts val="500"/>
-              </a:spcBef>
-              <a:spcAft>
-                <a:spcPts val="200"/>
-              </a:spcAft>
-            </a:pPr>
-            <a:r>
-              <a:rPr sz="1000" b="0" i="0">
-                <a:solidFill>
-                  <a:srgbClr val="1B4FA8"/>
-                </a:solidFill>
-              </a:rPr>
-              <a:t>● </a:t>
-            </a:r>
-            <a:r>
-              <a:rPr sz="1400" b="0" i="0">
-                <a:solidFill>
-                  <a:srgbClr val="1A1A1A"/>
-                </a:solidFill>
-              </a:rPr>
-              <a:t>現行システムの課題を解決し、業務効率化を実現します</a:t>
-            </a:r>
-          </a:p>
-          <a:p>
-            <a:pPr>
-              <a:spcBef>
-                <a:spcPts val="500"/>
-              </a:spcBef>
-              <a:spcAft>
-                <a:spcPts val="200"/>
-              </a:spcAft>
-            </a:pPr>
-            <a:r>
-              <a:rPr sz="1000" b="0" i="0">
-                <a:solidFill>
-                  <a:srgbClr val="1B4FA8"/>
-                </a:solidFill>
-              </a:rPr>
-              <a:t>● </a:t>
-            </a:r>
-            <a:r>
-              <a:rPr sz="1400" b="0" i="0">
-                <a:solidFill>
-                  <a:srgbClr val="1A1A1A"/>
-                </a:solidFill>
-              </a:rPr>
-              <a:t>導入期間：2026年10月〜2027年3月</a:t>
-            </a:r>
-          </a:p>
-        </p:txBody>
-      </p:sp>
       <p:pic>
         <p:nvPicPr>
-          <p:cNvPr id="6" name="Picture 5" descr="logo.png"/>
+          <p:cNvPr id="5" name="Picture 4" descr="logo.png"/>
           <p:cNvPicPr>
             <a:picLocks noChangeAspect="1"/>
           </p:cNvPicPr>
@@ -3658,7 +3596,7 @@
       </p:pic>
       <p:sp>
         <p:nvSpPr>
-          <p:cNvPr id="7" name="Rectangle 6"/>
+          <p:cNvPr id="6" name="Rectangle 5"/>
           <p:cNvSpPr/>
           <p:nvPr/>
         </p:nvSpPr>
@@ -3671,7 +3609,7 @@
             <a:avLst/>
           </a:prstGeom>
           <a:solidFill>
-            <a:srgbClr val="000000"/>
+            <a:srgbClr val="1D3461"/>
           </a:solidFill>
           <a:ln>
             <a:noFill/>
@@ -3702,14 +3640,47 @@
       </p:sp>
       <p:sp>
         <p:nvSpPr>
+          <p:cNvPr id="7" name="TextBox 6"/>
+          <p:cNvSpPr txBox="1"/>
+          <p:nvPr/>
+        </p:nvSpPr>
+        <p:spPr>
+          <a:xfrm>
+            <a:off x="457200" y="6524752"/>
+            <a:ext cx="7315200" cy="292608"/>
+          </a:xfrm>
+          <a:prstGeom prst="rect">
+            <a:avLst/>
+          </a:prstGeom>
+          <a:noFill/>
+        </p:spPr>
+        <p:txBody>
+          <a:bodyPr wrap="none">
+            <a:spAutoFit/>
+          </a:bodyPr>
+          <a:lstStyle/>
+          <a:p>
+            <a:r>
+              <a:rPr sz="750" b="0" i="0">
+                <a:solidFill>
+                  <a:srgbClr val="888888"/>
+                </a:solidFill>
+              </a:rPr>
+              <a:t>Confidential All Rights Reserved SALESCORE Inc.</a:t>
+            </a:r>
+          </a:p>
+        </p:txBody>
+      </p:sp>
+      <p:sp>
+        <p:nvSpPr>
           <p:cNvPr id="8" name="TextBox 7"/>
           <p:cNvSpPr txBox="1"/>
           <p:nvPr/>
         </p:nvSpPr>
         <p:spPr>
           <a:xfrm>
-            <a:off x="274320" y="6512052"/>
-            <a:ext cx="7315200" cy="320040"/>
+            <a:off x="5820156" y="6524752"/>
+            <a:ext cx="548640" cy="292608"/>
           </a:xfrm>
           <a:prstGeom prst="rect">
             <a:avLst/>
@@ -3722,44 +3693,11 @@
           </a:bodyPr>
           <a:lstStyle/>
           <a:p>
-            <a:r>
-              <a:rPr sz="800" b="0" i="0">
-                <a:solidFill>
-                  <a:srgbClr val="808080"/>
-                </a:solidFill>
-              </a:rPr>
-              <a:t>Confidential All Rights Reserved SALESCORE Inc.</a:t>
-            </a:r>
-          </a:p>
-        </p:txBody>
-      </p:sp>
-      <p:sp>
-        <p:nvSpPr>
-          <p:cNvPr id="9" name="TextBox 8"/>
-          <p:cNvSpPr txBox="1"/>
-          <p:nvPr/>
-        </p:nvSpPr>
-        <p:spPr>
-          <a:xfrm>
-            <a:off x="11640312" y="6512052"/>
-            <a:ext cx="411480" cy="320040"/>
-          </a:xfrm>
-          <a:prstGeom prst="rect">
-            <a:avLst/>
-          </a:prstGeom>
-          <a:noFill/>
-        </p:spPr>
-        <p:txBody>
-          <a:bodyPr wrap="none">
-            <a:spAutoFit/>
-          </a:bodyPr>
-          <a:lstStyle/>
-          <a:p>
-            <a:pPr algn="r"/>
-            <a:r>
-              <a:rPr sz="900" b="0" i="0">
-                <a:solidFill>
-                  <a:srgbClr val="808080"/>
+            <a:pPr algn="ctr"/>
+            <a:r>
+              <a:rPr sz="850" b="0" i="0">
+                <a:solidFill>
+                  <a:srgbClr val="888888"/>
                 </a:solidFill>
               </a:rPr>
               <a:t>2</a:t>
@@ -3831,53 +3769,20 @@
       </p:sp>
       <p:sp>
         <p:nvSpPr>
-          <p:cNvPr id="3" name="TextBox 2"/>
-          <p:cNvSpPr txBox="1"/>
-          <p:nvPr/>
-        </p:nvSpPr>
-        <p:spPr>
-          <a:xfrm>
-            <a:off x="320040" y="91440"/>
-            <a:ext cx="9537192" cy="548640"/>
-          </a:xfrm>
-          <a:prstGeom prst="rect">
-            <a:avLst/>
-          </a:prstGeom>
-          <a:noFill/>
-        </p:spPr>
-        <p:txBody>
-          <a:bodyPr wrap="none">
-            <a:spAutoFit/>
-          </a:bodyPr>
-          <a:lstStyle/>
-          <a:p>
-            <a:r>
-              <a:rPr sz="2200" b="1" i="0">
-                <a:solidFill>
-                  <a:srgbClr val="1A1A1A"/>
-                </a:solidFill>
-              </a:rPr>
-              <a:t>現状の課題とニーズ</a:t>
-            </a:r>
-          </a:p>
-        </p:txBody>
-      </p:sp>
-      <p:sp>
-        <p:nvSpPr>
-          <p:cNvPr id="4" name="Rectangle 3"/>
+          <p:cNvPr id="3" name="Rectangle 2"/>
           <p:cNvSpPr/>
           <p:nvPr/>
         </p:nvSpPr>
         <p:spPr>
           <a:xfrm>
-            <a:off x="0" y="658368"/>
-            <a:ext cx="12188952" cy="15240"/>
+            <a:off x="0" y="0"/>
+            <a:ext cx="73152" cy="6858000"/>
           </a:xfrm>
           <a:prstGeom prst="rect">
             <a:avLst/>
           </a:prstGeom>
           <a:solidFill>
-            <a:srgbClr val="000000"/>
+            <a:srgbClr val="1D3461"/>
           </a:solidFill>
           <a:ln>
             <a:noFill/>
@@ -3908,14 +3813,124 @@
       </p:sp>
       <p:sp>
         <p:nvSpPr>
+          <p:cNvPr id="4" name="TextBox 3"/>
+          <p:cNvSpPr txBox="1"/>
+          <p:nvPr/>
+        </p:nvSpPr>
+        <p:spPr>
+          <a:xfrm>
+            <a:off x="457200" y="64008"/>
+            <a:ext cx="9491472" cy="219456"/>
+          </a:xfrm>
+          <a:prstGeom prst="rect">
+            <a:avLst/>
+          </a:prstGeom>
+          <a:noFill/>
+        </p:spPr>
+        <p:txBody>
+          <a:bodyPr wrap="none">
+            <a:spAutoFit/>
+          </a:bodyPr>
+          <a:lstStyle/>
+          <a:p>
+            <a:r>
+              <a:rPr sz="900" b="1" i="0">
+                <a:solidFill>
+                  <a:srgbClr val="55657A"/>
+                </a:solidFill>
+              </a:rPr>
+              <a:t>1.1. 現状分析</a:t>
+            </a:r>
+          </a:p>
+        </p:txBody>
+      </p:sp>
+      <p:sp>
+        <p:nvSpPr>
           <p:cNvPr id="5" name="TextBox 4"/>
           <p:cNvSpPr txBox="1"/>
           <p:nvPr/>
         </p:nvSpPr>
         <p:spPr>
           <a:xfrm>
-            <a:off x="457200" y="841248"/>
-            <a:ext cx="11457432" cy="5541264"/>
+            <a:off x="457200" y="246888"/>
+            <a:ext cx="9491472" cy="566928"/>
+          </a:xfrm>
+          <a:prstGeom prst="rect">
+            <a:avLst/>
+          </a:prstGeom>
+          <a:noFill/>
+        </p:spPr>
+        <p:txBody>
+          <a:bodyPr wrap="none">
+            <a:spAutoFit/>
+          </a:bodyPr>
+          <a:lstStyle/>
+          <a:p>
+            <a:r>
+              <a:rPr sz="2600" b="1" i="0">
+                <a:solidFill>
+                  <a:srgbClr val="1D3461"/>
+                </a:solidFill>
+              </a:rPr>
+              <a:t>営業組織が抱える構造的課題</a:t>
+            </a:r>
+          </a:p>
+        </p:txBody>
+      </p:sp>
+      <p:sp>
+        <p:nvSpPr>
+          <p:cNvPr id="6" name="Rectangle 5"/>
+          <p:cNvSpPr/>
+          <p:nvPr/>
+        </p:nvSpPr>
+        <p:spPr>
+          <a:xfrm>
+            <a:off x="0" y="758952"/>
+            <a:ext cx="12188952" cy="22860"/>
+          </a:xfrm>
+          <a:prstGeom prst="rect">
+            <a:avLst/>
+          </a:prstGeom>
+          <a:solidFill>
+            <a:srgbClr val="1D3461"/>
+          </a:solidFill>
+          <a:ln>
+            <a:noFill/>
+          </a:ln>
+          <a:effectLst/>
+        </p:spPr>
+        <p:style>
+          <a:lnRef idx="1">
+            <a:schemeClr val="accent1"/>
+          </a:lnRef>
+          <a:fillRef idx="3">
+            <a:schemeClr val="accent1"/>
+          </a:fillRef>
+          <a:effectRef idx="2">
+            <a:schemeClr val="accent1"/>
+          </a:effectRef>
+          <a:fontRef idx="minor">
+            <a:schemeClr val="lt1"/>
+          </a:fontRef>
+        </p:style>
+        <p:txBody>
+          <a:bodyPr rtlCol="0" anchor="ctr"/>
+          <a:lstStyle/>
+          <a:p>
+            <a:pPr algn="ctr"/>
+          </a:p>
+        </p:txBody>
+      </p:sp>
+      <p:sp>
+        <p:nvSpPr>
+          <p:cNvPr id="7" name="TextBox 6"/>
+          <p:cNvSpPr txBox="1"/>
+          <p:nvPr/>
+        </p:nvSpPr>
+        <p:spPr>
+          <a:xfrm>
+            <a:off x="457200" y="923544"/>
+            <a:ext cx="11411712" cy="548640"/>
           </a:xfrm>
           <a:prstGeom prst="rect">
             <a:avLst/>
@@ -3928,114 +3943,344 @@
           </a:bodyPr>
           <a:lstStyle/>
           <a:p>
+            <a:r>
+              <a:rPr sz="1200" b="0" i="0">
+                <a:solidFill>
+                  <a:srgbClr val="1A1A1A"/>
+                </a:solidFill>
+              </a:rPr>
+              <a:t>多くの企業では属人的な営業スタイルが定着しており、成果の再現性と組織的拡張性が阻害されている。</a:t>
+            </a:r>
+          </a:p>
+        </p:txBody>
+      </p:sp>
+      <p:sp>
+        <p:nvSpPr>
+          <p:cNvPr id="8" name="TextBox 7"/>
+          <p:cNvSpPr txBox="1"/>
+          <p:nvPr/>
+        </p:nvSpPr>
+        <p:spPr>
+          <a:xfrm>
+            <a:off x="457200" y="1517904"/>
+            <a:ext cx="11411712" cy="2381504"/>
+          </a:xfrm>
+          <a:prstGeom prst="rect">
+            <a:avLst/>
+          </a:prstGeom>
+          <a:noFill/>
+        </p:spPr>
+        <p:txBody>
+          <a:bodyPr wrap="square">
+            <a:spAutoFit/>
+          </a:bodyPr>
+          <a:lstStyle/>
+          <a:p>
             <a:pPr>
               <a:spcBef>
-                <a:spcPts val="500"/>
+                <a:spcPts val="600"/>
               </a:spcBef>
               <a:spcAft>
                 <a:spcPts val="200"/>
               </a:spcAft>
             </a:pPr>
             <a:r>
-              <a:rPr sz="1000" b="0" i="0">
+              <a:rPr sz="1200" b="0" i="0">
                 <a:solidFill>
                   <a:srgbClr val="1B4FA8"/>
                 </a:solidFill>
               </a:rPr>
-              <a:t>● </a:t>
-            </a:r>
-            <a:r>
-              <a:rPr sz="1400" b="0" i="0">
+              <a:t>• </a:t>
+            </a:r>
+            <a:r>
+              <a:rPr sz="1300" b="0" i="0">
                 <a:solidFill>
                   <a:srgbClr val="1A1A1A"/>
                 </a:solidFill>
               </a:rPr>
-              <a:t>現行システムは2010年導入で老朽化が進んでいる</a:t>
+              <a:t>トップ営業と一般営業のパフォーマンス差が3倍以上存在する</a:t>
             </a:r>
           </a:p>
           <a:p>
             <a:pPr>
               <a:spcBef>
-                <a:spcPts val="500"/>
+                <a:spcPts val="600"/>
               </a:spcBef>
               <a:spcAft>
                 <a:spcPts val="200"/>
               </a:spcAft>
             </a:pPr>
             <a:r>
-              <a:rPr sz="1000" b="0" i="0">
+              <a:rPr sz="1200" b="0" i="0">
                 <a:solidFill>
                   <a:srgbClr val="1B4FA8"/>
                 </a:solidFill>
               </a:rPr>
-              <a:t>● </a:t>
-            </a:r>
-            <a:r>
-              <a:rPr sz="1400" b="0" i="0">
+              <a:t>• </a:t>
+            </a:r>
+            <a:r>
+              <a:rPr sz="1300" b="0" i="0">
                 <a:solidFill>
                   <a:srgbClr val="1A1A1A"/>
                 </a:solidFill>
               </a:rPr>
-              <a:t>複数システムが乱立しており、データ連携が困難</a:t>
+              <a:t>ノウハウが個人の頭の中に留まり組織資産化されていない</a:t>
             </a:r>
           </a:p>
           <a:p>
             <a:pPr>
               <a:spcBef>
-                <a:spcPts val="500"/>
+                <a:spcPts val="600"/>
               </a:spcBef>
               <a:spcAft>
                 <a:spcPts val="200"/>
               </a:spcAft>
             </a:pPr>
             <a:r>
-              <a:rPr sz="1000" b="0" i="0">
+              <a:rPr sz="1200" b="0" i="0">
                 <a:solidFill>
                   <a:srgbClr val="1B4FA8"/>
                 </a:solidFill>
               </a:rPr>
-              <a:t>● </a:t>
-            </a:r>
-            <a:r>
-              <a:rPr sz="1400" b="0" i="0">
+              <a:t>• </a:t>
+            </a:r>
+            <a:r>
+              <a:rPr sz="1300" b="0" i="0">
                 <a:solidFill>
                   <a:srgbClr val="1A1A1A"/>
                 </a:solidFill>
               </a:rPr>
-              <a:t>職員のITリテラシーに差があり、操作性の改善が必要</a:t>
+              <a:t>新人育成期間が長期化し、即戦力化に平均12ヶ月を要している</a:t>
             </a:r>
           </a:p>
           <a:p>
             <a:pPr>
               <a:spcBef>
-                <a:spcPts val="500"/>
+                <a:spcPts val="600"/>
               </a:spcBef>
               <a:spcAft>
                 <a:spcPts val="200"/>
               </a:spcAft>
             </a:pPr>
             <a:r>
-              <a:rPr sz="1000" b="0" i="0">
+              <a:rPr sz="1200" b="0" i="0">
                 <a:solidFill>
                   <a:srgbClr val="1B4FA8"/>
                 </a:solidFill>
               </a:rPr>
-              <a:t>● </a:t>
-            </a:r>
-            <a:r>
-              <a:rPr sz="1400" b="0" i="0">
+              <a:t>• </a:t>
+            </a:r>
+            <a:r>
+              <a:rPr sz="1300" b="0" i="0">
                 <a:solidFill>
                   <a:srgbClr val="1A1A1A"/>
                 </a:solidFill>
               </a:rPr>
-              <a:t>セキュリティ基準への対応が不十分</a:t>
+              <a:t>データ活用が進まず「勘と経験」頼りの意思決定が常態化</a:t>
+            </a:r>
+          </a:p>
+          <a:p>
+            <a:pPr>
+              <a:spcBef>
+                <a:spcPts val="600"/>
+              </a:spcBef>
+              <a:spcAft>
+                <a:spcPts val="200"/>
+              </a:spcAft>
+            </a:pPr>
+            <a:r>
+              <a:rPr sz="1200" b="0" i="0">
+                <a:solidFill>
+                  <a:srgbClr val="1B4FA8"/>
+                </a:solidFill>
+              </a:rPr>
+              <a:t>• </a:t>
+            </a:r>
+            <a:r>
+              <a:rPr sz="1300" b="0" i="0">
+                <a:solidFill>
+                  <a:srgbClr val="1A1A1A"/>
+                </a:solidFill>
+              </a:rPr>
+              <a:t>SFAへの入力率が30%未満、活用されないデータが蓄積</a:t>
+            </a:r>
+          </a:p>
+          <a:p>
+            <a:pPr>
+              <a:spcBef>
+                <a:spcPts val="600"/>
+              </a:spcBef>
+              <a:spcAft>
+                <a:spcPts val="200"/>
+              </a:spcAft>
+            </a:pPr>
+            <a:r>
+              <a:rPr sz="1200" b="0" i="0">
+                <a:solidFill>
+                  <a:srgbClr val="1B4FA8"/>
+                </a:solidFill>
+              </a:rPr>
+              <a:t>• </a:t>
+            </a:r>
+            <a:r>
+              <a:rPr sz="1300" b="0" i="0">
+                <a:solidFill>
+                  <a:srgbClr val="1A1A1A"/>
+                </a:solidFill>
+              </a:rPr>
+              <a:t>商談の振り返りがなく、失注理由の構造分析が未実施</a:t>
+            </a:r>
+          </a:p>
+        </p:txBody>
+      </p:sp>
+      <p:sp>
+        <p:nvSpPr>
+          <p:cNvPr id="9" name="Rectangle 8"/>
+          <p:cNvSpPr/>
+          <p:nvPr/>
+        </p:nvSpPr>
+        <p:spPr>
+          <a:xfrm>
+            <a:off x="457200" y="3940683"/>
+            <a:ext cx="11411712" cy="12700"/>
+          </a:xfrm>
+          <a:prstGeom prst="rect">
+            <a:avLst/>
+          </a:prstGeom>
+          <a:solidFill>
+            <a:srgbClr val="CCCCCC"/>
+          </a:solidFill>
+          <a:ln>
+            <a:noFill/>
+          </a:ln>
+          <a:effectLst/>
+        </p:spPr>
+        <p:style>
+          <a:lnRef idx="1">
+            <a:schemeClr val="accent1"/>
+          </a:lnRef>
+          <a:fillRef idx="3">
+            <a:schemeClr val="accent1"/>
+          </a:fillRef>
+          <a:effectRef idx="2">
+            <a:schemeClr val="accent1"/>
+          </a:effectRef>
+          <a:fontRef idx="minor">
+            <a:schemeClr val="lt1"/>
+          </a:fontRef>
+        </p:style>
+        <p:txBody>
+          <a:bodyPr rtlCol="0" anchor="ctr"/>
+          <a:lstStyle/>
+          <a:p>
+            <a:pPr algn="ctr"/>
+          </a:p>
+        </p:txBody>
+      </p:sp>
+      <p:sp>
+        <p:nvSpPr>
+          <p:cNvPr id="10" name="TextBox 9"/>
+          <p:cNvSpPr txBox="1"/>
+          <p:nvPr/>
+        </p:nvSpPr>
+        <p:spPr>
+          <a:xfrm>
+            <a:off x="457200" y="4001008"/>
+            <a:ext cx="11411712" cy="2381504"/>
+          </a:xfrm>
+          <a:prstGeom prst="rect">
+            <a:avLst/>
+          </a:prstGeom>
+          <a:noFill/>
+        </p:spPr>
+        <p:txBody>
+          <a:bodyPr wrap="square">
+            <a:spAutoFit/>
+          </a:bodyPr>
+          <a:lstStyle/>
+          <a:p>
+            <a:pPr>
+              <a:spcBef>
+                <a:spcPts val="600"/>
+              </a:spcBef>
+              <a:spcAft>
+                <a:spcPts val="200"/>
+              </a:spcAft>
+            </a:pPr>
+            <a:r>
+              <a:rPr sz="1200" b="0" i="0">
+                <a:solidFill>
+                  <a:srgbClr val="1B4FA8"/>
+                </a:solidFill>
+              </a:rPr>
+              <a:t>• </a:t>
+            </a:r>
+            <a:r>
+              <a:rPr sz="1300" b="0" i="0">
+                <a:solidFill>
+                  <a:srgbClr val="1A1A1A"/>
+                </a:solidFill>
+              </a:rPr>
+              <a:t>管理職のマネジメントが属人的で、チームパフォーマンスにばらつき</a:t>
+            </a:r>
+          </a:p>
+          <a:p>
+            <a:pPr>
+              <a:spcBef>
+                <a:spcPts val="600"/>
+              </a:spcBef>
+              <a:spcAft>
+                <a:spcPts val="200"/>
+              </a:spcAft>
+            </a:pPr>
+            <a:r>
+              <a:rPr sz="1200" b="0" i="0">
+                <a:solidFill>
+                  <a:srgbClr val="1B4FA8"/>
+                </a:solidFill>
+              </a:rPr>
+              <a:t>• </a:t>
+            </a:r>
+            <a:r>
+              <a:rPr sz="1300" b="0" i="0">
+                <a:solidFill>
+                  <a:srgbClr val="1A1A1A"/>
+                </a:solidFill>
+              </a:rPr>
+              <a:t>1on1の質が個人差に依存し、組織として標準化されていない</a:t>
+            </a:r>
+          </a:p>
+          <a:p>
+            <a:pPr>
+              <a:spcBef>
+                <a:spcPts val="600"/>
+              </a:spcBef>
+              <a:spcAft>
+                <a:spcPts val="200"/>
+              </a:spcAft>
+            </a:pPr>
+            <a:r>
+              <a:rPr sz="1200" b="0" i="0">
+                <a:solidFill>
+                  <a:srgbClr val="1B4FA8"/>
+                </a:solidFill>
+              </a:rPr>
+              <a:t>• </a:t>
+            </a:r>
+            <a:r>
+              <a:rPr sz="1300" b="0" i="0">
+                <a:solidFill>
+                  <a:srgbClr val="1A1A1A"/>
+                </a:solidFill>
+              </a:rPr>
+              <a:t>KPIが結果指標（売上）のみで、プロセス指標が未整備</a:t>
             </a:r>
           </a:p>
         </p:txBody>
       </p:sp>
       <p:pic>
         <p:nvPicPr>
-          <p:cNvPr id="6" name="Picture 5" descr="logo.png"/>
+          <p:cNvPr id="11" name="Picture 10" descr="logo.png"/>
           <p:cNvPicPr>
             <a:picLocks noChangeAspect="1"/>
           </p:cNvPicPr>
@@ -4059,7 +4304,7 @@
       </p:pic>
       <p:sp>
         <p:nvSpPr>
-          <p:cNvPr id="7" name="Rectangle 6"/>
+          <p:cNvPr id="12" name="Rectangle 11"/>
           <p:cNvSpPr/>
           <p:nvPr/>
         </p:nvSpPr>
@@ -4072,7 +4317,7 @@
             <a:avLst/>
           </a:prstGeom>
           <a:solidFill>
-            <a:srgbClr val="000000"/>
+            <a:srgbClr val="1D3461"/>
           </a:solidFill>
           <a:ln>
             <a:noFill/>
@@ -4103,14 +4348,14 @@
       </p:sp>
       <p:sp>
         <p:nvSpPr>
-          <p:cNvPr id="8" name="TextBox 7"/>
+          <p:cNvPr id="13" name="TextBox 12"/>
           <p:cNvSpPr txBox="1"/>
           <p:nvPr/>
         </p:nvSpPr>
         <p:spPr>
           <a:xfrm>
-            <a:off x="274320" y="6512052"/>
-            <a:ext cx="7315200" cy="320040"/>
+            <a:off x="457200" y="6524752"/>
+            <a:ext cx="7315200" cy="292608"/>
           </a:xfrm>
           <a:prstGeom prst="rect">
             <a:avLst/>
@@ -4124,9 +4369,9 @@
           <a:lstStyle/>
           <a:p>
             <a:r>
-              <a:rPr sz="800" b="0" i="0">
-                <a:solidFill>
-                  <a:srgbClr val="808080"/>
+              <a:rPr sz="750" b="0" i="0">
+                <a:solidFill>
+                  <a:srgbClr val="888888"/>
                 </a:solidFill>
               </a:rPr>
               <a:t>Confidential All Rights Reserved SALESCORE Inc.</a:t>
@@ -4136,14 +4381,14 @@
       </p:sp>
       <p:sp>
         <p:nvSpPr>
-          <p:cNvPr id="9" name="TextBox 8"/>
+          <p:cNvPr id="14" name="TextBox 13"/>
           <p:cNvSpPr txBox="1"/>
           <p:nvPr/>
         </p:nvSpPr>
         <p:spPr>
           <a:xfrm>
-            <a:off x="11640312" y="6512052"/>
-            <a:ext cx="411480" cy="320040"/>
+            <a:off x="5820156" y="6524752"/>
+            <a:ext cx="548640" cy="292608"/>
           </a:xfrm>
           <a:prstGeom prst="rect">
             <a:avLst/>
@@ -4156,11 +4401,11 @@
           </a:bodyPr>
           <a:lstStyle/>
           <a:p>
-            <a:pPr algn="r"/>
-            <a:r>
-              <a:rPr sz="900" b="0" i="0">
-                <a:solidFill>
-                  <a:srgbClr val="808080"/>
+            <a:pPr algn="ctr"/>
+            <a:r>
+              <a:rPr sz="850" b="0" i="0">
+                <a:solidFill>
+                  <a:srgbClr val="888888"/>
                 </a:solidFill>
               </a:rPr>
               <a:t>3</a:t>
@@ -4232,53 +4477,20 @@
       </p:sp>
       <p:sp>
         <p:nvSpPr>
-          <p:cNvPr id="3" name="TextBox 2"/>
-          <p:cNvSpPr txBox="1"/>
-          <p:nvPr/>
-        </p:nvSpPr>
-        <p:spPr>
-          <a:xfrm>
-            <a:off x="320040" y="91440"/>
-            <a:ext cx="9537192" cy="548640"/>
-          </a:xfrm>
-          <a:prstGeom prst="rect">
-            <a:avLst/>
-          </a:prstGeom>
-          <a:noFill/>
-        </p:spPr>
-        <p:txBody>
-          <a:bodyPr wrap="none">
-            <a:spAutoFit/>
-          </a:bodyPr>
-          <a:lstStyle/>
-          <a:p>
-            <a:r>
-              <a:rPr sz="2200" b="1" i="0">
-                <a:solidFill>
-                  <a:srgbClr val="1A1A1A"/>
-                </a:solidFill>
-              </a:rPr>
-              <a:t>次期システムの方針</a:t>
-            </a:r>
-          </a:p>
-        </p:txBody>
-      </p:sp>
-      <p:sp>
-        <p:nvSpPr>
-          <p:cNvPr id="4" name="Rectangle 3"/>
+          <p:cNvPr id="3" name="Rectangle 2"/>
           <p:cNvSpPr/>
           <p:nvPr/>
         </p:nvSpPr>
         <p:spPr>
           <a:xfrm>
-            <a:off x="0" y="658368"/>
-            <a:ext cx="12188952" cy="15240"/>
+            <a:off x="0" y="0"/>
+            <a:ext cx="73152" cy="6858000"/>
           </a:xfrm>
           <a:prstGeom prst="rect">
             <a:avLst/>
           </a:prstGeom>
           <a:solidFill>
-            <a:srgbClr val="000000"/>
+            <a:srgbClr val="1D3461"/>
           </a:solidFill>
           <a:ln>
             <a:noFill/>
@@ -4309,14 +4521,124 @@
       </p:sp>
       <p:sp>
         <p:nvSpPr>
+          <p:cNvPr id="4" name="TextBox 3"/>
+          <p:cNvSpPr txBox="1"/>
+          <p:nvPr/>
+        </p:nvSpPr>
+        <p:spPr>
+          <a:xfrm>
+            <a:off x="457200" y="64008"/>
+            <a:ext cx="9491472" cy="219456"/>
+          </a:xfrm>
+          <a:prstGeom prst="rect">
+            <a:avLst/>
+          </a:prstGeom>
+          <a:noFill/>
+        </p:spPr>
+        <p:txBody>
+          <a:bodyPr wrap="none">
+            <a:spAutoFit/>
+          </a:bodyPr>
+          <a:lstStyle/>
+          <a:p>
+            <a:r>
+              <a:rPr sz="900" b="1" i="0">
+                <a:solidFill>
+                  <a:srgbClr val="55657A"/>
+                </a:solidFill>
+              </a:rPr>
+              <a:t>1.2. 課題構造</a:t>
+            </a:r>
+          </a:p>
+        </p:txBody>
+      </p:sp>
+      <p:sp>
+        <p:nvSpPr>
           <p:cNvPr id="5" name="TextBox 4"/>
           <p:cNvSpPr txBox="1"/>
           <p:nvPr/>
         </p:nvSpPr>
         <p:spPr>
           <a:xfrm>
-            <a:off x="457200" y="841248"/>
-            <a:ext cx="11457432" cy="5541264"/>
+            <a:off x="457200" y="246888"/>
+            <a:ext cx="9491472" cy="566928"/>
+          </a:xfrm>
+          <a:prstGeom prst="rect">
+            <a:avLst/>
+          </a:prstGeom>
+          <a:noFill/>
+        </p:spPr>
+        <p:txBody>
+          <a:bodyPr wrap="none">
+            <a:spAutoFit/>
+          </a:bodyPr>
+          <a:lstStyle/>
+          <a:p>
+            <a:r>
+              <a:rPr sz="2600" b="1" i="0">
+                <a:solidFill>
+                  <a:srgbClr val="1D3461"/>
+                </a:solidFill>
+              </a:rPr>
+              <a:t>根本原因の整理</a:t>
+            </a:r>
+          </a:p>
+        </p:txBody>
+      </p:sp>
+      <p:sp>
+        <p:nvSpPr>
+          <p:cNvPr id="6" name="Rectangle 5"/>
+          <p:cNvSpPr/>
+          <p:nvPr/>
+        </p:nvSpPr>
+        <p:spPr>
+          <a:xfrm>
+            <a:off x="0" y="758952"/>
+            <a:ext cx="12188952" cy="22860"/>
+          </a:xfrm>
+          <a:prstGeom prst="rect">
+            <a:avLst/>
+          </a:prstGeom>
+          <a:solidFill>
+            <a:srgbClr val="1D3461"/>
+          </a:solidFill>
+          <a:ln>
+            <a:noFill/>
+          </a:ln>
+          <a:effectLst/>
+        </p:spPr>
+        <p:style>
+          <a:lnRef idx="1">
+            <a:schemeClr val="accent1"/>
+          </a:lnRef>
+          <a:fillRef idx="3">
+            <a:schemeClr val="accent1"/>
+          </a:fillRef>
+          <a:effectRef idx="2">
+            <a:schemeClr val="accent1"/>
+          </a:effectRef>
+          <a:fontRef idx="minor">
+            <a:schemeClr val="lt1"/>
+          </a:fontRef>
+        </p:style>
+        <p:txBody>
+          <a:bodyPr rtlCol="0" anchor="ctr"/>
+          <a:lstStyle/>
+          <a:p>
+            <a:pPr algn="ctr"/>
+          </a:p>
+        </p:txBody>
+      </p:sp>
+      <p:sp>
+        <p:nvSpPr>
+          <p:cNvPr id="7" name="TextBox 6"/>
+          <p:cNvSpPr txBox="1"/>
+          <p:nvPr/>
+        </p:nvSpPr>
+        <p:spPr>
+          <a:xfrm>
+            <a:off x="457200" y="923544"/>
+            <a:ext cx="11411712" cy="548640"/>
           </a:xfrm>
           <a:prstGeom prst="rect">
             <a:avLst/>
@@ -4329,16 +4651,49 @@
           </a:bodyPr>
           <a:lstStyle/>
           <a:p>
+            <a:r>
+              <a:rPr sz="1200" b="0" i="0">
+                <a:solidFill>
+                  <a:srgbClr val="1A1A1A"/>
+                </a:solidFill>
+              </a:rPr>
+              <a:t>表面的な施策ではなく、仕組みと文化の両面からアプローチすることが不可欠。</a:t>
+            </a:r>
+          </a:p>
+        </p:txBody>
+      </p:sp>
+      <p:sp>
+        <p:nvSpPr>
+          <p:cNvPr id="8" name="TextBox 7"/>
+          <p:cNvSpPr txBox="1"/>
+          <p:nvPr/>
+        </p:nvSpPr>
+        <p:spPr>
+          <a:xfrm>
+            <a:off x="457200" y="1517904"/>
+            <a:ext cx="11411712" cy="4864608"/>
+          </a:xfrm>
+          <a:prstGeom prst="rect">
+            <a:avLst/>
+          </a:prstGeom>
+          <a:noFill/>
+        </p:spPr>
+        <p:txBody>
+          <a:bodyPr wrap="square">
+            <a:spAutoFit/>
+          </a:bodyPr>
+          <a:lstStyle/>
+          <a:p>
             <a:pPr>
               <a:spcBef>
-                <a:spcPts val="500"/>
+                <a:spcPts val="600"/>
               </a:spcBef>
               <a:spcAft>
                 <a:spcPts val="200"/>
               </a:spcAft>
             </a:pPr>
             <a:r>
-              <a:rPr sz="1400" b="1" i="0">
+              <a:rPr sz="1300" b="1" i="0">
                 <a:solidFill>
                   <a:srgbClr val="1B4FA8"/>
                 </a:solidFill>
@@ -4346,25 +4701,25 @@
               <a:t>1. </a:t>
             </a:r>
             <a:r>
-              <a:rPr sz="1400" b="0" i="0">
+              <a:rPr sz="1300" b="0" i="0">
                 <a:solidFill>
                   <a:srgbClr val="1A1A1A"/>
                 </a:solidFill>
               </a:rPr>
-              <a:t>クラウドベースのシステム統合</a:t>
+              <a:t>勝ちパターンの言語化・共有が未実施</a:t>
             </a:r>
           </a:p>
           <a:p>
             <a:pPr>
               <a:spcBef>
-                <a:spcPts val="500"/>
+                <a:spcPts val="600"/>
               </a:spcBef>
               <a:spcAft>
                 <a:spcPts val="200"/>
               </a:spcAft>
             </a:pPr>
             <a:r>
-              <a:rPr sz="1400" b="1" i="0">
+              <a:rPr sz="1300" b="1" i="0">
                 <a:solidFill>
                   <a:srgbClr val="1B4FA8"/>
                 </a:solidFill>
@@ -4372,25 +4727,25 @@
               <a:t>2. </a:t>
             </a:r>
             <a:r>
-              <a:rPr sz="1400" b="0" i="0">
+              <a:rPr sz="1300" b="0" i="0">
                 <a:solidFill>
                   <a:srgbClr val="1A1A1A"/>
                 </a:solidFill>
               </a:rPr>
-              <a:t>直感的なUI/UXの採用</a:t>
+              <a:t>データドリブンな意思決定プロセスが存在しない</a:t>
             </a:r>
           </a:p>
           <a:p>
             <a:pPr>
               <a:spcBef>
-                <a:spcPts val="500"/>
+                <a:spcPts val="600"/>
               </a:spcBef>
               <a:spcAft>
                 <a:spcPts val="200"/>
               </a:spcAft>
             </a:pPr>
             <a:r>
-              <a:rPr sz="1400" b="1" i="0">
+              <a:rPr sz="1300" b="1" i="0">
                 <a:solidFill>
                   <a:srgbClr val="1B4FA8"/>
                 </a:solidFill>
@@ -4398,45 +4753,19 @@
               <a:t>3. </a:t>
             </a:r>
             <a:r>
-              <a:rPr sz="1400" b="0" i="0">
+              <a:rPr sz="1300" b="0" i="0">
                 <a:solidFill>
                   <a:srgbClr val="1A1A1A"/>
                 </a:solidFill>
               </a:rPr>
-              <a:t>既存データの完全移行</a:t>
-            </a:r>
-          </a:p>
-          <a:p>
-            <a:pPr>
-              <a:spcBef>
-                <a:spcPts val="500"/>
-              </a:spcBef>
-              <a:spcAft>
-                <a:spcPts val="200"/>
-              </a:spcAft>
-            </a:pPr>
-            <a:r>
-              <a:rPr sz="1400" b="1" i="0">
-                <a:solidFill>
-                  <a:srgbClr val="1B4FA8"/>
-                </a:solidFill>
-              </a:rPr>
-              <a:t>4. </a:t>
-            </a:r>
-            <a:r>
-              <a:rPr sz="1400" b="0" i="0">
-                <a:solidFill>
-                  <a:srgbClr val="1A1A1A"/>
-                </a:solidFill>
-              </a:rPr>
-              <a:t>セキュリティ強化（ゼロトラスト対応）</a:t>
+              <a:t>習慣化を支える仕組みとツールが不足している</a:t>
             </a:r>
           </a:p>
         </p:txBody>
       </p:sp>
       <p:pic>
         <p:nvPicPr>
-          <p:cNvPr id="6" name="Picture 5" descr="logo.png"/>
+          <p:cNvPr id="9" name="Picture 8" descr="logo.png"/>
           <p:cNvPicPr>
             <a:picLocks noChangeAspect="1"/>
           </p:cNvPicPr>
@@ -4460,7 +4789,7 @@
       </p:pic>
       <p:sp>
         <p:nvSpPr>
-          <p:cNvPr id="7" name="Rectangle 6"/>
+          <p:cNvPr id="10" name="Rectangle 9"/>
           <p:cNvSpPr/>
           <p:nvPr/>
         </p:nvSpPr>
@@ -4473,7 +4802,7 @@
             <a:avLst/>
           </a:prstGeom>
           <a:solidFill>
-            <a:srgbClr val="000000"/>
+            <a:srgbClr val="1D3461"/>
           </a:solidFill>
           <a:ln>
             <a:noFill/>
@@ -4504,14 +4833,14 @@
       </p:sp>
       <p:sp>
         <p:nvSpPr>
-          <p:cNvPr id="8" name="TextBox 7"/>
+          <p:cNvPr id="11" name="TextBox 10"/>
           <p:cNvSpPr txBox="1"/>
           <p:nvPr/>
         </p:nvSpPr>
         <p:spPr>
           <a:xfrm>
-            <a:off x="274320" y="6512052"/>
-            <a:ext cx="7315200" cy="320040"/>
+            <a:off x="457200" y="6524752"/>
+            <a:ext cx="7315200" cy="292608"/>
           </a:xfrm>
           <a:prstGeom prst="rect">
             <a:avLst/>
@@ -4525,9 +4854,9 @@
           <a:lstStyle/>
           <a:p>
             <a:r>
-              <a:rPr sz="800" b="0" i="0">
-                <a:solidFill>
-                  <a:srgbClr val="808080"/>
+              <a:rPr sz="750" b="0" i="0">
+                <a:solidFill>
+                  <a:srgbClr val="888888"/>
                 </a:solidFill>
               </a:rPr>
               <a:t>Confidential All Rights Reserved SALESCORE Inc.</a:t>
@@ -4537,14 +4866,14 @@
       </p:sp>
       <p:sp>
         <p:nvSpPr>
-          <p:cNvPr id="9" name="TextBox 8"/>
+          <p:cNvPr id="12" name="TextBox 11"/>
           <p:cNvSpPr txBox="1"/>
           <p:nvPr/>
         </p:nvSpPr>
         <p:spPr>
           <a:xfrm>
-            <a:off x="11640312" y="6512052"/>
-            <a:ext cx="411480" cy="320040"/>
+            <a:off x="5820156" y="6524752"/>
+            <a:ext cx="548640" cy="292608"/>
           </a:xfrm>
           <a:prstGeom prst="rect">
             <a:avLst/>
@@ -4557,11 +4886,11 @@
           </a:bodyPr>
           <a:lstStyle/>
           <a:p>
-            <a:pPr algn="r"/>
-            <a:r>
-              <a:rPr sz="900" b="0" i="0">
-                <a:solidFill>
-                  <a:srgbClr val="808080"/>
+            <a:pPr algn="ctr"/>
+            <a:r>
+              <a:rPr sz="850" b="0" i="0">
+                <a:solidFill>
+                  <a:srgbClr val="888888"/>
                 </a:solidFill>
               </a:rPr>
               <a:t>4</a:t>
@@ -4602,7 +4931,7 @@
             <a:avLst/>
           </a:prstGeom>
           <a:solidFill>
-            <a:srgbClr val="FFFFFF"/>
+            <a:srgbClr val="1D3461"/>
           </a:solidFill>
           <a:ln>
             <a:noFill/>
@@ -4639,8 +4968,8 @@
         </p:nvSpPr>
         <p:spPr>
           <a:xfrm>
-            <a:off x="320040" y="91440"/>
-            <a:ext cx="9537192" cy="548640"/>
+            <a:off x="1097280" y="2514600"/>
+            <a:ext cx="9994392" cy="1097280"/>
           </a:xfrm>
           <a:prstGeom prst="rect">
             <a:avLst/>
@@ -4648,18 +4977,18 @@
           <a:noFill/>
         </p:spPr>
         <p:txBody>
-          <a:bodyPr wrap="none">
+          <a:bodyPr wrap="square">
             <a:spAutoFit/>
           </a:bodyPr>
           <a:lstStyle/>
           <a:p>
             <a:r>
-              <a:rPr sz="2200" b="1" i="0">
-                <a:solidFill>
-                  <a:srgbClr val="1A1A1A"/>
-                </a:solidFill>
-              </a:rPr>
-              <a:t>導入スケジュール</a:t>
+              <a:rPr sz="3600" b="1" i="0">
+                <a:solidFill>
+                  <a:srgbClr val="FFFFFF"/>
+                </a:solidFill>
+              </a:rPr>
+              <a:t>2. 提案アプローチ</a:t>
             </a:r>
           </a:p>
         </p:txBody>
@@ -4672,14 +5001,14 @@
         </p:nvSpPr>
         <p:spPr>
           <a:xfrm>
-            <a:off x="0" y="658368"/>
-            <a:ext cx="12188952" cy="15240"/>
+            <a:off x="1097280" y="3657600"/>
+            <a:ext cx="2286000" cy="38100"/>
           </a:xfrm>
           <a:prstGeom prst="rect">
             <a:avLst/>
           </a:prstGeom>
           <a:solidFill>
-            <a:srgbClr val="000000"/>
+            <a:srgbClr val="1E6FD8"/>
           </a:solidFill>
           <a:ln>
             <a:noFill/>
@@ -4708,136 +5037,9 @@
           </a:p>
         </p:txBody>
       </p:sp>
-      <p:sp>
-        <p:nvSpPr>
-          <p:cNvPr id="5" name="TextBox 4"/>
-          <p:cNvSpPr txBox="1"/>
-          <p:nvPr/>
-        </p:nvSpPr>
-        <p:spPr>
-          <a:xfrm>
-            <a:off x="457200" y="841248"/>
-            <a:ext cx="11457432" cy="5541264"/>
-          </a:xfrm>
-          <a:prstGeom prst="rect">
-            <a:avLst/>
-          </a:prstGeom>
-          <a:noFill/>
-        </p:spPr>
-        <p:txBody>
-          <a:bodyPr wrap="square">
-            <a:spAutoFit/>
-          </a:bodyPr>
-          <a:lstStyle/>
-          <a:p>
-            <a:pPr>
-              <a:spcBef>
-                <a:spcPts val="500"/>
-              </a:spcBef>
-              <a:spcAft>
-                <a:spcPts val="200"/>
-              </a:spcAft>
-            </a:pPr>
-            <a:r>
-              <a:rPr sz="1000" b="0" i="0">
-                <a:solidFill>
-                  <a:srgbClr val="1B4FA8"/>
-                </a:solidFill>
-              </a:rPr>
-              <a:t>● </a:t>
-            </a:r>
-            <a:r>
-              <a:rPr sz="1400" b="0" i="0">
-                <a:solidFill>
-                  <a:srgbClr val="1A1A1A"/>
-                </a:solidFill>
-              </a:rPr>
-              <a:t>2026年10月：要件定義・設計開始</a:t>
-            </a:r>
-          </a:p>
-          <a:p>
-            <a:pPr>
-              <a:spcBef>
-                <a:spcPts val="500"/>
-              </a:spcBef>
-              <a:spcAft>
-                <a:spcPts val="200"/>
-              </a:spcAft>
-            </a:pPr>
-            <a:r>
-              <a:rPr sz="1000" b="0" i="0">
-                <a:solidFill>
-                  <a:srgbClr val="1B4FA8"/>
-                </a:solidFill>
-              </a:rPr>
-              <a:t>● </a:t>
-            </a:r>
-            <a:r>
-              <a:rPr sz="1400" b="0" i="0">
-                <a:solidFill>
-                  <a:srgbClr val="1A1A1A"/>
-                </a:solidFill>
-              </a:rPr>
-              <a:t>2026年12月：開発・テスト</a:t>
-            </a:r>
-          </a:p>
-          <a:p>
-            <a:pPr>
-              <a:spcBef>
-                <a:spcPts val="500"/>
-              </a:spcBef>
-              <a:spcAft>
-                <a:spcPts val="200"/>
-              </a:spcAft>
-            </a:pPr>
-            <a:r>
-              <a:rPr sz="1000" b="0" i="0">
-                <a:solidFill>
-                  <a:srgbClr val="1B4FA8"/>
-                </a:solidFill>
-              </a:rPr>
-              <a:t>● </a:t>
-            </a:r>
-            <a:r>
-              <a:rPr sz="1400" b="0" i="0">
-                <a:solidFill>
-                  <a:srgbClr val="1A1A1A"/>
-                </a:solidFill>
-              </a:rPr>
-              <a:t>2027年2月：移行・並行稼働</a:t>
-            </a:r>
-          </a:p>
-          <a:p>
-            <a:pPr>
-              <a:spcBef>
-                <a:spcPts val="500"/>
-              </a:spcBef>
-              <a:spcAft>
-                <a:spcPts val="200"/>
-              </a:spcAft>
-            </a:pPr>
-            <a:r>
-              <a:rPr sz="1000" b="0" i="0">
-                <a:solidFill>
-                  <a:srgbClr val="1B4FA8"/>
-                </a:solidFill>
-              </a:rPr>
-              <a:t>● </a:t>
-            </a:r>
-            <a:r>
-              <a:rPr sz="1400" b="0" i="0">
-                <a:solidFill>
-                  <a:srgbClr val="1A1A1A"/>
-                </a:solidFill>
-              </a:rPr>
-              <a:t>2027年3月：本番リリース</a:t>
-            </a:r>
-          </a:p>
-        </p:txBody>
-      </p:sp>
       <p:pic>
         <p:nvPicPr>
-          <p:cNvPr id="6" name="Picture 5" descr="logo.png"/>
+          <p:cNvPr id="5" name="Picture 4" descr="logo.png"/>
           <p:cNvPicPr>
             <a:picLocks noChangeAspect="1"/>
           </p:cNvPicPr>
@@ -4861,7 +5063,7 @@
       </p:pic>
       <p:sp>
         <p:nvSpPr>
-          <p:cNvPr id="7" name="Rectangle 6"/>
+          <p:cNvPr id="6" name="Rectangle 5"/>
           <p:cNvSpPr/>
           <p:nvPr/>
         </p:nvSpPr>
@@ -4874,7 +5076,7 @@
             <a:avLst/>
           </a:prstGeom>
           <a:solidFill>
-            <a:srgbClr val="000000"/>
+            <a:srgbClr val="1D3461"/>
           </a:solidFill>
           <a:ln>
             <a:noFill/>
@@ -4905,14 +5107,47 @@
       </p:sp>
       <p:sp>
         <p:nvSpPr>
+          <p:cNvPr id="7" name="TextBox 6"/>
+          <p:cNvSpPr txBox="1"/>
+          <p:nvPr/>
+        </p:nvSpPr>
+        <p:spPr>
+          <a:xfrm>
+            <a:off x="457200" y="6524752"/>
+            <a:ext cx="7315200" cy="292608"/>
+          </a:xfrm>
+          <a:prstGeom prst="rect">
+            <a:avLst/>
+          </a:prstGeom>
+          <a:noFill/>
+        </p:spPr>
+        <p:txBody>
+          <a:bodyPr wrap="none">
+            <a:spAutoFit/>
+          </a:bodyPr>
+          <a:lstStyle/>
+          <a:p>
+            <a:r>
+              <a:rPr sz="750" b="0" i="0">
+                <a:solidFill>
+                  <a:srgbClr val="888888"/>
+                </a:solidFill>
+              </a:rPr>
+              <a:t>Confidential All Rights Reserved SALESCORE Inc.</a:t>
+            </a:r>
+          </a:p>
+        </p:txBody>
+      </p:sp>
+      <p:sp>
+        <p:nvSpPr>
           <p:cNvPr id="8" name="TextBox 7"/>
           <p:cNvSpPr txBox="1"/>
           <p:nvPr/>
         </p:nvSpPr>
         <p:spPr>
           <a:xfrm>
-            <a:off x="274320" y="6512052"/>
-            <a:ext cx="7315200" cy="320040"/>
+            <a:off x="5820156" y="6524752"/>
+            <a:ext cx="548640" cy="292608"/>
           </a:xfrm>
           <a:prstGeom prst="rect">
             <a:avLst/>
@@ -4925,27 +5160,134 @@
           </a:bodyPr>
           <a:lstStyle/>
           <a:p>
-            <a:r>
-              <a:rPr sz="800" b="0" i="0">
-                <a:solidFill>
-                  <a:srgbClr val="808080"/>
-                </a:solidFill>
-              </a:rPr>
-              <a:t>Confidential All Rights Reserved SALESCORE Inc.</a:t>
-            </a:r>
-          </a:p>
-        </p:txBody>
-      </p:sp>
-      <p:sp>
-        <p:nvSpPr>
-          <p:cNvPr id="9" name="TextBox 8"/>
+            <a:pPr algn="ctr"/>
+            <a:r>
+              <a:rPr sz="850" b="0" i="0">
+                <a:solidFill>
+                  <a:srgbClr val="888888"/>
+                </a:solidFill>
+              </a:rPr>
+              <a:t>5</a:t>
+            </a:r>
+          </a:p>
+        </p:txBody>
+      </p:sp>
+    </p:spTree>
+  </p:cSld>
+  <p:clrMapOvr>
+    <a:masterClrMapping/>
+  </p:clrMapOvr>
+</p:sld>
+</file>
+
+<file path=ppt/slides/slide6.xml><?xml version="1.0" encoding="utf-8"?>
+<p:sld xmlns:a="http://schemas.openxmlformats.org/drawingml/2006/main" xmlns:p="http://schemas.openxmlformats.org/presentationml/2006/main" xmlns:r="http://schemas.openxmlformats.org/officeDocument/2006/relationships">
+  <p:cSld>
+    <p:spTree>
+      <p:nvGrpSpPr>
+        <p:cNvPr id="1" name=""/>
+        <p:cNvGrpSpPr/>
+        <p:nvPr/>
+      </p:nvGrpSpPr>
+      <p:grpSpPr/>
+      <p:sp>
+        <p:nvSpPr>
+          <p:cNvPr id="2" name="Rectangle 1"/>
+          <p:cNvSpPr/>
+          <p:nvPr/>
+        </p:nvSpPr>
+        <p:spPr>
+          <a:xfrm>
+            <a:off x="0" y="0"/>
+            <a:ext cx="12188952" cy="6858000"/>
+          </a:xfrm>
+          <a:prstGeom prst="rect">
+            <a:avLst/>
+          </a:prstGeom>
+          <a:solidFill>
+            <a:srgbClr val="FFFFFF"/>
+          </a:solidFill>
+          <a:ln>
+            <a:noFill/>
+          </a:ln>
+          <a:effectLst/>
+        </p:spPr>
+        <p:style>
+          <a:lnRef idx="1">
+            <a:schemeClr val="accent1"/>
+          </a:lnRef>
+          <a:fillRef idx="3">
+            <a:schemeClr val="accent1"/>
+          </a:fillRef>
+          <a:effectRef idx="2">
+            <a:schemeClr val="accent1"/>
+          </a:effectRef>
+          <a:fontRef idx="minor">
+            <a:schemeClr val="lt1"/>
+          </a:fontRef>
+        </p:style>
+        <p:txBody>
+          <a:bodyPr rtlCol="0" anchor="ctr"/>
+          <a:lstStyle/>
+          <a:p>
+            <a:pPr algn="ctr"/>
+          </a:p>
+        </p:txBody>
+      </p:sp>
+      <p:sp>
+        <p:nvSpPr>
+          <p:cNvPr id="3" name="Rectangle 2"/>
+          <p:cNvSpPr/>
+          <p:nvPr/>
+        </p:nvSpPr>
+        <p:spPr>
+          <a:xfrm>
+            <a:off x="0" y="0"/>
+            <a:ext cx="73152" cy="6858000"/>
+          </a:xfrm>
+          <a:prstGeom prst="rect">
+            <a:avLst/>
+          </a:prstGeom>
+          <a:solidFill>
+            <a:srgbClr val="1D3461"/>
+          </a:solidFill>
+          <a:ln>
+            <a:noFill/>
+          </a:ln>
+          <a:effectLst/>
+        </p:spPr>
+        <p:style>
+          <a:lnRef idx="1">
+            <a:schemeClr val="accent1"/>
+          </a:lnRef>
+          <a:fillRef idx="3">
+            <a:schemeClr val="accent1"/>
+          </a:fillRef>
+          <a:effectRef idx="2">
+            <a:schemeClr val="accent1"/>
+          </a:effectRef>
+          <a:fontRef idx="minor">
+            <a:schemeClr val="lt1"/>
+          </a:fontRef>
+        </p:style>
+        <p:txBody>
+          <a:bodyPr rtlCol="0" anchor="ctr"/>
+          <a:lstStyle/>
+          <a:p>
+            <a:pPr algn="ctr"/>
+          </a:p>
+        </p:txBody>
+      </p:sp>
+      <p:sp>
+        <p:nvSpPr>
+          <p:cNvPr id="4" name="TextBox 3"/>
           <p:cNvSpPr txBox="1"/>
           <p:nvPr/>
         </p:nvSpPr>
         <p:spPr>
           <a:xfrm>
-            <a:off x="11640312" y="6512052"/>
-            <a:ext cx="411480" cy="320040"/>
+            <a:off x="457200" y="64008"/>
+            <a:ext cx="9491472" cy="219456"/>
           </a:xfrm>
           <a:prstGeom prst="rect">
             <a:avLst/>
@@ -4958,14 +5300,608 @@
           </a:bodyPr>
           <a:lstStyle/>
           <a:p>
-            <a:pPr algn="r"/>
-            <a:r>
-              <a:rPr sz="900" b="0" i="0">
-                <a:solidFill>
-                  <a:srgbClr val="808080"/>
-                </a:solidFill>
-              </a:rPr>
-              <a:t>5</a:t>
+            <a:r>
+              <a:rPr sz="900" b="1" i="0">
+                <a:solidFill>
+                  <a:srgbClr val="55657A"/>
+                </a:solidFill>
+              </a:rPr>
+              <a:t>2.1. 支援フレームワーク</a:t>
+            </a:r>
+          </a:p>
+        </p:txBody>
+      </p:sp>
+      <p:sp>
+        <p:nvSpPr>
+          <p:cNvPr id="5" name="TextBox 4"/>
+          <p:cNvSpPr txBox="1"/>
+          <p:nvPr/>
+        </p:nvSpPr>
+        <p:spPr>
+          <a:xfrm>
+            <a:off x="457200" y="246888"/>
+            <a:ext cx="9491472" cy="566928"/>
+          </a:xfrm>
+          <a:prstGeom prst="rect">
+            <a:avLst/>
+          </a:prstGeom>
+          <a:noFill/>
+        </p:spPr>
+        <p:txBody>
+          <a:bodyPr wrap="none">
+            <a:spAutoFit/>
+          </a:bodyPr>
+          <a:lstStyle/>
+          <a:p>
+            <a:r>
+              <a:rPr sz="2600" b="1" i="0">
+                <a:solidFill>
+                  <a:srgbClr val="1D3461"/>
+                </a:solidFill>
+              </a:rPr>
+              <a:t>SALESCOREの提供価値</a:t>
+            </a:r>
+          </a:p>
+        </p:txBody>
+      </p:sp>
+      <p:sp>
+        <p:nvSpPr>
+          <p:cNvPr id="6" name="Rectangle 5"/>
+          <p:cNvSpPr/>
+          <p:nvPr/>
+        </p:nvSpPr>
+        <p:spPr>
+          <a:xfrm>
+            <a:off x="0" y="758952"/>
+            <a:ext cx="12188952" cy="22860"/>
+          </a:xfrm>
+          <a:prstGeom prst="rect">
+            <a:avLst/>
+          </a:prstGeom>
+          <a:solidFill>
+            <a:srgbClr val="1D3461"/>
+          </a:solidFill>
+          <a:ln>
+            <a:noFill/>
+          </a:ln>
+          <a:effectLst/>
+        </p:spPr>
+        <p:style>
+          <a:lnRef idx="1">
+            <a:schemeClr val="accent1"/>
+          </a:lnRef>
+          <a:fillRef idx="3">
+            <a:schemeClr val="accent1"/>
+          </a:fillRef>
+          <a:effectRef idx="2">
+            <a:schemeClr val="accent1"/>
+          </a:effectRef>
+          <a:fontRef idx="minor">
+            <a:schemeClr val="lt1"/>
+          </a:fontRef>
+        </p:style>
+        <p:txBody>
+          <a:bodyPr rtlCol="0" anchor="ctr"/>
+          <a:lstStyle/>
+          <a:p>
+            <a:pPr algn="ctr"/>
+          </a:p>
+        </p:txBody>
+      </p:sp>
+      <p:sp>
+        <p:nvSpPr>
+          <p:cNvPr id="7" name="TextBox 6"/>
+          <p:cNvSpPr txBox="1"/>
+          <p:nvPr/>
+        </p:nvSpPr>
+        <p:spPr>
+          <a:xfrm>
+            <a:off x="457200" y="923544"/>
+            <a:ext cx="11411712" cy="548640"/>
+          </a:xfrm>
+          <a:prstGeom prst="rect">
+            <a:avLst/>
+          </a:prstGeom>
+          <a:noFill/>
+        </p:spPr>
+        <p:txBody>
+          <a:bodyPr wrap="square">
+            <a:spAutoFit/>
+          </a:bodyPr>
+          <a:lstStyle/>
+          <a:p>
+            <a:r>
+              <a:rPr sz="1200" b="0" i="0">
+                <a:solidFill>
+                  <a:srgbClr val="1A1A1A"/>
+                </a:solidFill>
+              </a:rPr>
+              <a:t>「仕組みづくり」と「文化醸成」の両輪で、再現性ある営業組織への変革を伴走支援する。</a:t>
+            </a:r>
+          </a:p>
+        </p:txBody>
+      </p:sp>
+      <p:sp>
+        <p:nvSpPr>
+          <p:cNvPr id="8" name="TextBox 7"/>
+          <p:cNvSpPr txBox="1"/>
+          <p:nvPr/>
+        </p:nvSpPr>
+        <p:spPr>
+          <a:xfrm>
+            <a:off x="457200" y="1517904"/>
+            <a:ext cx="11411712" cy="2381504"/>
+          </a:xfrm>
+          <a:prstGeom prst="rect">
+            <a:avLst/>
+          </a:prstGeom>
+          <a:noFill/>
+        </p:spPr>
+        <p:txBody>
+          <a:bodyPr wrap="square">
+            <a:spAutoFit/>
+          </a:bodyPr>
+          <a:lstStyle/>
+          <a:p>
+            <a:pPr>
+              <a:spcBef>
+                <a:spcPts val="600"/>
+              </a:spcBef>
+              <a:spcAft>
+                <a:spcPts val="200"/>
+              </a:spcAft>
+            </a:pPr>
+            <a:r>
+              <a:rPr sz="1200" b="0" i="0">
+                <a:solidFill>
+                  <a:srgbClr val="1B4FA8"/>
+                </a:solidFill>
+              </a:rPr>
+              <a:t>• </a:t>
+            </a:r>
+            <a:r>
+              <a:rPr sz="1300" b="0" i="0">
+                <a:solidFill>
+                  <a:srgbClr val="1A1A1A"/>
+                </a:solidFill>
+              </a:rPr>
+              <a:t>フェーズ1：調査・企画（約1ヶ月）</a:t>
+            </a:r>
+          </a:p>
+          <a:p>
+            <a:pPr>
+              <a:spcBef>
+                <a:spcPts val="600"/>
+              </a:spcBef>
+              <a:spcAft>
+                <a:spcPts val="200"/>
+              </a:spcAft>
+            </a:pPr>
+            <a:r>
+              <a:rPr sz="1200" b="0" i="0">
+                <a:solidFill>
+                  <a:srgbClr val="1B4FA8"/>
+                </a:solidFill>
+              </a:rPr>
+              <a:t>• </a:t>
+            </a:r>
+            <a:r>
+              <a:rPr sz="1300" b="0" i="0">
+                <a:solidFill>
+                  <a:srgbClr val="1A1A1A"/>
+                </a:solidFill>
+              </a:rPr>
+              <a:t>現状の商談録画・インタビューによるKeyアクション特定</a:t>
+            </a:r>
+          </a:p>
+          <a:p>
+            <a:pPr>
+              <a:spcBef>
+                <a:spcPts val="600"/>
+              </a:spcBef>
+              <a:spcAft>
+                <a:spcPts val="200"/>
+              </a:spcAft>
+            </a:pPr>
+            <a:r>
+              <a:rPr sz="1200" b="0" i="0">
+                <a:solidFill>
+                  <a:srgbClr val="1B4FA8"/>
+                </a:solidFill>
+              </a:rPr>
+              <a:t>• </a:t>
+            </a:r>
+            <a:r>
+              <a:rPr sz="1300" b="0" i="0">
+                <a:solidFill>
+                  <a:srgbClr val="1A1A1A"/>
+                </a:solidFill>
+              </a:rPr>
+              <a:t>AsIs/ToBe整理とKPI設計</a:t>
+            </a:r>
+          </a:p>
+          <a:p>
+            <a:pPr>
+              <a:spcBef>
+                <a:spcPts val="600"/>
+              </a:spcBef>
+              <a:spcAft>
+                <a:spcPts val="200"/>
+              </a:spcAft>
+            </a:pPr>
+            <a:r>
+              <a:rPr sz="1200" b="0" i="0">
+                <a:solidFill>
+                  <a:srgbClr val="1B4FA8"/>
+                </a:solidFill>
+              </a:rPr>
+              <a:t>• </a:t>
+            </a:r>
+            <a:r>
+              <a:rPr sz="1300" b="0" i="0">
+                <a:solidFill>
+                  <a:srgbClr val="1A1A1A"/>
+                </a:solidFill>
+              </a:rPr>
+              <a:t>フェーズ2：設計・実装（約2ヶ月）</a:t>
+            </a:r>
+          </a:p>
+          <a:p>
+            <a:pPr>
+              <a:spcBef>
+                <a:spcPts val="600"/>
+              </a:spcBef>
+              <a:spcAft>
+                <a:spcPts val="200"/>
+              </a:spcAft>
+            </a:pPr>
+            <a:r>
+              <a:rPr sz="1200" b="0" i="0">
+                <a:solidFill>
+                  <a:srgbClr val="1B4FA8"/>
+                </a:solidFill>
+              </a:rPr>
+              <a:t>• </a:t>
+            </a:r>
+            <a:r>
+              <a:rPr sz="1300" b="0" i="0">
+                <a:solidFill>
+                  <a:srgbClr val="1A1A1A"/>
+                </a:solidFill>
+              </a:rPr>
+              <a:t>SaaSダッシュボード実装と運用設計</a:t>
+            </a:r>
+          </a:p>
+          <a:p>
+            <a:pPr>
+              <a:spcBef>
+                <a:spcPts val="600"/>
+              </a:spcBef>
+              <a:spcAft>
+                <a:spcPts val="200"/>
+              </a:spcAft>
+            </a:pPr>
+            <a:r>
+              <a:rPr sz="1200" b="0" i="0">
+                <a:solidFill>
+                  <a:srgbClr val="1B4FA8"/>
+                </a:solidFill>
+              </a:rPr>
+              <a:t>• </a:t>
+            </a:r>
+            <a:r>
+              <a:rPr sz="1300" b="0" i="0">
+                <a:solidFill>
+                  <a:srgbClr val="1A1A1A"/>
+                </a:solidFill>
+              </a:rPr>
+              <a:t>営業プロセスの標準化・マニュアル整備</a:t>
+            </a:r>
+          </a:p>
+        </p:txBody>
+      </p:sp>
+      <p:sp>
+        <p:nvSpPr>
+          <p:cNvPr id="9" name="Rectangle 8"/>
+          <p:cNvSpPr/>
+          <p:nvPr/>
+        </p:nvSpPr>
+        <p:spPr>
+          <a:xfrm>
+            <a:off x="457200" y="3940683"/>
+            <a:ext cx="11411712" cy="12700"/>
+          </a:xfrm>
+          <a:prstGeom prst="rect">
+            <a:avLst/>
+          </a:prstGeom>
+          <a:solidFill>
+            <a:srgbClr val="CCCCCC"/>
+          </a:solidFill>
+          <a:ln>
+            <a:noFill/>
+          </a:ln>
+          <a:effectLst/>
+        </p:spPr>
+        <p:style>
+          <a:lnRef idx="1">
+            <a:schemeClr val="accent1"/>
+          </a:lnRef>
+          <a:fillRef idx="3">
+            <a:schemeClr val="accent1"/>
+          </a:fillRef>
+          <a:effectRef idx="2">
+            <a:schemeClr val="accent1"/>
+          </a:effectRef>
+          <a:fontRef idx="minor">
+            <a:schemeClr val="lt1"/>
+          </a:fontRef>
+        </p:style>
+        <p:txBody>
+          <a:bodyPr rtlCol="0" anchor="ctr"/>
+          <a:lstStyle/>
+          <a:p>
+            <a:pPr algn="ctr"/>
+          </a:p>
+        </p:txBody>
+      </p:sp>
+      <p:sp>
+        <p:nvSpPr>
+          <p:cNvPr id="10" name="TextBox 9"/>
+          <p:cNvSpPr txBox="1"/>
+          <p:nvPr/>
+        </p:nvSpPr>
+        <p:spPr>
+          <a:xfrm>
+            <a:off x="457200" y="4001008"/>
+            <a:ext cx="11411712" cy="2381504"/>
+          </a:xfrm>
+          <a:prstGeom prst="rect">
+            <a:avLst/>
+          </a:prstGeom>
+          <a:noFill/>
+        </p:spPr>
+        <p:txBody>
+          <a:bodyPr wrap="square">
+            <a:spAutoFit/>
+          </a:bodyPr>
+          <a:lstStyle/>
+          <a:p>
+            <a:pPr>
+              <a:spcBef>
+                <a:spcPts val="600"/>
+              </a:spcBef>
+              <a:spcAft>
+                <a:spcPts val="200"/>
+              </a:spcAft>
+            </a:pPr>
+            <a:r>
+              <a:rPr sz="1200" b="0" i="0">
+                <a:solidFill>
+                  <a:srgbClr val="1B4FA8"/>
+                </a:solidFill>
+              </a:rPr>
+              <a:t>• </a:t>
+            </a:r>
+            <a:r>
+              <a:rPr sz="1300" b="0" i="0">
+                <a:solidFill>
+                  <a:srgbClr val="1A1A1A"/>
+                </a:solidFill>
+              </a:rPr>
+              <a:t>フェーズ3：習慣化・定着（継続支援）</a:t>
+            </a:r>
+          </a:p>
+          <a:p>
+            <a:pPr>
+              <a:spcBef>
+                <a:spcPts val="600"/>
+              </a:spcBef>
+              <a:spcAft>
+                <a:spcPts val="200"/>
+              </a:spcAft>
+            </a:pPr>
+            <a:r>
+              <a:rPr sz="1200" b="0" i="0">
+                <a:solidFill>
+                  <a:srgbClr val="1B4FA8"/>
+                </a:solidFill>
+              </a:rPr>
+              <a:t>• </a:t>
+            </a:r>
+            <a:r>
+              <a:rPr sz="1300" b="0" i="0">
+                <a:solidFill>
+                  <a:srgbClr val="1A1A1A"/>
+                </a:solidFill>
+              </a:rPr>
+              <a:t>週次PDCAの仕組み化と会議体設計</a:t>
+            </a:r>
+          </a:p>
+          <a:p>
+            <a:pPr>
+              <a:spcBef>
+                <a:spcPts val="600"/>
+              </a:spcBef>
+              <a:spcAft>
+                <a:spcPts val="200"/>
+              </a:spcAft>
+            </a:pPr>
+            <a:r>
+              <a:rPr sz="1200" b="0" i="0">
+                <a:solidFill>
+                  <a:srgbClr val="1B4FA8"/>
+                </a:solidFill>
+              </a:rPr>
+              <a:t>• </a:t>
+            </a:r>
+            <a:r>
+              <a:rPr sz="1300" b="0" i="0">
+                <a:solidFill>
+                  <a:srgbClr val="1A1A1A"/>
+                </a:solidFill>
+              </a:rPr>
+              <a:t>マネジャー育成とコーチングモデル導入</a:t>
+            </a:r>
+          </a:p>
+          <a:p>
+            <a:pPr>
+              <a:spcBef>
+                <a:spcPts val="600"/>
+              </a:spcBef>
+              <a:spcAft>
+                <a:spcPts val="200"/>
+              </a:spcAft>
+            </a:pPr>
+            <a:r>
+              <a:rPr sz="1200" b="0" i="0">
+                <a:solidFill>
+                  <a:srgbClr val="1B4FA8"/>
+                </a:solidFill>
+              </a:rPr>
+              <a:t>• </a:t>
+            </a:r>
+            <a:r>
+              <a:rPr sz="1300" b="0" i="0">
+                <a:solidFill>
+                  <a:srgbClr val="1A1A1A"/>
+                </a:solidFill>
+              </a:rPr>
+              <a:t>成果測定と継続的改善サイクルの確立</a:t>
+            </a:r>
+          </a:p>
+        </p:txBody>
+      </p:sp>
+      <p:pic>
+        <p:nvPicPr>
+          <p:cNvPr id="11" name="Picture 10" descr="logo.png"/>
+          <p:cNvPicPr>
+            <a:picLocks noChangeAspect="1"/>
+          </p:cNvPicPr>
+          <p:nvPr/>
+        </p:nvPicPr>
+        <p:blipFill>
+          <a:blip r:embed="rId2"/>
+          <a:stretch>
+            <a:fillRect/>
+          </a:stretch>
+        </p:blipFill>
+        <p:spPr>
+          <a:xfrm>
+            <a:off x="10040112" y="73152"/>
+            <a:ext cx="2011680" cy="625706"/>
+          </a:xfrm>
+          <a:prstGeom prst="rect">
+            <a:avLst/>
+          </a:prstGeom>
+        </p:spPr>
+      </p:pic>
+      <p:sp>
+        <p:nvSpPr>
+          <p:cNvPr id="12" name="Rectangle 11"/>
+          <p:cNvSpPr/>
+          <p:nvPr/>
+        </p:nvSpPr>
+        <p:spPr>
+          <a:xfrm>
+            <a:off x="0" y="6473952"/>
+            <a:ext cx="12188952" cy="15240"/>
+          </a:xfrm>
+          <a:prstGeom prst="rect">
+            <a:avLst/>
+          </a:prstGeom>
+          <a:solidFill>
+            <a:srgbClr val="1D3461"/>
+          </a:solidFill>
+          <a:ln>
+            <a:noFill/>
+          </a:ln>
+          <a:effectLst/>
+        </p:spPr>
+        <p:style>
+          <a:lnRef idx="1">
+            <a:schemeClr val="accent1"/>
+          </a:lnRef>
+          <a:fillRef idx="3">
+            <a:schemeClr val="accent1"/>
+          </a:fillRef>
+          <a:effectRef idx="2">
+            <a:schemeClr val="accent1"/>
+          </a:effectRef>
+          <a:fontRef idx="minor">
+            <a:schemeClr val="lt1"/>
+          </a:fontRef>
+        </p:style>
+        <p:txBody>
+          <a:bodyPr rtlCol="0" anchor="ctr"/>
+          <a:lstStyle/>
+          <a:p>
+            <a:pPr algn="ctr"/>
+          </a:p>
+        </p:txBody>
+      </p:sp>
+      <p:sp>
+        <p:nvSpPr>
+          <p:cNvPr id="13" name="TextBox 12"/>
+          <p:cNvSpPr txBox="1"/>
+          <p:nvPr/>
+        </p:nvSpPr>
+        <p:spPr>
+          <a:xfrm>
+            <a:off x="457200" y="6524752"/>
+            <a:ext cx="7315200" cy="292608"/>
+          </a:xfrm>
+          <a:prstGeom prst="rect">
+            <a:avLst/>
+          </a:prstGeom>
+          <a:noFill/>
+        </p:spPr>
+        <p:txBody>
+          <a:bodyPr wrap="none">
+            <a:spAutoFit/>
+          </a:bodyPr>
+          <a:lstStyle/>
+          <a:p>
+            <a:r>
+              <a:rPr sz="750" b="0" i="0">
+                <a:solidFill>
+                  <a:srgbClr val="888888"/>
+                </a:solidFill>
+              </a:rPr>
+              <a:t>Confidential All Rights Reserved SALESCORE Inc.</a:t>
+            </a:r>
+          </a:p>
+        </p:txBody>
+      </p:sp>
+      <p:sp>
+        <p:nvSpPr>
+          <p:cNvPr id="14" name="TextBox 13"/>
+          <p:cNvSpPr txBox="1"/>
+          <p:nvPr/>
+        </p:nvSpPr>
+        <p:spPr>
+          <a:xfrm>
+            <a:off x="5820156" y="6524752"/>
+            <a:ext cx="548640" cy="292608"/>
+          </a:xfrm>
+          <a:prstGeom prst="rect">
+            <a:avLst/>
+          </a:prstGeom>
+          <a:noFill/>
+        </p:spPr>
+        <p:txBody>
+          <a:bodyPr wrap="none">
+            <a:spAutoFit/>
+          </a:bodyPr>
+          <a:lstStyle/>
+          <a:p>
+            <a:pPr algn="ctr"/>
+            <a:r>
+              <a:rPr sz="850" b="0" i="0">
+                <a:solidFill>
+                  <a:srgbClr val="888888"/>
+                </a:solidFill>
+              </a:rPr>
+              <a:t>6</a:t>
             </a:r>
           </a:p>
         </p:txBody>

--- a/test_output.pptx
+++ b/test_output.pptx
@@ -3923,14 +3923,58 @@
       </p:sp>
       <p:sp>
         <p:nvSpPr>
-          <p:cNvPr id="7" name="TextBox 6"/>
+          <p:cNvPr id="7" name="Rectangle 6"/>
+          <p:cNvSpPr/>
+          <p:nvPr/>
+        </p:nvSpPr>
+        <p:spPr>
+          <a:xfrm>
+            <a:off x="0" y="923544"/>
+            <a:ext cx="12188952" cy="548640"/>
+          </a:xfrm>
+          <a:prstGeom prst="rect">
+            <a:avLst/>
+          </a:prstGeom>
+          <a:solidFill>
+            <a:srgbClr val="EEF2F9"/>
+          </a:solidFill>
+          <a:ln>
+            <a:noFill/>
+          </a:ln>
+          <a:effectLst/>
+        </p:spPr>
+        <p:style>
+          <a:lnRef idx="1">
+            <a:schemeClr val="accent1"/>
+          </a:lnRef>
+          <a:fillRef idx="3">
+            <a:schemeClr val="accent1"/>
+          </a:fillRef>
+          <a:effectRef idx="2">
+            <a:schemeClr val="accent1"/>
+          </a:effectRef>
+          <a:fontRef idx="minor">
+            <a:schemeClr val="lt1"/>
+          </a:fontRef>
+        </p:style>
+        <p:txBody>
+          <a:bodyPr rtlCol="0" anchor="ctr"/>
+          <a:lstStyle/>
+          <a:p>
+            <a:pPr algn="ctr"/>
+          </a:p>
+        </p:txBody>
+      </p:sp>
+      <p:sp>
+        <p:nvSpPr>
+          <p:cNvPr id="8" name="TextBox 7"/>
           <p:cNvSpPr txBox="1"/>
           <p:nvPr/>
         </p:nvSpPr>
         <p:spPr>
           <a:xfrm>
-            <a:off x="457200" y="923544"/>
-            <a:ext cx="11411712" cy="548640"/>
+            <a:off x="457200" y="987044"/>
+            <a:ext cx="11411712" cy="472440"/>
           </a:xfrm>
           <a:prstGeom prst="rect">
             <a:avLst/>
@@ -3956,14 +4000,14 @@
       </p:sp>
       <p:sp>
         <p:nvSpPr>
-          <p:cNvPr id="8" name="TextBox 7"/>
+          <p:cNvPr id="9" name="TextBox 8"/>
           <p:cNvSpPr txBox="1"/>
           <p:nvPr/>
         </p:nvSpPr>
         <p:spPr>
           <a:xfrm>
-            <a:off x="457200" y="1517904"/>
-            <a:ext cx="11411712" cy="2381504"/>
+            <a:off x="457200" y="1545336"/>
+            <a:ext cx="11411712" cy="2367788"/>
           </a:xfrm>
           <a:prstGeom prst="rect">
             <a:avLst/>
@@ -4135,13 +4179,13 @@
       </p:sp>
       <p:sp>
         <p:nvSpPr>
-          <p:cNvPr id="9" name="Rectangle 8"/>
+          <p:cNvPr id="10" name="Rectangle 9"/>
           <p:cNvSpPr/>
           <p:nvPr/>
         </p:nvSpPr>
         <p:spPr>
           <a:xfrm>
-            <a:off x="457200" y="3940683"/>
+            <a:off x="457200" y="3954399"/>
             <a:ext cx="11411712" cy="12700"/>
           </a:xfrm>
           <a:prstGeom prst="rect">
@@ -4179,14 +4223,14 @@
       </p:sp>
       <p:sp>
         <p:nvSpPr>
-          <p:cNvPr id="10" name="TextBox 9"/>
+          <p:cNvPr id="11" name="TextBox 10"/>
           <p:cNvSpPr txBox="1"/>
           <p:nvPr/>
         </p:nvSpPr>
         <p:spPr>
           <a:xfrm>
-            <a:off x="457200" y="4001008"/>
-            <a:ext cx="11411712" cy="2381504"/>
+            <a:off x="457200" y="4014724"/>
+            <a:ext cx="11411712" cy="2367788"/>
           </a:xfrm>
           <a:prstGeom prst="rect">
             <a:avLst/>
@@ -4280,7 +4324,7 @@
       </p:sp>
       <p:pic>
         <p:nvPicPr>
-          <p:cNvPr id="11" name="Picture 10" descr="logo.png"/>
+          <p:cNvPr id="12" name="Picture 11" descr="logo.png"/>
           <p:cNvPicPr>
             <a:picLocks noChangeAspect="1"/>
           </p:cNvPicPr>
@@ -4304,7 +4348,7 @@
       </p:pic>
       <p:sp>
         <p:nvSpPr>
-          <p:cNvPr id="12" name="Rectangle 11"/>
+          <p:cNvPr id="13" name="Rectangle 12"/>
           <p:cNvSpPr/>
           <p:nvPr/>
         </p:nvSpPr>
@@ -4348,7 +4392,7 @@
       </p:sp>
       <p:sp>
         <p:nvSpPr>
-          <p:cNvPr id="13" name="TextBox 12"/>
+          <p:cNvPr id="14" name="TextBox 13"/>
           <p:cNvSpPr txBox="1"/>
           <p:nvPr/>
         </p:nvSpPr>
@@ -4381,7 +4425,7 @@
       </p:sp>
       <p:sp>
         <p:nvSpPr>
-          <p:cNvPr id="14" name="TextBox 13"/>
+          <p:cNvPr id="15" name="TextBox 14"/>
           <p:cNvSpPr txBox="1"/>
           <p:nvPr/>
         </p:nvSpPr>
@@ -4631,14 +4675,58 @@
       </p:sp>
       <p:sp>
         <p:nvSpPr>
-          <p:cNvPr id="7" name="TextBox 6"/>
+          <p:cNvPr id="7" name="Rectangle 6"/>
+          <p:cNvSpPr/>
+          <p:nvPr/>
+        </p:nvSpPr>
+        <p:spPr>
+          <a:xfrm>
+            <a:off x="0" y="923544"/>
+            <a:ext cx="12188952" cy="548640"/>
+          </a:xfrm>
+          <a:prstGeom prst="rect">
+            <a:avLst/>
+          </a:prstGeom>
+          <a:solidFill>
+            <a:srgbClr val="EEF2F9"/>
+          </a:solidFill>
+          <a:ln>
+            <a:noFill/>
+          </a:ln>
+          <a:effectLst/>
+        </p:spPr>
+        <p:style>
+          <a:lnRef idx="1">
+            <a:schemeClr val="accent1"/>
+          </a:lnRef>
+          <a:fillRef idx="3">
+            <a:schemeClr val="accent1"/>
+          </a:fillRef>
+          <a:effectRef idx="2">
+            <a:schemeClr val="accent1"/>
+          </a:effectRef>
+          <a:fontRef idx="minor">
+            <a:schemeClr val="lt1"/>
+          </a:fontRef>
+        </p:style>
+        <p:txBody>
+          <a:bodyPr rtlCol="0" anchor="ctr"/>
+          <a:lstStyle/>
+          <a:p>
+            <a:pPr algn="ctr"/>
+          </a:p>
+        </p:txBody>
+      </p:sp>
+      <p:sp>
+        <p:nvSpPr>
+          <p:cNvPr id="8" name="TextBox 7"/>
           <p:cNvSpPr txBox="1"/>
           <p:nvPr/>
         </p:nvSpPr>
         <p:spPr>
           <a:xfrm>
-            <a:off x="457200" y="923544"/>
-            <a:ext cx="11411712" cy="548640"/>
+            <a:off x="457200" y="987044"/>
+            <a:ext cx="11411712" cy="472440"/>
           </a:xfrm>
           <a:prstGeom prst="rect">
             <a:avLst/>
@@ -4664,14 +4752,14 @@
       </p:sp>
       <p:sp>
         <p:nvSpPr>
-          <p:cNvPr id="8" name="TextBox 7"/>
+          <p:cNvPr id="9" name="TextBox 8"/>
           <p:cNvSpPr txBox="1"/>
           <p:nvPr/>
         </p:nvSpPr>
         <p:spPr>
           <a:xfrm>
-            <a:off x="457200" y="1517904"/>
-            <a:ext cx="11411712" cy="4864608"/>
+            <a:off x="457200" y="1545336"/>
+            <a:ext cx="11411712" cy="4837176"/>
           </a:xfrm>
           <a:prstGeom prst="rect">
             <a:avLst/>
@@ -4765,7 +4853,7 @@
       </p:sp>
       <p:pic>
         <p:nvPicPr>
-          <p:cNvPr id="9" name="Picture 8" descr="logo.png"/>
+          <p:cNvPr id="10" name="Picture 9" descr="logo.png"/>
           <p:cNvPicPr>
             <a:picLocks noChangeAspect="1"/>
           </p:cNvPicPr>
@@ -4789,7 +4877,7 @@
       </p:pic>
       <p:sp>
         <p:nvSpPr>
-          <p:cNvPr id="10" name="Rectangle 9"/>
+          <p:cNvPr id="11" name="Rectangle 10"/>
           <p:cNvSpPr/>
           <p:nvPr/>
         </p:nvSpPr>
@@ -4833,7 +4921,7 @@
       </p:sp>
       <p:sp>
         <p:nvSpPr>
-          <p:cNvPr id="11" name="TextBox 10"/>
+          <p:cNvPr id="12" name="TextBox 11"/>
           <p:cNvSpPr txBox="1"/>
           <p:nvPr/>
         </p:nvSpPr>
@@ -4866,7 +4954,7 @@
       </p:sp>
       <p:sp>
         <p:nvSpPr>
-          <p:cNvPr id="12" name="TextBox 11"/>
+          <p:cNvPr id="13" name="TextBox 12"/>
           <p:cNvSpPr txBox="1"/>
           <p:nvPr/>
         </p:nvSpPr>
@@ -5390,14 +5478,58 @@
       </p:sp>
       <p:sp>
         <p:nvSpPr>
-          <p:cNvPr id="7" name="TextBox 6"/>
+          <p:cNvPr id="7" name="Rectangle 6"/>
+          <p:cNvSpPr/>
+          <p:nvPr/>
+        </p:nvSpPr>
+        <p:spPr>
+          <a:xfrm>
+            <a:off x="0" y="923544"/>
+            <a:ext cx="12188952" cy="548640"/>
+          </a:xfrm>
+          <a:prstGeom prst="rect">
+            <a:avLst/>
+          </a:prstGeom>
+          <a:solidFill>
+            <a:srgbClr val="EEF2F9"/>
+          </a:solidFill>
+          <a:ln>
+            <a:noFill/>
+          </a:ln>
+          <a:effectLst/>
+        </p:spPr>
+        <p:style>
+          <a:lnRef idx="1">
+            <a:schemeClr val="accent1"/>
+          </a:lnRef>
+          <a:fillRef idx="3">
+            <a:schemeClr val="accent1"/>
+          </a:fillRef>
+          <a:effectRef idx="2">
+            <a:schemeClr val="accent1"/>
+          </a:effectRef>
+          <a:fontRef idx="minor">
+            <a:schemeClr val="lt1"/>
+          </a:fontRef>
+        </p:style>
+        <p:txBody>
+          <a:bodyPr rtlCol="0" anchor="ctr"/>
+          <a:lstStyle/>
+          <a:p>
+            <a:pPr algn="ctr"/>
+          </a:p>
+        </p:txBody>
+      </p:sp>
+      <p:sp>
+        <p:nvSpPr>
+          <p:cNvPr id="8" name="TextBox 7"/>
           <p:cNvSpPr txBox="1"/>
           <p:nvPr/>
         </p:nvSpPr>
         <p:spPr>
           <a:xfrm>
-            <a:off x="457200" y="923544"/>
-            <a:ext cx="11411712" cy="548640"/>
+            <a:off x="457200" y="987044"/>
+            <a:ext cx="11411712" cy="472440"/>
           </a:xfrm>
           <a:prstGeom prst="rect">
             <a:avLst/>
@@ -5423,14 +5555,14 @@
       </p:sp>
       <p:sp>
         <p:nvSpPr>
-          <p:cNvPr id="8" name="TextBox 7"/>
+          <p:cNvPr id="9" name="TextBox 8"/>
           <p:cNvSpPr txBox="1"/>
           <p:nvPr/>
         </p:nvSpPr>
         <p:spPr>
           <a:xfrm>
-            <a:off x="457200" y="1517904"/>
-            <a:ext cx="11411712" cy="2381504"/>
+            <a:off x="457200" y="1545336"/>
+            <a:ext cx="11411712" cy="2367788"/>
           </a:xfrm>
           <a:prstGeom prst="rect">
             <a:avLst/>
@@ -5602,13 +5734,13 @@
       </p:sp>
       <p:sp>
         <p:nvSpPr>
-          <p:cNvPr id="9" name="Rectangle 8"/>
+          <p:cNvPr id="10" name="Rectangle 9"/>
           <p:cNvSpPr/>
           <p:nvPr/>
         </p:nvSpPr>
         <p:spPr>
           <a:xfrm>
-            <a:off x="457200" y="3940683"/>
+            <a:off x="457200" y="3954399"/>
             <a:ext cx="11411712" cy="12700"/>
           </a:xfrm>
           <a:prstGeom prst="rect">
@@ -5646,14 +5778,14 @@
       </p:sp>
       <p:sp>
         <p:nvSpPr>
-          <p:cNvPr id="10" name="TextBox 9"/>
+          <p:cNvPr id="11" name="TextBox 10"/>
           <p:cNvSpPr txBox="1"/>
           <p:nvPr/>
         </p:nvSpPr>
         <p:spPr>
           <a:xfrm>
-            <a:off x="457200" y="4001008"/>
-            <a:ext cx="11411712" cy="2381504"/>
+            <a:off x="457200" y="4014724"/>
+            <a:ext cx="11411712" cy="2367788"/>
           </a:xfrm>
           <a:prstGeom prst="rect">
             <a:avLst/>
@@ -5773,7 +5905,7 @@
       </p:sp>
       <p:pic>
         <p:nvPicPr>
-          <p:cNvPr id="11" name="Picture 10" descr="logo.png"/>
+          <p:cNvPr id="12" name="Picture 11" descr="logo.png"/>
           <p:cNvPicPr>
             <a:picLocks noChangeAspect="1"/>
           </p:cNvPicPr>
@@ -5797,7 +5929,7 @@
       </p:pic>
       <p:sp>
         <p:nvSpPr>
-          <p:cNvPr id="12" name="Rectangle 11"/>
+          <p:cNvPr id="13" name="Rectangle 12"/>
           <p:cNvSpPr/>
           <p:nvPr/>
         </p:nvSpPr>
@@ -5841,7 +5973,7 @@
       </p:sp>
       <p:sp>
         <p:nvSpPr>
-          <p:cNvPr id="13" name="TextBox 12"/>
+          <p:cNvPr id="14" name="TextBox 13"/>
           <p:cNvSpPr txBox="1"/>
           <p:nvPr/>
         </p:nvSpPr>
@@ -5874,7 +6006,7 @@
       </p:sp>
       <p:sp>
         <p:nvSpPr>
-          <p:cNvPr id="14" name="TextBox 13"/>
+          <p:cNvPr id="15" name="TextBox 14"/>
           <p:cNvSpPr txBox="1"/>
           <p:nvPr/>
         </p:nvSpPr>

--- a/test_output.pptx
+++ b/test_output.pptx
@@ -3335,7 +3335,7 @@
             <a:avLst/>
           </a:prstGeom>
           <a:solidFill>
-            <a:srgbClr val="1D3461"/>
+            <a:srgbClr val="000000"/>
           </a:solidFill>
           <a:ln>
             <a:noFill/>
@@ -3372,8 +3372,8 @@
         </p:nvSpPr>
         <p:spPr>
           <a:xfrm>
-            <a:off x="457200" y="6524752"/>
-            <a:ext cx="7315200" cy="292608"/>
+            <a:off x="457200" y="6512052"/>
+            <a:ext cx="7315200" cy="320040"/>
           </a:xfrm>
           <a:prstGeom prst="rect">
             <a:avLst/>
@@ -3387,9 +3387,9 @@
           <a:lstStyle/>
           <a:p>
             <a:r>
-              <a:rPr sz="750" b="0" i="0">
-                <a:solidFill>
-                  <a:srgbClr val="888888"/>
+              <a:rPr sz="800" b="0" i="0">
+                <a:solidFill>
+                  <a:srgbClr val="808080"/>
                 </a:solidFill>
               </a:rPr>
               <a:t>Confidential All Rights Reserved SALESCORE Inc.</a:t>
@@ -3405,8 +3405,8 @@
         </p:nvSpPr>
         <p:spPr>
           <a:xfrm>
-            <a:off x="5820156" y="6524752"/>
-            <a:ext cx="548640" cy="292608"/>
+            <a:off x="11640312" y="6512052"/>
+            <a:ext cx="411480" cy="320040"/>
           </a:xfrm>
           <a:prstGeom prst="rect">
             <a:avLst/>
@@ -3419,11 +3419,11 @@
           </a:bodyPr>
           <a:lstStyle/>
           <a:p>
-            <a:pPr algn="ctr"/>
-            <a:r>
-              <a:rPr sz="850" b="0" i="0">
-                <a:solidFill>
-                  <a:srgbClr val="888888"/>
+            <a:pPr algn="r"/>
+            <a:r>
+              <a:rPr sz="900" b="0" i="0">
+                <a:solidFill>
+                  <a:srgbClr val="808080"/>
                 </a:solidFill>
               </a:rPr>
               <a:t>1</a:t>
@@ -3609,7 +3609,7 @@
             <a:avLst/>
           </a:prstGeom>
           <a:solidFill>
-            <a:srgbClr val="1D3461"/>
+            <a:srgbClr val="000000"/>
           </a:solidFill>
           <a:ln>
             <a:noFill/>
@@ -3646,8 +3646,8 @@
         </p:nvSpPr>
         <p:spPr>
           <a:xfrm>
-            <a:off x="457200" y="6524752"/>
-            <a:ext cx="7315200" cy="292608"/>
+            <a:off x="457200" y="6512052"/>
+            <a:ext cx="7315200" cy="320040"/>
           </a:xfrm>
           <a:prstGeom prst="rect">
             <a:avLst/>
@@ -3661,9 +3661,9 @@
           <a:lstStyle/>
           <a:p>
             <a:r>
-              <a:rPr sz="750" b="0" i="0">
-                <a:solidFill>
-                  <a:srgbClr val="888888"/>
+              <a:rPr sz="800" b="0" i="0">
+                <a:solidFill>
+                  <a:srgbClr val="808080"/>
                 </a:solidFill>
               </a:rPr>
               <a:t>Confidential All Rights Reserved SALESCORE Inc.</a:t>
@@ -3679,8 +3679,8 @@
         </p:nvSpPr>
         <p:spPr>
           <a:xfrm>
-            <a:off x="5820156" y="6524752"/>
-            <a:ext cx="548640" cy="292608"/>
+            <a:off x="11640312" y="6512052"/>
+            <a:ext cx="411480" cy="320040"/>
           </a:xfrm>
           <a:prstGeom prst="rect">
             <a:avLst/>
@@ -3693,11 +3693,11 @@
           </a:bodyPr>
           <a:lstStyle/>
           <a:p>
-            <a:pPr algn="ctr"/>
-            <a:r>
-              <a:rPr sz="850" b="0" i="0">
-                <a:solidFill>
-                  <a:srgbClr val="888888"/>
+            <a:pPr algn="r"/>
+            <a:r>
+              <a:rPr sz="900" b="0" i="0">
+                <a:solidFill>
+                  <a:srgbClr val="808080"/>
                 </a:solidFill>
               </a:rPr>
               <a:t>2</a:t>
@@ -3769,20 +3769,86 @@
       </p:sp>
       <p:sp>
         <p:nvSpPr>
-          <p:cNvPr id="3" name="Rectangle 2"/>
+          <p:cNvPr id="3" name="TextBox 2"/>
+          <p:cNvSpPr txBox="1"/>
+          <p:nvPr/>
+        </p:nvSpPr>
+        <p:spPr>
+          <a:xfrm>
+            <a:off x="457200" y="64008"/>
+            <a:ext cx="9491472" cy="219456"/>
+          </a:xfrm>
+          <a:prstGeom prst="rect">
+            <a:avLst/>
+          </a:prstGeom>
+          <a:noFill/>
+        </p:spPr>
+        <p:txBody>
+          <a:bodyPr wrap="none">
+            <a:spAutoFit/>
+          </a:bodyPr>
+          <a:lstStyle/>
+          <a:p>
+            <a:r>
+              <a:rPr sz="900" b="1" i="0">
+                <a:solidFill>
+                  <a:srgbClr val="55657A"/>
+                </a:solidFill>
+              </a:rPr>
+              <a:t>1.1. 現状分析</a:t>
+            </a:r>
+          </a:p>
+        </p:txBody>
+      </p:sp>
+      <p:sp>
+        <p:nvSpPr>
+          <p:cNvPr id="4" name="TextBox 3"/>
+          <p:cNvSpPr txBox="1"/>
+          <p:nvPr/>
+        </p:nvSpPr>
+        <p:spPr>
+          <a:xfrm>
+            <a:off x="457200" y="246888"/>
+            <a:ext cx="9491472" cy="566928"/>
+          </a:xfrm>
+          <a:prstGeom prst="rect">
+            <a:avLst/>
+          </a:prstGeom>
+          <a:noFill/>
+        </p:spPr>
+        <p:txBody>
+          <a:bodyPr wrap="none">
+            <a:spAutoFit/>
+          </a:bodyPr>
+          <a:lstStyle/>
+          <a:p>
+            <a:r>
+              <a:rPr sz="2600" b="1" i="0">
+                <a:solidFill>
+                  <a:srgbClr val="1A1A1A"/>
+                </a:solidFill>
+              </a:rPr>
+              <a:t>営業組織が抱える構造的課題</a:t>
+            </a:r>
+          </a:p>
+        </p:txBody>
+      </p:sp>
+      <p:sp>
+        <p:nvSpPr>
+          <p:cNvPr id="5" name="Rectangle 4"/>
           <p:cNvSpPr/>
           <p:nvPr/>
         </p:nvSpPr>
         <p:spPr>
           <a:xfrm>
-            <a:off x="0" y="0"/>
-            <a:ext cx="73152" cy="6858000"/>
+            <a:off x="0" y="758952"/>
+            <a:ext cx="12188952" cy="22860"/>
           </a:xfrm>
           <a:prstGeom prst="rect">
             <a:avLst/>
           </a:prstGeom>
           <a:solidFill>
-            <a:srgbClr val="1D3461"/>
+            <a:srgbClr val="000000"/>
           </a:solidFill>
           <a:ln>
             <a:noFill/>
@@ -3813,14 +3879,14 @@
       </p:sp>
       <p:sp>
         <p:nvSpPr>
-          <p:cNvPr id="4" name="TextBox 3"/>
+          <p:cNvPr id="6" name="TextBox 5"/>
           <p:cNvSpPr txBox="1"/>
           <p:nvPr/>
         </p:nvSpPr>
         <p:spPr>
           <a:xfrm>
-            <a:off x="457200" y="64008"/>
-            <a:ext cx="9491472" cy="219456"/>
+            <a:off x="457200" y="923544"/>
+            <a:ext cx="11411712" cy="548640"/>
           </a:xfrm>
           <a:prstGeom prst="rect">
             <a:avLst/>
@@ -3828,160 +3894,6 @@
           <a:noFill/>
         </p:spPr>
         <p:txBody>
-          <a:bodyPr wrap="none">
-            <a:spAutoFit/>
-          </a:bodyPr>
-          <a:lstStyle/>
-          <a:p>
-            <a:r>
-              <a:rPr sz="900" b="1" i="0">
-                <a:solidFill>
-                  <a:srgbClr val="55657A"/>
-                </a:solidFill>
-              </a:rPr>
-              <a:t>1.1. 現状分析</a:t>
-            </a:r>
-          </a:p>
-        </p:txBody>
-      </p:sp>
-      <p:sp>
-        <p:nvSpPr>
-          <p:cNvPr id="5" name="TextBox 4"/>
-          <p:cNvSpPr txBox="1"/>
-          <p:nvPr/>
-        </p:nvSpPr>
-        <p:spPr>
-          <a:xfrm>
-            <a:off x="457200" y="246888"/>
-            <a:ext cx="9491472" cy="566928"/>
-          </a:xfrm>
-          <a:prstGeom prst="rect">
-            <a:avLst/>
-          </a:prstGeom>
-          <a:noFill/>
-        </p:spPr>
-        <p:txBody>
-          <a:bodyPr wrap="none">
-            <a:spAutoFit/>
-          </a:bodyPr>
-          <a:lstStyle/>
-          <a:p>
-            <a:r>
-              <a:rPr sz="2600" b="1" i="0">
-                <a:solidFill>
-                  <a:srgbClr val="1D3461"/>
-                </a:solidFill>
-              </a:rPr>
-              <a:t>営業組織が抱える構造的課題</a:t>
-            </a:r>
-          </a:p>
-        </p:txBody>
-      </p:sp>
-      <p:sp>
-        <p:nvSpPr>
-          <p:cNvPr id="6" name="Rectangle 5"/>
-          <p:cNvSpPr/>
-          <p:nvPr/>
-        </p:nvSpPr>
-        <p:spPr>
-          <a:xfrm>
-            <a:off x="0" y="758952"/>
-            <a:ext cx="12188952" cy="22860"/>
-          </a:xfrm>
-          <a:prstGeom prst="rect">
-            <a:avLst/>
-          </a:prstGeom>
-          <a:solidFill>
-            <a:srgbClr val="1D3461"/>
-          </a:solidFill>
-          <a:ln>
-            <a:noFill/>
-          </a:ln>
-          <a:effectLst/>
-        </p:spPr>
-        <p:style>
-          <a:lnRef idx="1">
-            <a:schemeClr val="accent1"/>
-          </a:lnRef>
-          <a:fillRef idx="3">
-            <a:schemeClr val="accent1"/>
-          </a:fillRef>
-          <a:effectRef idx="2">
-            <a:schemeClr val="accent1"/>
-          </a:effectRef>
-          <a:fontRef idx="minor">
-            <a:schemeClr val="lt1"/>
-          </a:fontRef>
-        </p:style>
-        <p:txBody>
-          <a:bodyPr rtlCol="0" anchor="ctr"/>
-          <a:lstStyle/>
-          <a:p>
-            <a:pPr algn="ctr"/>
-          </a:p>
-        </p:txBody>
-      </p:sp>
-      <p:sp>
-        <p:nvSpPr>
-          <p:cNvPr id="7" name="Rectangle 6"/>
-          <p:cNvSpPr/>
-          <p:nvPr/>
-        </p:nvSpPr>
-        <p:spPr>
-          <a:xfrm>
-            <a:off x="0" y="923544"/>
-            <a:ext cx="12188952" cy="548640"/>
-          </a:xfrm>
-          <a:prstGeom prst="rect">
-            <a:avLst/>
-          </a:prstGeom>
-          <a:solidFill>
-            <a:srgbClr val="EEF2F9"/>
-          </a:solidFill>
-          <a:ln>
-            <a:noFill/>
-          </a:ln>
-          <a:effectLst/>
-        </p:spPr>
-        <p:style>
-          <a:lnRef idx="1">
-            <a:schemeClr val="accent1"/>
-          </a:lnRef>
-          <a:fillRef idx="3">
-            <a:schemeClr val="accent1"/>
-          </a:fillRef>
-          <a:effectRef idx="2">
-            <a:schemeClr val="accent1"/>
-          </a:effectRef>
-          <a:fontRef idx="minor">
-            <a:schemeClr val="lt1"/>
-          </a:fontRef>
-        </p:style>
-        <p:txBody>
-          <a:bodyPr rtlCol="0" anchor="ctr"/>
-          <a:lstStyle/>
-          <a:p>
-            <a:pPr algn="ctr"/>
-          </a:p>
-        </p:txBody>
-      </p:sp>
-      <p:sp>
-        <p:nvSpPr>
-          <p:cNvPr id="8" name="TextBox 7"/>
-          <p:cNvSpPr txBox="1"/>
-          <p:nvPr/>
-        </p:nvSpPr>
-        <p:spPr>
-          <a:xfrm>
-            <a:off x="457200" y="987044"/>
-            <a:ext cx="11411712" cy="472440"/>
-          </a:xfrm>
-          <a:prstGeom prst="rect">
-            <a:avLst/>
-          </a:prstGeom>
-          <a:noFill/>
-        </p:spPr>
-        <p:txBody>
           <a:bodyPr wrap="square">
             <a:spAutoFit/>
           </a:bodyPr>
@@ -4000,14 +3912,14 @@
       </p:sp>
       <p:sp>
         <p:nvSpPr>
-          <p:cNvPr id="9" name="TextBox 8"/>
+          <p:cNvPr id="7" name="TextBox 6"/>
           <p:cNvSpPr txBox="1"/>
           <p:nvPr/>
         </p:nvSpPr>
         <p:spPr>
           <a:xfrm>
-            <a:off x="457200" y="1545336"/>
-            <a:ext cx="11411712" cy="2367788"/>
+            <a:off x="457200" y="1517904"/>
+            <a:ext cx="11411712" cy="2381504"/>
           </a:xfrm>
           <a:prstGeom prst="rect">
             <a:avLst/>
@@ -4179,13 +4091,13 @@
       </p:sp>
       <p:sp>
         <p:nvSpPr>
-          <p:cNvPr id="10" name="Rectangle 9"/>
+          <p:cNvPr id="8" name="Rectangle 7"/>
           <p:cNvSpPr/>
           <p:nvPr/>
         </p:nvSpPr>
         <p:spPr>
           <a:xfrm>
-            <a:off x="457200" y="3954399"/>
+            <a:off x="457200" y="3940683"/>
             <a:ext cx="11411712" cy="12700"/>
           </a:xfrm>
           <a:prstGeom prst="rect">
@@ -4223,14 +4135,14 @@
       </p:sp>
       <p:sp>
         <p:nvSpPr>
-          <p:cNvPr id="11" name="TextBox 10"/>
+          <p:cNvPr id="9" name="TextBox 8"/>
           <p:cNvSpPr txBox="1"/>
           <p:nvPr/>
         </p:nvSpPr>
         <p:spPr>
           <a:xfrm>
-            <a:off x="457200" y="4014724"/>
-            <a:ext cx="11411712" cy="2367788"/>
+            <a:off x="457200" y="4001008"/>
+            <a:ext cx="11411712" cy="2381504"/>
           </a:xfrm>
           <a:prstGeom prst="rect">
             <a:avLst/>
@@ -4324,7 +4236,7 @@
       </p:sp>
       <p:pic>
         <p:nvPicPr>
-          <p:cNvPr id="12" name="Picture 11" descr="logo.png"/>
+          <p:cNvPr id="10" name="Picture 9" descr="logo.png"/>
           <p:cNvPicPr>
             <a:picLocks noChangeAspect="1"/>
           </p:cNvPicPr>
@@ -4348,7 +4260,7 @@
       </p:pic>
       <p:sp>
         <p:nvSpPr>
-          <p:cNvPr id="13" name="Rectangle 12"/>
+          <p:cNvPr id="11" name="Rectangle 10"/>
           <p:cNvSpPr/>
           <p:nvPr/>
         </p:nvSpPr>
@@ -4361,7 +4273,7 @@
             <a:avLst/>
           </a:prstGeom>
           <a:solidFill>
-            <a:srgbClr val="1D3461"/>
+            <a:srgbClr val="000000"/>
           </a:solidFill>
           <a:ln>
             <a:noFill/>
@@ -4392,14 +4304,14 @@
       </p:sp>
       <p:sp>
         <p:nvSpPr>
-          <p:cNvPr id="14" name="TextBox 13"/>
+          <p:cNvPr id="12" name="TextBox 11"/>
           <p:cNvSpPr txBox="1"/>
           <p:nvPr/>
         </p:nvSpPr>
         <p:spPr>
           <a:xfrm>
-            <a:off x="457200" y="6524752"/>
-            <a:ext cx="7315200" cy="292608"/>
+            <a:off x="457200" y="6512052"/>
+            <a:ext cx="7315200" cy="320040"/>
           </a:xfrm>
           <a:prstGeom prst="rect">
             <a:avLst/>
@@ -4413,9 +4325,9 @@
           <a:lstStyle/>
           <a:p>
             <a:r>
-              <a:rPr sz="750" b="0" i="0">
-                <a:solidFill>
-                  <a:srgbClr val="888888"/>
+              <a:rPr sz="800" b="0" i="0">
+                <a:solidFill>
+                  <a:srgbClr val="808080"/>
                 </a:solidFill>
               </a:rPr>
               <a:t>Confidential All Rights Reserved SALESCORE Inc.</a:t>
@@ -4425,14 +4337,14 @@
       </p:sp>
       <p:sp>
         <p:nvSpPr>
-          <p:cNvPr id="15" name="TextBox 14"/>
+          <p:cNvPr id="13" name="TextBox 12"/>
           <p:cNvSpPr txBox="1"/>
           <p:nvPr/>
         </p:nvSpPr>
         <p:spPr>
           <a:xfrm>
-            <a:off x="5820156" y="6524752"/>
-            <a:ext cx="548640" cy="292608"/>
+            <a:off x="11640312" y="6512052"/>
+            <a:ext cx="411480" cy="320040"/>
           </a:xfrm>
           <a:prstGeom prst="rect">
             <a:avLst/>
@@ -4445,11 +4357,11 @@
           </a:bodyPr>
           <a:lstStyle/>
           <a:p>
-            <a:pPr algn="ctr"/>
-            <a:r>
-              <a:rPr sz="850" b="0" i="0">
-                <a:solidFill>
-                  <a:srgbClr val="888888"/>
+            <a:pPr algn="r"/>
+            <a:r>
+              <a:rPr sz="900" b="0" i="0">
+                <a:solidFill>
+                  <a:srgbClr val="808080"/>
                 </a:solidFill>
               </a:rPr>
               <a:t>3</a:t>
@@ -4521,20 +4433,86 @@
       </p:sp>
       <p:sp>
         <p:nvSpPr>
-          <p:cNvPr id="3" name="Rectangle 2"/>
+          <p:cNvPr id="3" name="TextBox 2"/>
+          <p:cNvSpPr txBox="1"/>
+          <p:nvPr/>
+        </p:nvSpPr>
+        <p:spPr>
+          <a:xfrm>
+            <a:off x="457200" y="64008"/>
+            <a:ext cx="9491472" cy="219456"/>
+          </a:xfrm>
+          <a:prstGeom prst="rect">
+            <a:avLst/>
+          </a:prstGeom>
+          <a:noFill/>
+        </p:spPr>
+        <p:txBody>
+          <a:bodyPr wrap="none">
+            <a:spAutoFit/>
+          </a:bodyPr>
+          <a:lstStyle/>
+          <a:p>
+            <a:r>
+              <a:rPr sz="900" b="1" i="0">
+                <a:solidFill>
+                  <a:srgbClr val="55657A"/>
+                </a:solidFill>
+              </a:rPr>
+              <a:t>1.2. 課題構造</a:t>
+            </a:r>
+          </a:p>
+        </p:txBody>
+      </p:sp>
+      <p:sp>
+        <p:nvSpPr>
+          <p:cNvPr id="4" name="TextBox 3"/>
+          <p:cNvSpPr txBox="1"/>
+          <p:nvPr/>
+        </p:nvSpPr>
+        <p:spPr>
+          <a:xfrm>
+            <a:off x="457200" y="246888"/>
+            <a:ext cx="9491472" cy="566928"/>
+          </a:xfrm>
+          <a:prstGeom prst="rect">
+            <a:avLst/>
+          </a:prstGeom>
+          <a:noFill/>
+        </p:spPr>
+        <p:txBody>
+          <a:bodyPr wrap="none">
+            <a:spAutoFit/>
+          </a:bodyPr>
+          <a:lstStyle/>
+          <a:p>
+            <a:r>
+              <a:rPr sz="2600" b="1" i="0">
+                <a:solidFill>
+                  <a:srgbClr val="1A1A1A"/>
+                </a:solidFill>
+              </a:rPr>
+              <a:t>根本原因の整理</a:t>
+            </a:r>
+          </a:p>
+        </p:txBody>
+      </p:sp>
+      <p:sp>
+        <p:nvSpPr>
+          <p:cNvPr id="5" name="Rectangle 4"/>
           <p:cNvSpPr/>
           <p:nvPr/>
         </p:nvSpPr>
         <p:spPr>
           <a:xfrm>
-            <a:off x="0" y="0"/>
-            <a:ext cx="73152" cy="6858000"/>
+            <a:off x="0" y="758952"/>
+            <a:ext cx="12188952" cy="22860"/>
           </a:xfrm>
           <a:prstGeom prst="rect">
             <a:avLst/>
           </a:prstGeom>
           <a:solidFill>
-            <a:srgbClr val="1D3461"/>
+            <a:srgbClr val="000000"/>
           </a:solidFill>
           <a:ln>
             <a:noFill/>
@@ -4565,14 +4543,14 @@
       </p:sp>
       <p:sp>
         <p:nvSpPr>
-          <p:cNvPr id="4" name="TextBox 3"/>
+          <p:cNvPr id="6" name="TextBox 5"/>
           <p:cNvSpPr txBox="1"/>
           <p:nvPr/>
         </p:nvSpPr>
         <p:spPr>
           <a:xfrm>
-            <a:off x="457200" y="64008"/>
-            <a:ext cx="9491472" cy="219456"/>
+            <a:off x="457200" y="923544"/>
+            <a:ext cx="11411712" cy="548640"/>
           </a:xfrm>
           <a:prstGeom prst="rect">
             <a:avLst/>
@@ -4580,160 +4558,6 @@
           <a:noFill/>
         </p:spPr>
         <p:txBody>
-          <a:bodyPr wrap="none">
-            <a:spAutoFit/>
-          </a:bodyPr>
-          <a:lstStyle/>
-          <a:p>
-            <a:r>
-              <a:rPr sz="900" b="1" i="0">
-                <a:solidFill>
-                  <a:srgbClr val="55657A"/>
-                </a:solidFill>
-              </a:rPr>
-              <a:t>1.2. 課題構造</a:t>
-            </a:r>
-          </a:p>
-        </p:txBody>
-      </p:sp>
-      <p:sp>
-        <p:nvSpPr>
-          <p:cNvPr id="5" name="TextBox 4"/>
-          <p:cNvSpPr txBox="1"/>
-          <p:nvPr/>
-        </p:nvSpPr>
-        <p:spPr>
-          <a:xfrm>
-            <a:off x="457200" y="246888"/>
-            <a:ext cx="9491472" cy="566928"/>
-          </a:xfrm>
-          <a:prstGeom prst="rect">
-            <a:avLst/>
-          </a:prstGeom>
-          <a:noFill/>
-        </p:spPr>
-        <p:txBody>
-          <a:bodyPr wrap="none">
-            <a:spAutoFit/>
-          </a:bodyPr>
-          <a:lstStyle/>
-          <a:p>
-            <a:r>
-              <a:rPr sz="2600" b="1" i="0">
-                <a:solidFill>
-                  <a:srgbClr val="1D3461"/>
-                </a:solidFill>
-              </a:rPr>
-              <a:t>根本原因の整理</a:t>
-            </a:r>
-          </a:p>
-        </p:txBody>
-      </p:sp>
-      <p:sp>
-        <p:nvSpPr>
-          <p:cNvPr id="6" name="Rectangle 5"/>
-          <p:cNvSpPr/>
-          <p:nvPr/>
-        </p:nvSpPr>
-        <p:spPr>
-          <a:xfrm>
-            <a:off x="0" y="758952"/>
-            <a:ext cx="12188952" cy="22860"/>
-          </a:xfrm>
-          <a:prstGeom prst="rect">
-            <a:avLst/>
-          </a:prstGeom>
-          <a:solidFill>
-            <a:srgbClr val="1D3461"/>
-          </a:solidFill>
-          <a:ln>
-            <a:noFill/>
-          </a:ln>
-          <a:effectLst/>
-        </p:spPr>
-        <p:style>
-          <a:lnRef idx="1">
-            <a:schemeClr val="accent1"/>
-          </a:lnRef>
-          <a:fillRef idx="3">
-            <a:schemeClr val="accent1"/>
-          </a:fillRef>
-          <a:effectRef idx="2">
-            <a:schemeClr val="accent1"/>
-          </a:effectRef>
-          <a:fontRef idx="minor">
-            <a:schemeClr val="lt1"/>
-          </a:fontRef>
-        </p:style>
-        <p:txBody>
-          <a:bodyPr rtlCol="0" anchor="ctr"/>
-          <a:lstStyle/>
-          <a:p>
-            <a:pPr algn="ctr"/>
-          </a:p>
-        </p:txBody>
-      </p:sp>
-      <p:sp>
-        <p:nvSpPr>
-          <p:cNvPr id="7" name="Rectangle 6"/>
-          <p:cNvSpPr/>
-          <p:nvPr/>
-        </p:nvSpPr>
-        <p:spPr>
-          <a:xfrm>
-            <a:off x="0" y="923544"/>
-            <a:ext cx="12188952" cy="548640"/>
-          </a:xfrm>
-          <a:prstGeom prst="rect">
-            <a:avLst/>
-          </a:prstGeom>
-          <a:solidFill>
-            <a:srgbClr val="EEF2F9"/>
-          </a:solidFill>
-          <a:ln>
-            <a:noFill/>
-          </a:ln>
-          <a:effectLst/>
-        </p:spPr>
-        <p:style>
-          <a:lnRef idx="1">
-            <a:schemeClr val="accent1"/>
-          </a:lnRef>
-          <a:fillRef idx="3">
-            <a:schemeClr val="accent1"/>
-          </a:fillRef>
-          <a:effectRef idx="2">
-            <a:schemeClr val="accent1"/>
-          </a:effectRef>
-          <a:fontRef idx="minor">
-            <a:schemeClr val="lt1"/>
-          </a:fontRef>
-        </p:style>
-        <p:txBody>
-          <a:bodyPr rtlCol="0" anchor="ctr"/>
-          <a:lstStyle/>
-          <a:p>
-            <a:pPr algn="ctr"/>
-          </a:p>
-        </p:txBody>
-      </p:sp>
-      <p:sp>
-        <p:nvSpPr>
-          <p:cNvPr id="8" name="TextBox 7"/>
-          <p:cNvSpPr txBox="1"/>
-          <p:nvPr/>
-        </p:nvSpPr>
-        <p:spPr>
-          <a:xfrm>
-            <a:off x="457200" y="987044"/>
-            <a:ext cx="11411712" cy="472440"/>
-          </a:xfrm>
-          <a:prstGeom prst="rect">
-            <a:avLst/>
-          </a:prstGeom>
-          <a:noFill/>
-        </p:spPr>
-        <p:txBody>
           <a:bodyPr wrap="square">
             <a:spAutoFit/>
           </a:bodyPr>
@@ -4752,14 +4576,14 @@
       </p:sp>
       <p:sp>
         <p:nvSpPr>
-          <p:cNvPr id="9" name="TextBox 8"/>
+          <p:cNvPr id="7" name="TextBox 6"/>
           <p:cNvSpPr txBox="1"/>
           <p:nvPr/>
         </p:nvSpPr>
         <p:spPr>
           <a:xfrm>
-            <a:off x="457200" y="1545336"/>
-            <a:ext cx="11411712" cy="4837176"/>
+            <a:off x="457200" y="1517904"/>
+            <a:ext cx="11411712" cy="4864608"/>
           </a:xfrm>
           <a:prstGeom prst="rect">
             <a:avLst/>
@@ -4853,7 +4677,7 @@
       </p:sp>
       <p:pic>
         <p:nvPicPr>
-          <p:cNvPr id="10" name="Picture 9" descr="logo.png"/>
+          <p:cNvPr id="8" name="Picture 7" descr="logo.png"/>
           <p:cNvPicPr>
             <a:picLocks noChangeAspect="1"/>
           </p:cNvPicPr>
@@ -4877,7 +4701,7 @@
       </p:pic>
       <p:sp>
         <p:nvSpPr>
-          <p:cNvPr id="11" name="Rectangle 10"/>
+          <p:cNvPr id="9" name="Rectangle 8"/>
           <p:cNvSpPr/>
           <p:nvPr/>
         </p:nvSpPr>
@@ -4890,7 +4714,7 @@
             <a:avLst/>
           </a:prstGeom>
           <a:solidFill>
-            <a:srgbClr val="1D3461"/>
+            <a:srgbClr val="000000"/>
           </a:solidFill>
           <a:ln>
             <a:noFill/>
@@ -4921,14 +4745,14 @@
       </p:sp>
       <p:sp>
         <p:nvSpPr>
-          <p:cNvPr id="12" name="TextBox 11"/>
+          <p:cNvPr id="10" name="TextBox 9"/>
           <p:cNvSpPr txBox="1"/>
           <p:nvPr/>
         </p:nvSpPr>
         <p:spPr>
           <a:xfrm>
-            <a:off x="457200" y="6524752"/>
-            <a:ext cx="7315200" cy="292608"/>
+            <a:off x="457200" y="6512052"/>
+            <a:ext cx="7315200" cy="320040"/>
           </a:xfrm>
           <a:prstGeom prst="rect">
             <a:avLst/>
@@ -4942,9 +4766,9 @@
           <a:lstStyle/>
           <a:p>
             <a:r>
-              <a:rPr sz="750" b="0" i="0">
-                <a:solidFill>
-                  <a:srgbClr val="888888"/>
+              <a:rPr sz="800" b="0" i="0">
+                <a:solidFill>
+                  <a:srgbClr val="808080"/>
                 </a:solidFill>
               </a:rPr>
               <a:t>Confidential All Rights Reserved SALESCORE Inc.</a:t>
@@ -4954,14 +4778,14 @@
       </p:sp>
       <p:sp>
         <p:nvSpPr>
-          <p:cNvPr id="13" name="TextBox 12"/>
+          <p:cNvPr id="11" name="TextBox 10"/>
           <p:cNvSpPr txBox="1"/>
           <p:nvPr/>
         </p:nvSpPr>
         <p:spPr>
           <a:xfrm>
-            <a:off x="5820156" y="6524752"/>
-            <a:ext cx="548640" cy="292608"/>
+            <a:off x="11640312" y="6512052"/>
+            <a:ext cx="411480" cy="320040"/>
           </a:xfrm>
           <a:prstGeom prst="rect">
             <a:avLst/>
@@ -4974,11 +4798,11 @@
           </a:bodyPr>
           <a:lstStyle/>
           <a:p>
-            <a:pPr algn="ctr"/>
-            <a:r>
-              <a:rPr sz="850" b="0" i="0">
-                <a:solidFill>
-                  <a:srgbClr val="888888"/>
+            <a:pPr algn="r"/>
+            <a:r>
+              <a:rPr sz="900" b="0" i="0">
+                <a:solidFill>
+                  <a:srgbClr val="808080"/>
                 </a:solidFill>
               </a:rPr>
               <a:t>4</a:t>
@@ -5164,7 +4988,7 @@
             <a:avLst/>
           </a:prstGeom>
           <a:solidFill>
-            <a:srgbClr val="1D3461"/>
+            <a:srgbClr val="000000"/>
           </a:solidFill>
           <a:ln>
             <a:noFill/>
@@ -5201,8 +5025,8 @@
         </p:nvSpPr>
         <p:spPr>
           <a:xfrm>
-            <a:off x="457200" y="6524752"/>
-            <a:ext cx="7315200" cy="292608"/>
+            <a:off x="457200" y="6512052"/>
+            <a:ext cx="7315200" cy="320040"/>
           </a:xfrm>
           <a:prstGeom prst="rect">
             <a:avLst/>
@@ -5216,9 +5040,9 @@
           <a:lstStyle/>
           <a:p>
             <a:r>
-              <a:rPr sz="750" b="0" i="0">
-                <a:solidFill>
-                  <a:srgbClr val="888888"/>
+              <a:rPr sz="800" b="0" i="0">
+                <a:solidFill>
+                  <a:srgbClr val="808080"/>
                 </a:solidFill>
               </a:rPr>
               <a:t>Confidential All Rights Reserved SALESCORE Inc.</a:t>
@@ -5234,8 +5058,8 @@
         </p:nvSpPr>
         <p:spPr>
           <a:xfrm>
-            <a:off x="5820156" y="6524752"/>
-            <a:ext cx="548640" cy="292608"/>
+            <a:off x="11640312" y="6512052"/>
+            <a:ext cx="411480" cy="320040"/>
           </a:xfrm>
           <a:prstGeom prst="rect">
             <a:avLst/>
@@ -5248,11 +5072,11 @@
           </a:bodyPr>
           <a:lstStyle/>
           <a:p>
-            <a:pPr algn="ctr"/>
-            <a:r>
-              <a:rPr sz="850" b="0" i="0">
-                <a:solidFill>
-                  <a:srgbClr val="888888"/>
+            <a:pPr algn="r"/>
+            <a:r>
+              <a:rPr sz="900" b="0" i="0">
+                <a:solidFill>
+                  <a:srgbClr val="808080"/>
                 </a:solidFill>
               </a:rPr>
               <a:t>5</a:t>
@@ -5324,20 +5148,86 @@
       </p:sp>
       <p:sp>
         <p:nvSpPr>
-          <p:cNvPr id="3" name="Rectangle 2"/>
+          <p:cNvPr id="3" name="TextBox 2"/>
+          <p:cNvSpPr txBox="1"/>
+          <p:nvPr/>
+        </p:nvSpPr>
+        <p:spPr>
+          <a:xfrm>
+            <a:off x="457200" y="64008"/>
+            <a:ext cx="9491472" cy="219456"/>
+          </a:xfrm>
+          <a:prstGeom prst="rect">
+            <a:avLst/>
+          </a:prstGeom>
+          <a:noFill/>
+        </p:spPr>
+        <p:txBody>
+          <a:bodyPr wrap="none">
+            <a:spAutoFit/>
+          </a:bodyPr>
+          <a:lstStyle/>
+          <a:p>
+            <a:r>
+              <a:rPr sz="900" b="1" i="0">
+                <a:solidFill>
+                  <a:srgbClr val="55657A"/>
+                </a:solidFill>
+              </a:rPr>
+              <a:t>2.1. 支援フレームワーク</a:t>
+            </a:r>
+          </a:p>
+        </p:txBody>
+      </p:sp>
+      <p:sp>
+        <p:nvSpPr>
+          <p:cNvPr id="4" name="TextBox 3"/>
+          <p:cNvSpPr txBox="1"/>
+          <p:nvPr/>
+        </p:nvSpPr>
+        <p:spPr>
+          <a:xfrm>
+            <a:off x="457200" y="246888"/>
+            <a:ext cx="9491472" cy="566928"/>
+          </a:xfrm>
+          <a:prstGeom prst="rect">
+            <a:avLst/>
+          </a:prstGeom>
+          <a:noFill/>
+        </p:spPr>
+        <p:txBody>
+          <a:bodyPr wrap="none">
+            <a:spAutoFit/>
+          </a:bodyPr>
+          <a:lstStyle/>
+          <a:p>
+            <a:r>
+              <a:rPr sz="2600" b="1" i="0">
+                <a:solidFill>
+                  <a:srgbClr val="1A1A1A"/>
+                </a:solidFill>
+              </a:rPr>
+              <a:t>SALESCOREの提供価値</a:t>
+            </a:r>
+          </a:p>
+        </p:txBody>
+      </p:sp>
+      <p:sp>
+        <p:nvSpPr>
+          <p:cNvPr id="5" name="Rectangle 4"/>
           <p:cNvSpPr/>
           <p:nvPr/>
         </p:nvSpPr>
         <p:spPr>
           <a:xfrm>
-            <a:off x="0" y="0"/>
-            <a:ext cx="73152" cy="6858000"/>
+            <a:off x="0" y="758952"/>
+            <a:ext cx="12188952" cy="22860"/>
           </a:xfrm>
           <a:prstGeom prst="rect">
             <a:avLst/>
           </a:prstGeom>
           <a:solidFill>
-            <a:srgbClr val="1D3461"/>
+            <a:srgbClr val="000000"/>
           </a:solidFill>
           <a:ln>
             <a:noFill/>
@@ -5368,14 +5258,14 @@
       </p:sp>
       <p:sp>
         <p:nvSpPr>
-          <p:cNvPr id="4" name="TextBox 3"/>
+          <p:cNvPr id="6" name="TextBox 5"/>
           <p:cNvSpPr txBox="1"/>
           <p:nvPr/>
         </p:nvSpPr>
         <p:spPr>
           <a:xfrm>
-            <a:off x="457200" y="64008"/>
-            <a:ext cx="9491472" cy="219456"/>
+            <a:off x="457200" y="923544"/>
+            <a:ext cx="11411712" cy="548640"/>
           </a:xfrm>
           <a:prstGeom prst="rect">
             <a:avLst/>
@@ -5383,160 +5273,6 @@
           <a:noFill/>
         </p:spPr>
         <p:txBody>
-          <a:bodyPr wrap="none">
-            <a:spAutoFit/>
-          </a:bodyPr>
-          <a:lstStyle/>
-          <a:p>
-            <a:r>
-              <a:rPr sz="900" b="1" i="0">
-                <a:solidFill>
-                  <a:srgbClr val="55657A"/>
-                </a:solidFill>
-              </a:rPr>
-              <a:t>2.1. 支援フレームワーク</a:t>
-            </a:r>
-          </a:p>
-        </p:txBody>
-      </p:sp>
-      <p:sp>
-        <p:nvSpPr>
-          <p:cNvPr id="5" name="TextBox 4"/>
-          <p:cNvSpPr txBox="1"/>
-          <p:nvPr/>
-        </p:nvSpPr>
-        <p:spPr>
-          <a:xfrm>
-            <a:off x="457200" y="246888"/>
-            <a:ext cx="9491472" cy="566928"/>
-          </a:xfrm>
-          <a:prstGeom prst="rect">
-            <a:avLst/>
-          </a:prstGeom>
-          <a:noFill/>
-        </p:spPr>
-        <p:txBody>
-          <a:bodyPr wrap="none">
-            <a:spAutoFit/>
-          </a:bodyPr>
-          <a:lstStyle/>
-          <a:p>
-            <a:r>
-              <a:rPr sz="2600" b="1" i="0">
-                <a:solidFill>
-                  <a:srgbClr val="1D3461"/>
-                </a:solidFill>
-              </a:rPr>
-              <a:t>SALESCOREの提供価値</a:t>
-            </a:r>
-          </a:p>
-        </p:txBody>
-      </p:sp>
-      <p:sp>
-        <p:nvSpPr>
-          <p:cNvPr id="6" name="Rectangle 5"/>
-          <p:cNvSpPr/>
-          <p:nvPr/>
-        </p:nvSpPr>
-        <p:spPr>
-          <a:xfrm>
-            <a:off x="0" y="758952"/>
-            <a:ext cx="12188952" cy="22860"/>
-          </a:xfrm>
-          <a:prstGeom prst="rect">
-            <a:avLst/>
-          </a:prstGeom>
-          <a:solidFill>
-            <a:srgbClr val="1D3461"/>
-          </a:solidFill>
-          <a:ln>
-            <a:noFill/>
-          </a:ln>
-          <a:effectLst/>
-        </p:spPr>
-        <p:style>
-          <a:lnRef idx="1">
-            <a:schemeClr val="accent1"/>
-          </a:lnRef>
-          <a:fillRef idx="3">
-            <a:schemeClr val="accent1"/>
-          </a:fillRef>
-          <a:effectRef idx="2">
-            <a:schemeClr val="accent1"/>
-          </a:effectRef>
-          <a:fontRef idx="minor">
-            <a:schemeClr val="lt1"/>
-          </a:fontRef>
-        </p:style>
-        <p:txBody>
-          <a:bodyPr rtlCol="0" anchor="ctr"/>
-          <a:lstStyle/>
-          <a:p>
-            <a:pPr algn="ctr"/>
-          </a:p>
-        </p:txBody>
-      </p:sp>
-      <p:sp>
-        <p:nvSpPr>
-          <p:cNvPr id="7" name="Rectangle 6"/>
-          <p:cNvSpPr/>
-          <p:nvPr/>
-        </p:nvSpPr>
-        <p:spPr>
-          <a:xfrm>
-            <a:off x="0" y="923544"/>
-            <a:ext cx="12188952" cy="548640"/>
-          </a:xfrm>
-          <a:prstGeom prst="rect">
-            <a:avLst/>
-          </a:prstGeom>
-          <a:solidFill>
-            <a:srgbClr val="EEF2F9"/>
-          </a:solidFill>
-          <a:ln>
-            <a:noFill/>
-          </a:ln>
-          <a:effectLst/>
-        </p:spPr>
-        <p:style>
-          <a:lnRef idx="1">
-            <a:schemeClr val="accent1"/>
-          </a:lnRef>
-          <a:fillRef idx="3">
-            <a:schemeClr val="accent1"/>
-          </a:fillRef>
-          <a:effectRef idx="2">
-            <a:schemeClr val="accent1"/>
-          </a:effectRef>
-          <a:fontRef idx="minor">
-            <a:schemeClr val="lt1"/>
-          </a:fontRef>
-        </p:style>
-        <p:txBody>
-          <a:bodyPr rtlCol="0" anchor="ctr"/>
-          <a:lstStyle/>
-          <a:p>
-            <a:pPr algn="ctr"/>
-          </a:p>
-        </p:txBody>
-      </p:sp>
-      <p:sp>
-        <p:nvSpPr>
-          <p:cNvPr id="8" name="TextBox 7"/>
-          <p:cNvSpPr txBox="1"/>
-          <p:nvPr/>
-        </p:nvSpPr>
-        <p:spPr>
-          <a:xfrm>
-            <a:off x="457200" y="987044"/>
-            <a:ext cx="11411712" cy="472440"/>
-          </a:xfrm>
-          <a:prstGeom prst="rect">
-            <a:avLst/>
-          </a:prstGeom>
-          <a:noFill/>
-        </p:spPr>
-        <p:txBody>
           <a:bodyPr wrap="square">
             <a:spAutoFit/>
           </a:bodyPr>
@@ -5555,14 +5291,14 @@
       </p:sp>
       <p:sp>
         <p:nvSpPr>
-          <p:cNvPr id="9" name="TextBox 8"/>
+          <p:cNvPr id="7" name="TextBox 6"/>
           <p:cNvSpPr txBox="1"/>
           <p:nvPr/>
         </p:nvSpPr>
         <p:spPr>
           <a:xfrm>
-            <a:off x="457200" y="1545336"/>
-            <a:ext cx="11411712" cy="2367788"/>
+            <a:off x="457200" y="1517904"/>
+            <a:ext cx="11411712" cy="2381504"/>
           </a:xfrm>
           <a:prstGeom prst="rect">
             <a:avLst/>
@@ -5734,13 +5470,13 @@
       </p:sp>
       <p:sp>
         <p:nvSpPr>
-          <p:cNvPr id="10" name="Rectangle 9"/>
+          <p:cNvPr id="8" name="Rectangle 7"/>
           <p:cNvSpPr/>
           <p:nvPr/>
         </p:nvSpPr>
         <p:spPr>
           <a:xfrm>
-            <a:off x="457200" y="3954399"/>
+            <a:off x="457200" y="3940683"/>
             <a:ext cx="11411712" cy="12700"/>
           </a:xfrm>
           <a:prstGeom prst="rect">
@@ -5778,14 +5514,14 @@
       </p:sp>
       <p:sp>
         <p:nvSpPr>
-          <p:cNvPr id="11" name="TextBox 10"/>
+          <p:cNvPr id="9" name="TextBox 8"/>
           <p:cNvSpPr txBox="1"/>
           <p:nvPr/>
         </p:nvSpPr>
         <p:spPr>
           <a:xfrm>
-            <a:off x="457200" y="4014724"/>
-            <a:ext cx="11411712" cy="2367788"/>
+            <a:off x="457200" y="4001008"/>
+            <a:ext cx="11411712" cy="2381504"/>
           </a:xfrm>
           <a:prstGeom prst="rect">
             <a:avLst/>
@@ -5905,7 +5641,7 @@
       </p:sp>
       <p:pic>
         <p:nvPicPr>
-          <p:cNvPr id="12" name="Picture 11" descr="logo.png"/>
+          <p:cNvPr id="10" name="Picture 9" descr="logo.png"/>
           <p:cNvPicPr>
             <a:picLocks noChangeAspect="1"/>
           </p:cNvPicPr>
@@ -5929,7 +5665,7 @@
       </p:pic>
       <p:sp>
         <p:nvSpPr>
-          <p:cNvPr id="13" name="Rectangle 12"/>
+          <p:cNvPr id="11" name="Rectangle 10"/>
           <p:cNvSpPr/>
           <p:nvPr/>
         </p:nvSpPr>
@@ -5942,7 +5678,7 @@
             <a:avLst/>
           </a:prstGeom>
           <a:solidFill>
-            <a:srgbClr val="1D3461"/>
+            <a:srgbClr val="000000"/>
           </a:solidFill>
           <a:ln>
             <a:noFill/>
@@ -5973,14 +5709,14 @@
       </p:sp>
       <p:sp>
         <p:nvSpPr>
-          <p:cNvPr id="14" name="TextBox 13"/>
+          <p:cNvPr id="12" name="TextBox 11"/>
           <p:cNvSpPr txBox="1"/>
           <p:nvPr/>
         </p:nvSpPr>
         <p:spPr>
           <a:xfrm>
-            <a:off x="457200" y="6524752"/>
-            <a:ext cx="7315200" cy="292608"/>
+            <a:off x="457200" y="6512052"/>
+            <a:ext cx="7315200" cy="320040"/>
           </a:xfrm>
           <a:prstGeom prst="rect">
             <a:avLst/>
@@ -5994,9 +5730,9 @@
           <a:lstStyle/>
           <a:p>
             <a:r>
-              <a:rPr sz="750" b="0" i="0">
-                <a:solidFill>
-                  <a:srgbClr val="888888"/>
+              <a:rPr sz="800" b="0" i="0">
+                <a:solidFill>
+                  <a:srgbClr val="808080"/>
                 </a:solidFill>
               </a:rPr>
               <a:t>Confidential All Rights Reserved SALESCORE Inc.</a:t>
@@ -6006,14 +5742,14 @@
       </p:sp>
       <p:sp>
         <p:nvSpPr>
-          <p:cNvPr id="15" name="TextBox 14"/>
+          <p:cNvPr id="13" name="TextBox 12"/>
           <p:cNvSpPr txBox="1"/>
           <p:nvPr/>
         </p:nvSpPr>
         <p:spPr>
           <a:xfrm>
-            <a:off x="5820156" y="6524752"/>
-            <a:ext cx="548640" cy="292608"/>
+            <a:off x="11640312" y="6512052"/>
+            <a:ext cx="411480" cy="320040"/>
           </a:xfrm>
           <a:prstGeom prst="rect">
             <a:avLst/>
@@ -6026,11 +5762,11 @@
           </a:bodyPr>
           <a:lstStyle/>
           <a:p>
-            <a:pPr algn="ctr"/>
-            <a:r>
-              <a:rPr sz="850" b="0" i="0">
-                <a:solidFill>
-                  <a:srgbClr val="888888"/>
+            <a:pPr algn="r"/>
+            <a:r>
+              <a:rPr sz="900" b="0" i="0">
+                <a:solidFill>
+                  <a:srgbClr val="808080"/>
                 </a:solidFill>
               </a:rPr>
               <a:t>6</a:t>

--- a/test_output.pptx
+++ b/test_output.pptx
@@ -3919,7 +3919,7 @@
         <p:spPr>
           <a:xfrm>
             <a:off x="457200" y="1517904"/>
-            <a:ext cx="11411712" cy="2381504"/>
+            <a:ext cx="11411712" cy="2356104"/>
           </a:xfrm>
           <a:prstGeom prst="rect">
             <a:avLst/>
@@ -3960,27 +3960,53 @@
           <a:p>
             <a:pPr>
               <a:spcBef>
-                <a:spcPts val="600"/>
+                <a:spcPts val="300"/>
               </a:spcBef>
               <a:spcAft>
-                <a:spcPts val="200"/>
+                <a:spcPts val="100"/>
               </a:spcAft>
             </a:pPr>
             <a:r>
-              <a:rPr sz="1200" b="0" i="0">
-                <a:solidFill>
-                  <a:srgbClr val="1B4FA8"/>
-                </a:solidFill>
-              </a:rPr>
-              <a:t>• </a:t>
-            </a:r>
-            <a:r>
-              <a:rPr sz="1300" b="0" i="0">
+              <a:rPr sz="1000" b="0" i="0">
+                <a:solidFill>
+                  <a:srgbClr val="808080"/>
+                </a:solidFill>
+              </a:rPr>
+              <a:t>      – </a:t>
+            </a:r>
+            <a:r>
+              <a:rPr sz="1100" b="0" i="0">
                 <a:solidFill>
                   <a:srgbClr val="1A1A1A"/>
                 </a:solidFill>
               </a:rPr>
               <a:t>ノウハウが個人の頭の中に留まり組織資産化されていない</a:t>
+            </a:r>
+          </a:p>
+          <a:p>
+            <a:pPr>
+              <a:spcBef>
+                <a:spcPts val="300"/>
+              </a:spcBef>
+              <a:spcAft>
+                <a:spcPts val="100"/>
+              </a:spcAft>
+            </a:pPr>
+            <a:r>
+              <a:rPr sz="1000" b="0" i="0">
+                <a:solidFill>
+                  <a:srgbClr val="808080"/>
+                </a:solidFill>
+              </a:rPr>
+              <a:t>      – </a:t>
+            </a:r>
+            <a:r>
+              <a:rPr sz="1100" b="0" i="0">
+                <a:solidFill>
+                  <a:srgbClr val="1A1A1A"/>
+                </a:solidFill>
+              </a:rPr>
+              <a:t>新人育成期間が長期化し、即戦力化に平均12ヶ月を要している</a:t>
             </a:r>
           </a:p>
           <a:p>
@@ -4006,80 +4032,54 @@
                   <a:srgbClr val="1A1A1A"/>
                 </a:solidFill>
               </a:rPr>
-              <a:t>新人育成期間が長期化し、即戦力化に平均12ヶ月を要している</a:t>
+              <a:t>データ活用が進まず「勘と経験」頼りの意思決定が常態化</a:t>
             </a:r>
           </a:p>
           <a:p>
             <a:pPr>
               <a:spcBef>
-                <a:spcPts val="600"/>
+                <a:spcPts val="300"/>
               </a:spcBef>
               <a:spcAft>
-                <a:spcPts val="200"/>
+                <a:spcPts val="100"/>
               </a:spcAft>
             </a:pPr>
             <a:r>
-              <a:rPr sz="1200" b="0" i="0">
-                <a:solidFill>
-                  <a:srgbClr val="1B4FA8"/>
-                </a:solidFill>
-              </a:rPr>
-              <a:t>• </a:t>
-            </a:r>
-            <a:r>
-              <a:rPr sz="1300" b="0" i="0">
+              <a:rPr sz="1000" b="0" i="0">
+                <a:solidFill>
+                  <a:srgbClr val="808080"/>
+                </a:solidFill>
+              </a:rPr>
+              <a:t>      – </a:t>
+            </a:r>
+            <a:r>
+              <a:rPr sz="1100" b="0" i="0">
                 <a:solidFill>
                   <a:srgbClr val="1A1A1A"/>
                 </a:solidFill>
               </a:rPr>
-              <a:t>データ活用が進まず「勘と経験」頼りの意思決定が常態化</a:t>
+              <a:t>SFAへの入力率が30%未満、活用されないデータが蓄積</a:t>
             </a:r>
           </a:p>
           <a:p>
             <a:pPr>
               <a:spcBef>
-                <a:spcPts val="600"/>
+                <a:spcPts val="300"/>
               </a:spcBef>
               <a:spcAft>
-                <a:spcPts val="200"/>
+                <a:spcPts val="100"/>
               </a:spcAft>
             </a:pPr>
             <a:r>
-              <a:rPr sz="1200" b="0" i="0">
-                <a:solidFill>
-                  <a:srgbClr val="1B4FA8"/>
-                </a:solidFill>
-              </a:rPr>
-              <a:t>• </a:t>
-            </a:r>
-            <a:r>
-              <a:rPr sz="1300" b="0" i="0">
-                <a:solidFill>
-                  <a:srgbClr val="1A1A1A"/>
-                </a:solidFill>
-              </a:rPr>
-              <a:t>SFAへの入力率が30%未満、活用されないデータが蓄積</a:t>
-            </a:r>
-          </a:p>
-          <a:p>
-            <a:pPr>
-              <a:spcBef>
-                <a:spcPts val="600"/>
-              </a:spcBef>
-              <a:spcAft>
-                <a:spcPts val="200"/>
-              </a:spcAft>
-            </a:pPr>
-            <a:r>
-              <a:rPr sz="1200" b="0" i="0">
-                <a:solidFill>
-                  <a:srgbClr val="1B4FA8"/>
-                </a:solidFill>
-              </a:rPr>
-              <a:t>• </a:t>
-            </a:r>
-            <a:r>
-              <a:rPr sz="1300" b="0" i="0">
+              <a:rPr sz="1000" b="0" i="0">
+                <a:solidFill>
+                  <a:srgbClr val="808080"/>
+                </a:solidFill>
+              </a:rPr>
+              <a:t>      – </a:t>
+            </a:r>
+            <a:r>
+              <a:rPr sz="1100" b="0" i="0">
                 <a:solidFill>
                   <a:srgbClr val="1A1A1A"/>
                 </a:solidFill>
@@ -4097,7 +4097,7 @@
         </p:nvSpPr>
         <p:spPr>
           <a:xfrm>
-            <a:off x="457200" y="3940683"/>
+            <a:off x="457200" y="3924808"/>
             <a:ext cx="11411712" cy="12700"/>
           </a:xfrm>
           <a:prstGeom prst="rect">
@@ -4141,8 +4141,8 @@
         </p:nvSpPr>
         <p:spPr>
           <a:xfrm>
-            <a:off x="457200" y="4001008"/>
-            <a:ext cx="11411712" cy="2381504"/>
+            <a:off x="457200" y="4026408"/>
+            <a:ext cx="11411712" cy="2356104"/>
           </a:xfrm>
           <a:prstGeom prst="rect">
             <a:avLst/>
@@ -4183,22 +4183,22 @@
           <a:p>
             <a:pPr>
               <a:spcBef>
-                <a:spcPts val="600"/>
+                <a:spcPts val="300"/>
               </a:spcBef>
               <a:spcAft>
-                <a:spcPts val="200"/>
+                <a:spcPts val="100"/>
               </a:spcAft>
             </a:pPr>
             <a:r>
-              <a:rPr sz="1200" b="0" i="0">
-                <a:solidFill>
-                  <a:srgbClr val="1B4FA8"/>
-                </a:solidFill>
-              </a:rPr>
-              <a:t>• </a:t>
-            </a:r>
-            <a:r>
-              <a:rPr sz="1300" b="0" i="0">
+              <a:rPr sz="1000" b="0" i="0">
+                <a:solidFill>
+                  <a:srgbClr val="808080"/>
+                </a:solidFill>
+              </a:rPr>
+              <a:t>      – </a:t>
+            </a:r>
+            <a:r>
+              <a:rPr sz="1100" b="0" i="0">
                 <a:solidFill>
                   <a:srgbClr val="1A1A1A"/>
                 </a:solidFill>
@@ -4209,22 +4209,22 @@
           <a:p>
             <a:pPr>
               <a:spcBef>
-                <a:spcPts val="600"/>
+                <a:spcPts val="300"/>
               </a:spcBef>
               <a:spcAft>
-                <a:spcPts val="200"/>
+                <a:spcPts val="100"/>
               </a:spcAft>
             </a:pPr>
             <a:r>
-              <a:rPr sz="1200" b="0" i="0">
-                <a:solidFill>
-                  <a:srgbClr val="1B4FA8"/>
-                </a:solidFill>
-              </a:rPr>
-              <a:t>• </a:t>
-            </a:r>
-            <a:r>
-              <a:rPr sz="1300" b="0" i="0">
+              <a:rPr sz="1000" b="0" i="0">
+                <a:solidFill>
+                  <a:srgbClr val="808080"/>
+                </a:solidFill>
+              </a:rPr>
+              <a:t>      – </a:t>
+            </a:r>
+            <a:r>
+              <a:rPr sz="1100" b="0" i="0">
                 <a:solidFill>
                   <a:srgbClr val="1A1A1A"/>
                 </a:solidFill>
@@ -5298,7 +5298,7 @@
         <p:spPr>
           <a:xfrm>
             <a:off x="457200" y="1517904"/>
-            <a:ext cx="11411712" cy="2381504"/>
+            <a:ext cx="11411712" cy="2356104"/>
           </a:xfrm>
           <a:prstGeom prst="rect">
             <a:avLst/>
@@ -5339,27 +5339,53 @@
           <a:p>
             <a:pPr>
               <a:spcBef>
-                <a:spcPts val="600"/>
+                <a:spcPts val="300"/>
               </a:spcBef>
               <a:spcAft>
-                <a:spcPts val="200"/>
+                <a:spcPts val="100"/>
               </a:spcAft>
             </a:pPr>
             <a:r>
-              <a:rPr sz="1200" b="0" i="0">
-                <a:solidFill>
-                  <a:srgbClr val="1B4FA8"/>
-                </a:solidFill>
-              </a:rPr>
-              <a:t>• </a:t>
-            </a:r>
-            <a:r>
-              <a:rPr sz="1300" b="0" i="0">
+              <a:rPr sz="1000" b="0" i="0">
+                <a:solidFill>
+                  <a:srgbClr val="808080"/>
+                </a:solidFill>
+              </a:rPr>
+              <a:t>      – </a:t>
+            </a:r>
+            <a:r>
+              <a:rPr sz="1100" b="0" i="0">
                 <a:solidFill>
                   <a:srgbClr val="1A1A1A"/>
                 </a:solidFill>
               </a:rPr>
               <a:t>現状の商談録画・インタビューによるKeyアクション特定</a:t>
+            </a:r>
+          </a:p>
+          <a:p>
+            <a:pPr>
+              <a:spcBef>
+                <a:spcPts val="300"/>
+              </a:spcBef>
+              <a:spcAft>
+                <a:spcPts val="100"/>
+              </a:spcAft>
+            </a:pPr>
+            <a:r>
+              <a:rPr sz="1000" b="0" i="0">
+                <a:solidFill>
+                  <a:srgbClr val="808080"/>
+                </a:solidFill>
+              </a:rPr>
+              <a:t>      – </a:t>
+            </a:r>
+            <a:r>
+              <a:rPr sz="1100" b="0" i="0">
+                <a:solidFill>
+                  <a:srgbClr val="1A1A1A"/>
+                </a:solidFill>
+              </a:rPr>
+              <a:t>AsIs/ToBe整理とKPI設計</a:t>
             </a:r>
           </a:p>
           <a:p>
@@ -5385,80 +5411,54 @@
                   <a:srgbClr val="1A1A1A"/>
                 </a:solidFill>
               </a:rPr>
-              <a:t>AsIs/ToBe整理とKPI設計</a:t>
+              <a:t>フェーズ2：設計・実装（約2ヶ月）</a:t>
             </a:r>
           </a:p>
           <a:p>
             <a:pPr>
               <a:spcBef>
-                <a:spcPts val="600"/>
+                <a:spcPts val="300"/>
               </a:spcBef>
               <a:spcAft>
-                <a:spcPts val="200"/>
+                <a:spcPts val="100"/>
               </a:spcAft>
             </a:pPr>
             <a:r>
-              <a:rPr sz="1200" b="0" i="0">
-                <a:solidFill>
-                  <a:srgbClr val="1B4FA8"/>
-                </a:solidFill>
-              </a:rPr>
-              <a:t>• </a:t>
-            </a:r>
-            <a:r>
-              <a:rPr sz="1300" b="0" i="0">
+              <a:rPr sz="1000" b="0" i="0">
+                <a:solidFill>
+                  <a:srgbClr val="808080"/>
+                </a:solidFill>
+              </a:rPr>
+              <a:t>      – </a:t>
+            </a:r>
+            <a:r>
+              <a:rPr sz="1100" b="0" i="0">
                 <a:solidFill>
                   <a:srgbClr val="1A1A1A"/>
                 </a:solidFill>
               </a:rPr>
-              <a:t>フェーズ2：設計・実装（約2ヶ月）</a:t>
+              <a:t>SaaSダッシュボード実装と運用設計</a:t>
             </a:r>
           </a:p>
           <a:p>
             <a:pPr>
               <a:spcBef>
-                <a:spcPts val="600"/>
+                <a:spcPts val="300"/>
               </a:spcBef>
               <a:spcAft>
-                <a:spcPts val="200"/>
+                <a:spcPts val="100"/>
               </a:spcAft>
             </a:pPr>
             <a:r>
-              <a:rPr sz="1200" b="0" i="0">
-                <a:solidFill>
-                  <a:srgbClr val="1B4FA8"/>
-                </a:solidFill>
-              </a:rPr>
-              <a:t>• </a:t>
-            </a:r>
-            <a:r>
-              <a:rPr sz="1300" b="0" i="0">
-                <a:solidFill>
-                  <a:srgbClr val="1A1A1A"/>
-                </a:solidFill>
-              </a:rPr>
-              <a:t>SaaSダッシュボード実装と運用設計</a:t>
-            </a:r>
-          </a:p>
-          <a:p>
-            <a:pPr>
-              <a:spcBef>
-                <a:spcPts val="600"/>
-              </a:spcBef>
-              <a:spcAft>
-                <a:spcPts val="200"/>
-              </a:spcAft>
-            </a:pPr>
-            <a:r>
-              <a:rPr sz="1200" b="0" i="0">
-                <a:solidFill>
-                  <a:srgbClr val="1B4FA8"/>
-                </a:solidFill>
-              </a:rPr>
-              <a:t>• </a:t>
-            </a:r>
-            <a:r>
-              <a:rPr sz="1300" b="0" i="0">
+              <a:rPr sz="1000" b="0" i="0">
+                <a:solidFill>
+                  <a:srgbClr val="808080"/>
+                </a:solidFill>
+              </a:rPr>
+              <a:t>      – </a:t>
+            </a:r>
+            <a:r>
+              <a:rPr sz="1100" b="0" i="0">
                 <a:solidFill>
                   <a:srgbClr val="1A1A1A"/>
                 </a:solidFill>
@@ -5476,7 +5476,7 @@
         </p:nvSpPr>
         <p:spPr>
           <a:xfrm>
-            <a:off x="457200" y="3940683"/>
+            <a:off x="457200" y="3924808"/>
             <a:ext cx="11411712" cy="12700"/>
           </a:xfrm>
           <a:prstGeom prst="rect">
@@ -5520,8 +5520,8 @@
         </p:nvSpPr>
         <p:spPr>
           <a:xfrm>
-            <a:off x="457200" y="4001008"/>
-            <a:ext cx="11411712" cy="2381504"/>
+            <a:off x="457200" y="4026408"/>
+            <a:ext cx="11411712" cy="2356104"/>
           </a:xfrm>
           <a:prstGeom prst="rect">
             <a:avLst/>
@@ -5562,22 +5562,22 @@
           <a:p>
             <a:pPr>
               <a:spcBef>
-                <a:spcPts val="600"/>
+                <a:spcPts val="300"/>
               </a:spcBef>
               <a:spcAft>
-                <a:spcPts val="200"/>
+                <a:spcPts val="100"/>
               </a:spcAft>
             </a:pPr>
             <a:r>
-              <a:rPr sz="1200" b="0" i="0">
-                <a:solidFill>
-                  <a:srgbClr val="1B4FA8"/>
-                </a:solidFill>
-              </a:rPr>
-              <a:t>• </a:t>
-            </a:r>
-            <a:r>
-              <a:rPr sz="1300" b="0" i="0">
+              <a:rPr sz="1000" b="0" i="0">
+                <a:solidFill>
+                  <a:srgbClr val="808080"/>
+                </a:solidFill>
+              </a:rPr>
+              <a:t>      – </a:t>
+            </a:r>
+            <a:r>
+              <a:rPr sz="1100" b="0" i="0">
                 <a:solidFill>
                   <a:srgbClr val="1A1A1A"/>
                 </a:solidFill>
@@ -5588,22 +5588,22 @@
           <a:p>
             <a:pPr>
               <a:spcBef>
-                <a:spcPts val="600"/>
+                <a:spcPts val="300"/>
               </a:spcBef>
               <a:spcAft>
-                <a:spcPts val="200"/>
+                <a:spcPts val="100"/>
               </a:spcAft>
             </a:pPr>
             <a:r>
-              <a:rPr sz="1200" b="0" i="0">
-                <a:solidFill>
-                  <a:srgbClr val="1B4FA8"/>
-                </a:solidFill>
-              </a:rPr>
-              <a:t>• </a:t>
-            </a:r>
-            <a:r>
-              <a:rPr sz="1300" b="0" i="0">
+              <a:rPr sz="1000" b="0" i="0">
+                <a:solidFill>
+                  <a:srgbClr val="808080"/>
+                </a:solidFill>
+              </a:rPr>
+              <a:t>      – </a:t>
+            </a:r>
+            <a:r>
+              <a:rPr sz="1100" b="0" i="0">
                 <a:solidFill>
                   <a:srgbClr val="1A1A1A"/>
                 </a:solidFill>
@@ -5614,22 +5614,22 @@
           <a:p>
             <a:pPr>
               <a:spcBef>
-                <a:spcPts val="600"/>
+                <a:spcPts val="300"/>
               </a:spcBef>
               <a:spcAft>
-                <a:spcPts val="200"/>
+                <a:spcPts val="100"/>
               </a:spcAft>
             </a:pPr>
             <a:r>
-              <a:rPr sz="1200" b="0" i="0">
-                <a:solidFill>
-                  <a:srgbClr val="1B4FA8"/>
-                </a:solidFill>
-              </a:rPr>
-              <a:t>• </a:t>
-            </a:r>
-            <a:r>
-              <a:rPr sz="1300" b="0" i="0">
+              <a:rPr sz="1000" b="0" i="0">
+                <a:solidFill>
+                  <a:srgbClr val="808080"/>
+                </a:solidFill>
+              </a:rPr>
+              <a:t>      – </a:t>
+            </a:r>
+            <a:r>
+              <a:rPr sz="1100" b="0" i="0">
                 <a:solidFill>
                   <a:srgbClr val="1A1A1A"/>
                 </a:solidFill>
